--- a/a7/build/out/u5/A7 5.02 Scale Factor Perimeter and Area - Slides.pptx
+++ b/a7/build/out/u5/A7 5.02 Scale Factor Perimeter and Area - Slides.pptx
@@ -3695,7 +3695,7 @@
                 </a:solidFill>
                 <a:latin typeface="Lexend"/>
               </a:rPr>
-              <a:t>A 3 cm by 5 cm rectangle is scaled by k = 4.</a:t>
+              <a:t>A 3 cm by 6 cm rectangle is scaled by k = 4.</a:t>
             </a:r>
           </a:p>
         </p:txBody>
@@ -3993,7 +3993,7 @@
                 </a:solidFill>
                 <a:latin typeface="Lexend"/>
               </a:rPr>
-              <a:t>A 3 cm by 5 cm rectangle is scaled by k = 4.</a:t>
+              <a:t>A 3 cm by 6 cm rectangle is scaled by k = 4.</a:t>
             </a:r>
           </a:p>
         </p:txBody>
@@ -4035,7 +4035,7 @@
       </p:sp>
       <p:pic>
         <p:nvPicPr>
-          <p:cNvPr id="10" name="Picture 9" descr="07432d5bc6086b1b.png"/>
+          <p:cNvPr id="10" name="Picture 9" descr="a391ba38776033d7.png"/>
           <p:cNvPicPr>
             <a:picLocks noChangeAspect="1"/>
           </p:cNvPicPr>
@@ -4049,8 +4049,8 @@
         </p:blipFill>
         <p:spPr>
           <a:xfrm>
-            <a:off x="4184903" y="2830796"/>
-            <a:ext cx="2127504" cy="252984"/>
+            <a:off x="4194047" y="2830796"/>
+            <a:ext cx="2109216" cy="252984"/>
           </a:xfrm>
           <a:prstGeom prst="rect">
             <a:avLst/>
@@ -4059,7 +4059,7 @@
       </p:pic>
       <p:pic>
         <p:nvPicPr>
-          <p:cNvPr id="11" name="Picture 10" descr="1661c325761ef95f.png"/>
+          <p:cNvPr id="11" name="Picture 10" descr="30e6b9ad4e67f136.png"/>
           <p:cNvPicPr>
             <a:picLocks noChangeAspect="1"/>
           </p:cNvPicPr>
@@ -4073,8 +4073,8 @@
         </p:blipFill>
         <p:spPr>
           <a:xfrm>
-            <a:off x="4184903" y="3344384"/>
-            <a:ext cx="3901440" cy="304800"/>
+            <a:off x="4194047" y="3345908"/>
+            <a:ext cx="3880104" cy="301752"/>
           </a:xfrm>
           <a:prstGeom prst="rect">
             <a:avLst/>
@@ -4111,7 +4111,7 @@
                 </a:solidFill>
                 <a:latin typeface="Lexend"/>
               </a:rPr>
-              <a:t>Answer:   P = 64 cm, A = 240 cm</a:t>
+              <a:t>Answer:   P = 72 cm, A = 288 cm</a:t>
             </a:r>
             <a:r>
               <a:rPr sz="3040" b="1" i="0" baseline="30000">
@@ -4383,7 +4383,7 @@
                 </a:solidFill>
                 <a:latin typeface="Lexend"/>
               </a:rPr>
-              <a:t>A figure has area 20 cm</a:t>
+              <a:t>A figure has area 15 cm</a:t>
             </a:r>
             <a:r>
               <a:rPr sz="2280" b="0" i="0" baseline="30000">
@@ -4401,7 +4401,7 @@
                 </a:solidFill>
                 <a:latin typeface="Lexend"/>
               </a:rPr>
-              <a:t>. Its scale copy has area 180 cm</a:t>
+              <a:t>. Its scale copy has area 240 cm</a:t>
             </a:r>
             <a:r>
               <a:rPr sz="2280" b="0" i="0" baseline="30000">
@@ -4419,7 +4419,7 @@
                 </a:solidFill>
                 <a:latin typeface="Lexend"/>
               </a:rPr>
-              <a:t>. A side of the original is 4 cm.</a:t>
+              <a:t>. A side of the original is 3 cm.</a:t>
             </a:r>
           </a:p>
         </p:txBody>
@@ -4689,7 +4689,7 @@
       </p:sp>
       <p:pic>
         <p:nvPicPr>
-          <p:cNvPr id="8" name="Picture 7" descr="89977b4e213f39d0.png"/>
+          <p:cNvPr id="8" name="Picture 7" descr="c237a4a459a457bd.png"/>
           <p:cNvPicPr>
             <a:picLocks noChangeAspect="1"/>
           </p:cNvPicPr>
@@ -4704,7 +4704,7 @@
         <p:spPr>
           <a:xfrm>
             <a:off x="1828800" y="1920240"/>
-            <a:ext cx="2020824" cy="676656"/>
+            <a:ext cx="2252472" cy="676656"/>
           </a:xfrm>
           <a:prstGeom prst="rect">
             <a:avLst/>
@@ -4713,7 +4713,7 @@
       </p:pic>
       <p:pic>
         <p:nvPicPr>
-          <p:cNvPr id="9" name="Picture 8" descr="0fb83c0532752ce4.png"/>
+          <p:cNvPr id="9" name="Picture 8" descr="c1463e20ee37a92e.png"/>
           <p:cNvPicPr>
             <a:picLocks noChangeAspect="1"/>
           </p:cNvPicPr>
@@ -4728,7 +4728,7 @@
         <p:spPr>
           <a:xfrm>
             <a:off x="1828800" y="2871215"/>
-            <a:ext cx="4023360" cy="478536"/>
+            <a:ext cx="4255008" cy="478536"/>
           </a:xfrm>
           <a:prstGeom prst="rect">
             <a:avLst/>
@@ -4765,7 +4765,7 @@
                 </a:solidFill>
                 <a:latin typeface="Lexend"/>
               </a:rPr>
-              <a:t>Answer:   k = 3; the side is 12 cm</a:t>
+              <a:t>Answer:   k = 4; the side is 12 cm</a:t>
             </a:r>
           </a:p>
         </p:txBody>
@@ -7183,7 +7183,7 @@
         <p:spPr>
           <a:xfrm>
             <a:off x="1874519" y="1440180"/>
-            <a:ext cx="9341736" cy="457200"/>
+            <a:ext cx="9343784" cy="457200"/>
           </a:xfrm>
           <a:prstGeom prst="rect">
             <a:avLst/>
@@ -7204,7 +7204,7 @@
                 </a:solidFill>
                 <a:latin typeface="Lexend"/>
               </a:rPr>
-              <a:t>1.   A 4 cm side becomes 10 cm in the copy. Find the scale factor.</a:t>
+              <a:t>1.   A 20 cm side becomes 8 cm in the copy. Find the scale factor.</a:t>
             </a:r>
           </a:p>
         </p:txBody>
@@ -11902,7 +11902,7 @@
         <p:spPr>
           <a:xfrm>
             <a:off x="1874519" y="1440180"/>
-            <a:ext cx="9341736" cy="457200"/>
+            <a:ext cx="9343784" cy="457200"/>
           </a:xfrm>
           <a:prstGeom prst="rect">
             <a:avLst/>
@@ -11923,7 +11923,7 @@
                 </a:solidFill>
                 <a:latin typeface="Lexend"/>
               </a:rPr>
-              <a:t>1.   A 4 cm side becomes 10 cm in the copy. Find the scale factor.</a:t>
+              <a:t>1.   A 20 cm side becomes 8 cm in the copy. Find the scale factor.</a:t>
             </a:r>
           </a:p>
         </p:txBody>
@@ -11937,7 +11937,7 @@
         <p:spPr>
           <a:xfrm>
             <a:off x="2606040" y="1897380"/>
-            <a:ext cx="1178022" cy="457200"/>
+            <a:ext cx="1227429" cy="457200"/>
           </a:xfrm>
           <a:prstGeom prst="rect">
             <a:avLst/>
@@ -11958,7 +11958,7 @@
                 </a:solidFill>
                 <a:latin typeface="Lexend"/>
               </a:rPr>
-              <a:t>k = 2.5</a:t>
+              <a:t>k = 0.4</a:t>
             </a:r>
           </a:p>
         </p:txBody>

--- a/a7/build/out/u5/A7 5.02 Scale Factor Perimeter and Area - Slides.pptx
+++ b/a7/build/out/u5/A7 5.02 Scale Factor Perimeter and Area - Slides.pptx
@@ -3673,21 +3673,21 @@
         </p:nvSpPr>
         <p:spPr>
           <a:xfrm>
-            <a:off x="777240" y="1600200"/>
-            <a:ext cx="10607040" cy="429370"/>
-          </a:xfrm>
-          <a:prstGeom prst="rect">
-            <a:avLst/>
-          </a:prstGeom>
-          <a:noFill/>
-        </p:spPr>
-        <p:txBody>
-          <a:bodyPr wrap="square" lIns="45720" rIns="45720" tIns="18288" bIns="18288" anchor="t">
-            <a:spAutoFit/>
-          </a:bodyPr>
-          <a:lstStyle/>
-          <a:p>
-            <a:pPr algn="ctr"/>
+            <a:off x="2844186" y="1577340"/>
+            <a:ext cx="5836229" cy="457200"/>
+          </a:xfrm>
+          <a:prstGeom prst="rect">
+            <a:avLst/>
+          </a:prstGeom>
+          <a:noFill/>
+        </p:spPr>
+        <p:txBody>
+          <a:bodyPr wrap="none" lIns="45720" rIns="45720" tIns="18288" bIns="18288" anchor="ctr">
+            <a:noAutofit/>
+          </a:bodyPr>
+          <a:lstStyle/>
+          <a:p>
+            <a:pPr algn="l"/>
             <a:r>
               <a:rPr sz="2280" b="0" i="0">
                 <a:solidFill>
@@ -3695,20 +3695,79 @@
                 </a:solidFill>
                 <a:latin typeface="Lexend"/>
               </a:rPr>
-              <a:t>A 3 cm by 6 cm rectangle is scaled by k = 4.</a:t>
-            </a:r>
-          </a:p>
-        </p:txBody>
-      </p:sp>
-      <p:sp>
-        <p:nvSpPr>
-          <p:cNvPr id="9" name="TextBox 8"/>
-          <p:cNvSpPr txBox="1"/>
-          <p:nvPr/>
-        </p:nvSpPr>
-        <p:spPr>
-          <a:xfrm>
-            <a:off x="777240" y="2139298"/>
+              <a:t>A 3 cm by 6 cm rectangle is scaled by </a:t>
+            </a:r>
+          </a:p>
+        </p:txBody>
+      </p:sp>
+      <p:pic>
+        <p:nvPicPr>
+          <p:cNvPr id="9" name="Picture 8" descr="dc6c9152a78ca292.png"/>
+          <p:cNvPicPr>
+            <a:picLocks noChangeAspect="1"/>
+          </p:cNvPicPr>
+          <p:nvPr/>
+        </p:nvPicPr>
+        <p:blipFill>
+          <a:blip r:embed="rId2"/>
+          <a:stretch>
+            <a:fillRect/>
+          </a:stretch>
+        </p:blipFill>
+        <p:spPr>
+          <a:xfrm>
+            <a:off x="8543255" y="1688592"/>
+            <a:ext cx="630936" cy="231648"/>
+          </a:xfrm>
+          <a:prstGeom prst="rect">
+            <a:avLst/>
+          </a:prstGeom>
+        </p:spPr>
+      </p:pic>
+      <p:sp>
+        <p:nvSpPr>
+          <p:cNvPr id="10" name="TextBox 9"/>
+          <p:cNvSpPr txBox="1"/>
+          <p:nvPr/>
+        </p:nvSpPr>
+        <p:spPr>
+          <a:xfrm>
+            <a:off x="9174191" y="1577340"/>
+            <a:ext cx="280301" cy="457200"/>
+          </a:xfrm>
+          <a:prstGeom prst="rect">
+            <a:avLst/>
+          </a:prstGeom>
+          <a:noFill/>
+        </p:spPr>
+        <p:txBody>
+          <a:bodyPr wrap="none" lIns="45720" rIns="45720" tIns="18288" bIns="18288" anchor="ctr">
+            <a:noAutofit/>
+          </a:bodyPr>
+          <a:lstStyle/>
+          <a:p>
+            <a:pPr algn="l"/>
+            <a:r>
+              <a:rPr sz="2280" b="0" i="0">
+                <a:solidFill>
+                  <a:srgbClr val="1A1A1A"/>
+                </a:solidFill>
+                <a:latin typeface="Lexend"/>
+              </a:rPr>
+              <a:t>.</a:t>
+            </a:r>
+          </a:p>
+        </p:txBody>
+      </p:sp>
+      <p:sp>
+        <p:nvSpPr>
+          <p:cNvPr id="11" name="TextBox 10"/>
+          <p:cNvSpPr txBox="1"/>
+          <p:nvPr/>
+        </p:nvSpPr>
+        <p:spPr>
+          <a:xfrm>
+            <a:off x="777240" y="2286000"/>
             <a:ext cx="10607040" cy="429370"/>
           </a:xfrm>
           <a:prstGeom prst="rect">
@@ -3971,21 +4030,21 @@
         </p:nvSpPr>
         <p:spPr>
           <a:xfrm>
-            <a:off x="777240" y="1600200"/>
-            <a:ext cx="10607040" cy="429370"/>
-          </a:xfrm>
-          <a:prstGeom prst="rect">
-            <a:avLst/>
-          </a:prstGeom>
-          <a:noFill/>
-        </p:spPr>
-        <p:txBody>
-          <a:bodyPr wrap="square" lIns="45720" rIns="45720" tIns="18288" bIns="18288" anchor="t">
-            <a:spAutoFit/>
-          </a:bodyPr>
-          <a:lstStyle/>
-          <a:p>
-            <a:pPr algn="ctr"/>
+            <a:off x="2842662" y="1577340"/>
+            <a:ext cx="5836229" cy="457200"/>
+          </a:xfrm>
+          <a:prstGeom prst="rect">
+            <a:avLst/>
+          </a:prstGeom>
+          <a:noFill/>
+        </p:spPr>
+        <p:txBody>
+          <a:bodyPr wrap="none" lIns="45720" rIns="45720" tIns="18288" bIns="18288" anchor="ctr">
+            <a:noAutofit/>
+          </a:bodyPr>
+          <a:lstStyle/>
+          <a:p>
+            <a:pPr algn="l"/>
             <a:r>
               <a:rPr sz="2280" b="0" i="0">
                 <a:solidFill>
@@ -3993,49 +4052,14 @@
                 </a:solidFill>
                 <a:latin typeface="Lexend"/>
               </a:rPr>
-              <a:t>A 3 cm by 6 cm rectangle is scaled by k = 4.</a:t>
-            </a:r>
-          </a:p>
-        </p:txBody>
-      </p:sp>
-      <p:sp>
-        <p:nvSpPr>
-          <p:cNvPr id="9" name="TextBox 8"/>
-          <p:cNvSpPr txBox="1"/>
-          <p:nvPr/>
-        </p:nvSpPr>
-        <p:spPr>
-          <a:xfrm>
-            <a:off x="777240" y="2139298"/>
-            <a:ext cx="10607040" cy="429370"/>
-          </a:xfrm>
-          <a:prstGeom prst="rect">
-            <a:avLst/>
-          </a:prstGeom>
-          <a:noFill/>
-        </p:spPr>
-        <p:txBody>
-          <a:bodyPr wrap="square" lIns="45720" rIns="45720" tIns="18288" bIns="18288" anchor="t">
-            <a:spAutoFit/>
-          </a:bodyPr>
-          <a:lstStyle/>
-          <a:p>
-            <a:pPr algn="ctr"/>
-            <a:r>
-              <a:rPr sz="2280" b="0" i="0">
-                <a:solidFill>
-                  <a:srgbClr val="1A1A1A"/>
-                </a:solidFill>
-                <a:latin typeface="Lexend"/>
-              </a:rPr>
-              <a:t>Find the copy's perimeter and area.</a:t>
+              <a:t>A 3 cm by 6 cm rectangle is scaled by </a:t>
             </a:r>
           </a:p>
         </p:txBody>
       </p:sp>
       <p:pic>
         <p:nvPicPr>
-          <p:cNvPr id="10" name="Picture 9" descr="a391ba38776033d7.png"/>
+          <p:cNvPr id="9" name="Picture 8" descr="5706b37a0e4384e1.png"/>
           <p:cNvPicPr>
             <a:picLocks noChangeAspect="1"/>
           </p:cNvPicPr>
@@ -4049,17 +4073,87 @@
         </p:blipFill>
         <p:spPr>
           <a:xfrm>
-            <a:off x="4194047" y="2830796"/>
-            <a:ext cx="2109216" cy="252984"/>
+            <a:off x="8541731" y="1688592"/>
+            <a:ext cx="633984" cy="231648"/>
           </a:xfrm>
           <a:prstGeom prst="rect">
             <a:avLst/>
           </a:prstGeom>
         </p:spPr>
       </p:pic>
+      <p:sp>
+        <p:nvSpPr>
+          <p:cNvPr id="10" name="TextBox 9"/>
+          <p:cNvSpPr txBox="1"/>
+          <p:nvPr/>
+        </p:nvSpPr>
+        <p:spPr>
+          <a:xfrm>
+            <a:off x="9175715" y="1577340"/>
+            <a:ext cx="280301" cy="457200"/>
+          </a:xfrm>
+          <a:prstGeom prst="rect">
+            <a:avLst/>
+          </a:prstGeom>
+          <a:noFill/>
+        </p:spPr>
+        <p:txBody>
+          <a:bodyPr wrap="none" lIns="45720" rIns="45720" tIns="18288" bIns="18288" anchor="ctr">
+            <a:noAutofit/>
+          </a:bodyPr>
+          <a:lstStyle/>
+          <a:p>
+            <a:pPr algn="l"/>
+            <a:r>
+              <a:rPr sz="2280" b="0" i="0">
+                <a:solidFill>
+                  <a:srgbClr val="1A1A1A"/>
+                </a:solidFill>
+                <a:latin typeface="Lexend"/>
+              </a:rPr>
+              <a:t>.</a:t>
+            </a:r>
+          </a:p>
+        </p:txBody>
+      </p:sp>
+      <p:sp>
+        <p:nvSpPr>
+          <p:cNvPr id="11" name="TextBox 10"/>
+          <p:cNvSpPr txBox="1"/>
+          <p:nvPr/>
+        </p:nvSpPr>
+        <p:spPr>
+          <a:xfrm>
+            <a:off x="777240" y="2286000"/>
+            <a:ext cx="10607040" cy="429370"/>
+          </a:xfrm>
+          <a:prstGeom prst="rect">
+            <a:avLst/>
+          </a:prstGeom>
+          <a:noFill/>
+        </p:spPr>
+        <p:txBody>
+          <a:bodyPr wrap="square" lIns="45720" rIns="45720" tIns="18288" bIns="18288" anchor="t">
+            <a:spAutoFit/>
+          </a:bodyPr>
+          <a:lstStyle/>
+          <a:p>
+            <a:pPr algn="ctr"/>
+            <a:r>
+              <a:rPr sz="2280" b="0" i="0">
+                <a:solidFill>
+                  <a:srgbClr val="1A1A1A"/>
+                </a:solidFill>
+                <a:latin typeface="Lexend"/>
+              </a:rPr>
+              <a:t>Find the copy's perimeter and area.</a:t>
+            </a:r>
+          </a:p>
+        </p:txBody>
+      </p:sp>
       <p:pic>
         <p:nvPicPr>
-          <p:cNvPr id="11" name="Picture 10" descr="30e6b9ad4e67f136.png"/>
+          <p:cNvPr id="12" name="Picture 11" descr="a391ba38776033d7.png"/>
           <p:cNvPicPr>
             <a:picLocks noChangeAspect="1"/>
           </p:cNvPicPr>
@@ -4073,7 +4167,31 @@
         </p:blipFill>
         <p:spPr>
           <a:xfrm>
-            <a:off x="4194047" y="3345908"/>
+            <a:off x="4194047" y="2992166"/>
+            <a:ext cx="2109216" cy="252984"/>
+          </a:xfrm>
+          <a:prstGeom prst="rect">
+            <a:avLst/>
+          </a:prstGeom>
+        </p:spPr>
+      </p:pic>
+      <p:pic>
+        <p:nvPicPr>
+          <p:cNvPr id="13" name="Picture 12" descr="30e6b9ad4e67f136.png"/>
+          <p:cNvPicPr>
+            <a:picLocks noChangeAspect="1"/>
+          </p:cNvPicPr>
+          <p:nvPr/>
+        </p:nvPicPr>
+        <p:blipFill>
+          <a:blip r:embed="rId4"/>
+          <a:stretch>
+            <a:fillRect/>
+          </a:stretch>
+        </p:blipFill>
+        <p:spPr>
+          <a:xfrm>
+            <a:off x="4194047" y="3482894"/>
             <a:ext cx="3880104" cy="301752"/>
           </a:xfrm>
           <a:prstGeom prst="rect">
@@ -4083,7 +4201,7 @@
       </p:pic>
       <p:sp>
         <p:nvSpPr>
-          <p:cNvPr id="12" name="TextBox 11"/>
+          <p:cNvPr id="14" name="TextBox 13"/>
           <p:cNvSpPr txBox="1"/>
           <p:nvPr/>
         </p:nvSpPr>
@@ -4361,8 +4479,196 @@
         </p:nvSpPr>
         <p:spPr>
           <a:xfrm>
-            <a:off x="777240" y="2103120"/>
-            <a:ext cx="10607040" cy="858740"/>
+            <a:off x="4179745" y="1714500"/>
+            <a:ext cx="2863359" cy="457200"/>
+          </a:xfrm>
+          <a:prstGeom prst="rect">
+            <a:avLst/>
+          </a:prstGeom>
+          <a:noFill/>
+        </p:spPr>
+        <p:txBody>
+          <a:bodyPr wrap="none" lIns="45720" rIns="45720" tIns="18288" bIns="18288" anchor="ctr">
+            <a:noAutofit/>
+          </a:bodyPr>
+          <a:lstStyle/>
+          <a:p>
+            <a:pPr algn="l"/>
+            <a:r>
+              <a:rPr sz="2280" b="0" i="0">
+                <a:solidFill>
+                  <a:srgbClr val="1A1A1A"/>
+                </a:solidFill>
+                <a:latin typeface="Lexend"/>
+              </a:rPr>
+              <a:t>A figure has area </a:t>
+            </a:r>
+          </a:p>
+        </p:txBody>
+      </p:sp>
+      <p:pic>
+        <p:nvPicPr>
+          <p:cNvPr id="9" name="Picture 8" descr="acf05f3147d3a63d.png"/>
+          <p:cNvPicPr>
+            <a:picLocks noChangeAspect="1"/>
+          </p:cNvPicPr>
+          <p:nvPr/>
+        </p:nvPicPr>
+        <p:blipFill>
+          <a:blip r:embed="rId2"/>
+          <a:stretch>
+            <a:fillRect/>
+          </a:stretch>
+        </p:blipFill>
+        <p:spPr>
+          <a:xfrm>
+            <a:off x="6905945" y="1786128"/>
+            <a:ext cx="932688" cy="277368"/>
+          </a:xfrm>
+          <a:prstGeom prst="rect">
+            <a:avLst/>
+          </a:prstGeom>
+        </p:spPr>
+      </p:pic>
+      <p:sp>
+        <p:nvSpPr>
+          <p:cNvPr id="10" name="TextBox 9"/>
+          <p:cNvSpPr txBox="1"/>
+          <p:nvPr/>
+        </p:nvSpPr>
+        <p:spPr>
+          <a:xfrm>
+            <a:off x="7838633" y="1714500"/>
+            <a:ext cx="280301" cy="457200"/>
+          </a:xfrm>
+          <a:prstGeom prst="rect">
+            <a:avLst/>
+          </a:prstGeom>
+          <a:noFill/>
+        </p:spPr>
+        <p:txBody>
+          <a:bodyPr wrap="none" lIns="45720" rIns="45720" tIns="18288" bIns="18288" anchor="ctr">
+            <a:noAutofit/>
+          </a:bodyPr>
+          <a:lstStyle/>
+          <a:p>
+            <a:pPr algn="l"/>
+            <a:r>
+              <a:rPr sz="2280" b="0" i="0">
+                <a:solidFill>
+                  <a:srgbClr val="1A1A1A"/>
+                </a:solidFill>
+                <a:latin typeface="Lexend"/>
+              </a:rPr>
+              <a:t>.</a:t>
+            </a:r>
+          </a:p>
+        </p:txBody>
+      </p:sp>
+      <p:sp>
+        <p:nvSpPr>
+          <p:cNvPr id="11" name="TextBox 10"/>
+          <p:cNvSpPr txBox="1"/>
+          <p:nvPr/>
+        </p:nvSpPr>
+        <p:spPr>
+          <a:xfrm>
+            <a:off x="3623004" y="2400300"/>
+            <a:ext cx="3745193" cy="457200"/>
+          </a:xfrm>
+          <a:prstGeom prst="rect">
+            <a:avLst/>
+          </a:prstGeom>
+          <a:noFill/>
+        </p:spPr>
+        <p:txBody>
+          <a:bodyPr wrap="none" lIns="45720" rIns="45720" tIns="18288" bIns="18288" anchor="ctr">
+            <a:noAutofit/>
+          </a:bodyPr>
+          <a:lstStyle/>
+          <a:p>
+            <a:pPr algn="l"/>
+            <a:r>
+              <a:rPr sz="2280" b="0" i="0">
+                <a:solidFill>
+                  <a:srgbClr val="1A1A1A"/>
+                </a:solidFill>
+                <a:latin typeface="Lexend"/>
+              </a:rPr>
+              <a:t>Its scale copy has area </a:t>
+            </a:r>
+          </a:p>
+        </p:txBody>
+      </p:sp>
+      <p:pic>
+        <p:nvPicPr>
+          <p:cNvPr id="12" name="Picture 11" descr="cd92977597ebedac.png"/>
+          <p:cNvPicPr>
+            <a:picLocks noChangeAspect="1"/>
+          </p:cNvPicPr>
+          <p:nvPr/>
+        </p:nvPicPr>
+        <p:blipFill>
+          <a:blip r:embed="rId3"/>
+          <a:stretch>
+            <a:fillRect/>
+          </a:stretch>
+        </p:blipFill>
+        <p:spPr>
+          <a:xfrm>
+            <a:off x="7231038" y="2471928"/>
+            <a:ext cx="1164336" cy="277368"/>
+          </a:xfrm>
+          <a:prstGeom prst="rect">
+            <a:avLst/>
+          </a:prstGeom>
+        </p:spPr>
+      </p:pic>
+      <p:sp>
+        <p:nvSpPr>
+          <p:cNvPr id="13" name="TextBox 12"/>
+          <p:cNvSpPr txBox="1"/>
+          <p:nvPr/>
+        </p:nvSpPr>
+        <p:spPr>
+          <a:xfrm>
+            <a:off x="8395374" y="2400300"/>
+            <a:ext cx="280301" cy="457200"/>
+          </a:xfrm>
+          <a:prstGeom prst="rect">
+            <a:avLst/>
+          </a:prstGeom>
+          <a:noFill/>
+        </p:spPr>
+        <p:txBody>
+          <a:bodyPr wrap="none" lIns="45720" rIns="45720" tIns="18288" bIns="18288" anchor="ctr">
+            <a:noAutofit/>
+          </a:bodyPr>
+          <a:lstStyle/>
+          <a:p>
+            <a:pPr algn="l"/>
+            <a:r>
+              <a:rPr sz="2280" b="0" i="0">
+                <a:solidFill>
+                  <a:srgbClr val="1A1A1A"/>
+                </a:solidFill>
+                <a:latin typeface="Lexend"/>
+              </a:rPr>
+              <a:t>.</a:t>
+            </a:r>
+          </a:p>
+        </p:txBody>
+      </p:sp>
+      <p:sp>
+        <p:nvSpPr>
+          <p:cNvPr id="14" name="TextBox 13"/>
+          <p:cNvSpPr txBox="1"/>
+          <p:nvPr/>
+        </p:nvSpPr>
+        <p:spPr>
+          <a:xfrm>
+            <a:off x="777240" y="3108960"/>
+            <a:ext cx="10607040" cy="429370"/>
           </a:xfrm>
           <a:prstGeom prst="rect">
             <a:avLst/>
@@ -4383,56 +4689,20 @@
                 </a:solidFill>
                 <a:latin typeface="Lexend"/>
               </a:rPr>
-              <a:t>A figure has area 15 cm</a:t>
-            </a:r>
-            <a:r>
-              <a:rPr sz="2280" b="0" i="0" baseline="30000">
-                <a:solidFill>
-                  <a:srgbClr val="1A1A1A"/>
-                </a:solidFill>
-                <a:latin typeface="Lexend"/>
-              </a:rPr>
-              <a:t>2</a:t>
-            </a:r>
-            <a:r>
-              <a:rPr sz="2280" b="0" i="0">
-                <a:solidFill>
-                  <a:srgbClr val="1A1A1A"/>
-                </a:solidFill>
-                <a:latin typeface="Lexend"/>
-              </a:rPr>
-              <a:t>. Its scale copy has area 240 cm</a:t>
-            </a:r>
-            <a:r>
-              <a:rPr sz="2280" b="0" i="0" baseline="30000">
-                <a:solidFill>
-                  <a:srgbClr val="1A1A1A"/>
-                </a:solidFill>
-                <a:latin typeface="Lexend"/>
-              </a:rPr>
-              <a:t>2</a:t>
-            </a:r>
-            <a:r>
-              <a:rPr sz="2280" b="0" i="0">
-                <a:solidFill>
-                  <a:srgbClr val="1A1A1A"/>
-                </a:solidFill>
-                <a:latin typeface="Lexend"/>
-              </a:rPr>
-              <a:t>. A side of the original is 3 cm.</a:t>
-            </a:r>
-          </a:p>
-        </p:txBody>
-      </p:sp>
-      <p:sp>
-        <p:nvSpPr>
-          <p:cNvPr id="9" name="TextBox 8"/>
-          <p:cNvSpPr txBox="1"/>
-          <p:nvPr/>
-        </p:nvSpPr>
-        <p:spPr>
-          <a:xfrm>
-            <a:off x="777240" y="3254468"/>
+              <a:t>A side of the original is 3 cm.</a:t>
+            </a:r>
+          </a:p>
+        </p:txBody>
+      </p:sp>
+      <p:sp>
+        <p:nvSpPr>
+          <p:cNvPr id="15" name="TextBox 14"/>
+          <p:cNvSpPr txBox="1"/>
+          <p:nvPr/>
+        </p:nvSpPr>
+        <p:spPr>
+          <a:xfrm>
+            <a:off x="777240" y="3830938"/>
             <a:ext cx="10607040" cy="429370"/>
           </a:xfrm>
           <a:prstGeom prst="rect">
@@ -5006,8 +5276,196 @@
         </p:nvSpPr>
         <p:spPr>
           <a:xfrm>
-            <a:off x="777240" y="1600200"/>
-            <a:ext cx="10607040" cy="858740"/>
+            <a:off x="4182793" y="1577340"/>
+            <a:ext cx="2863359" cy="457200"/>
+          </a:xfrm>
+          <a:prstGeom prst="rect">
+            <a:avLst/>
+          </a:prstGeom>
+          <a:noFill/>
+        </p:spPr>
+        <p:txBody>
+          <a:bodyPr wrap="none" lIns="45720" rIns="45720" tIns="18288" bIns="18288" anchor="ctr">
+            <a:noAutofit/>
+          </a:bodyPr>
+          <a:lstStyle/>
+          <a:p>
+            <a:pPr algn="l"/>
+            <a:r>
+              <a:rPr sz="2280" b="0" i="0">
+                <a:solidFill>
+                  <a:srgbClr val="1A1A1A"/>
+                </a:solidFill>
+                <a:latin typeface="Lexend"/>
+              </a:rPr>
+              <a:t>A figure has area </a:t>
+            </a:r>
+          </a:p>
+        </p:txBody>
+      </p:sp>
+      <p:pic>
+        <p:nvPicPr>
+          <p:cNvPr id="9" name="Picture 8" descr="7ced559aec939d71.png"/>
+          <p:cNvPicPr>
+            <a:picLocks noChangeAspect="1"/>
+          </p:cNvPicPr>
+          <p:nvPr/>
+        </p:nvPicPr>
+        <p:blipFill>
+          <a:blip r:embed="rId2"/>
+          <a:stretch>
+            <a:fillRect/>
+          </a:stretch>
+        </p:blipFill>
+        <p:spPr>
+          <a:xfrm>
+            <a:off x="6908993" y="1648968"/>
+            <a:ext cx="926592" cy="277368"/>
+          </a:xfrm>
+          <a:prstGeom prst="rect">
+            <a:avLst/>
+          </a:prstGeom>
+        </p:spPr>
+      </p:pic>
+      <p:sp>
+        <p:nvSpPr>
+          <p:cNvPr id="10" name="TextBox 9"/>
+          <p:cNvSpPr txBox="1"/>
+          <p:nvPr/>
+        </p:nvSpPr>
+        <p:spPr>
+          <a:xfrm>
+            <a:off x="7835585" y="1577340"/>
+            <a:ext cx="280301" cy="457200"/>
+          </a:xfrm>
+          <a:prstGeom prst="rect">
+            <a:avLst/>
+          </a:prstGeom>
+          <a:noFill/>
+        </p:spPr>
+        <p:txBody>
+          <a:bodyPr wrap="none" lIns="45720" rIns="45720" tIns="18288" bIns="18288" anchor="ctr">
+            <a:noAutofit/>
+          </a:bodyPr>
+          <a:lstStyle/>
+          <a:p>
+            <a:pPr algn="l"/>
+            <a:r>
+              <a:rPr sz="2280" b="0" i="0">
+                <a:solidFill>
+                  <a:srgbClr val="1A1A1A"/>
+                </a:solidFill>
+                <a:latin typeface="Lexend"/>
+              </a:rPr>
+              <a:t>.</a:t>
+            </a:r>
+          </a:p>
+        </p:txBody>
+      </p:sp>
+      <p:sp>
+        <p:nvSpPr>
+          <p:cNvPr id="11" name="TextBox 10"/>
+          <p:cNvSpPr txBox="1"/>
+          <p:nvPr/>
+        </p:nvSpPr>
+        <p:spPr>
+          <a:xfrm>
+            <a:off x="3624528" y="2263140"/>
+            <a:ext cx="3745193" cy="457200"/>
+          </a:xfrm>
+          <a:prstGeom prst="rect">
+            <a:avLst/>
+          </a:prstGeom>
+          <a:noFill/>
+        </p:spPr>
+        <p:txBody>
+          <a:bodyPr wrap="none" lIns="45720" rIns="45720" tIns="18288" bIns="18288" anchor="ctr">
+            <a:noAutofit/>
+          </a:bodyPr>
+          <a:lstStyle/>
+          <a:p>
+            <a:pPr algn="l"/>
+            <a:r>
+              <a:rPr sz="2280" b="0" i="0">
+                <a:solidFill>
+                  <a:srgbClr val="1A1A1A"/>
+                </a:solidFill>
+                <a:latin typeface="Lexend"/>
+              </a:rPr>
+              <a:t>Its scale copy has area </a:t>
+            </a:r>
+          </a:p>
+        </p:txBody>
+      </p:sp>
+      <p:pic>
+        <p:nvPicPr>
+          <p:cNvPr id="12" name="Picture 11" descr="d10548f7154d5574.png"/>
+          <p:cNvPicPr>
+            <a:picLocks noChangeAspect="1"/>
+          </p:cNvPicPr>
+          <p:nvPr/>
+        </p:nvPicPr>
+        <p:blipFill>
+          <a:blip r:embed="rId3"/>
+          <a:stretch>
+            <a:fillRect/>
+          </a:stretch>
+        </p:blipFill>
+        <p:spPr>
+          <a:xfrm>
+            <a:off x="7232562" y="2334768"/>
+            <a:ext cx="1161288" cy="277368"/>
+          </a:xfrm>
+          <a:prstGeom prst="rect">
+            <a:avLst/>
+          </a:prstGeom>
+        </p:spPr>
+      </p:pic>
+      <p:sp>
+        <p:nvSpPr>
+          <p:cNvPr id="13" name="TextBox 12"/>
+          <p:cNvSpPr txBox="1"/>
+          <p:nvPr/>
+        </p:nvSpPr>
+        <p:spPr>
+          <a:xfrm>
+            <a:off x="8393850" y="2263140"/>
+            <a:ext cx="280301" cy="457200"/>
+          </a:xfrm>
+          <a:prstGeom prst="rect">
+            <a:avLst/>
+          </a:prstGeom>
+          <a:noFill/>
+        </p:spPr>
+        <p:txBody>
+          <a:bodyPr wrap="none" lIns="45720" rIns="45720" tIns="18288" bIns="18288" anchor="ctr">
+            <a:noAutofit/>
+          </a:bodyPr>
+          <a:lstStyle/>
+          <a:p>
+            <a:pPr algn="l"/>
+            <a:r>
+              <a:rPr sz="2280" b="0" i="0">
+                <a:solidFill>
+                  <a:srgbClr val="1A1A1A"/>
+                </a:solidFill>
+                <a:latin typeface="Lexend"/>
+              </a:rPr>
+              <a:t>.</a:t>
+            </a:r>
+          </a:p>
+        </p:txBody>
+      </p:sp>
+      <p:sp>
+        <p:nvSpPr>
+          <p:cNvPr id="14" name="TextBox 13"/>
+          <p:cNvSpPr txBox="1"/>
+          <p:nvPr/>
+        </p:nvSpPr>
+        <p:spPr>
+          <a:xfrm>
+            <a:off x="777240" y="2971800"/>
+            <a:ext cx="10607040" cy="429370"/>
           </a:xfrm>
           <a:prstGeom prst="rect">
             <a:avLst/>
@@ -5028,17 +5486,93 @@
                 </a:solidFill>
                 <a:latin typeface="Lexend"/>
               </a:rPr>
-              <a:t>A figure has area 12 cm</a:t>
-            </a:r>
-            <a:r>
-              <a:rPr sz="2280" b="0" i="0" baseline="30000">
+              <a:t>A side of the original is 2 cm.</a:t>
+            </a:r>
+          </a:p>
+        </p:txBody>
+      </p:sp>
+      <p:sp>
+        <p:nvSpPr>
+          <p:cNvPr id="15" name="TextBox 14"/>
+          <p:cNvSpPr txBox="1"/>
+          <p:nvPr/>
+        </p:nvSpPr>
+        <p:spPr>
+          <a:xfrm>
+            <a:off x="2862771" y="3488038"/>
+            <a:ext cx="943575" cy="457200"/>
+          </a:xfrm>
+          <a:prstGeom prst="rect">
+            <a:avLst/>
+          </a:prstGeom>
+          <a:noFill/>
+        </p:spPr>
+        <p:txBody>
+          <a:bodyPr wrap="none" lIns="45720" rIns="45720" tIns="18288" bIns="18288" anchor="ctr">
+            <a:noAutofit/>
+          </a:bodyPr>
+          <a:lstStyle/>
+          <a:p>
+            <a:pPr algn="l"/>
+            <a:r>
+              <a:rPr sz="2280" b="0" i="0">
                 <a:solidFill>
                   <a:srgbClr val="1A1A1A"/>
                 </a:solidFill>
                 <a:latin typeface="Lexend"/>
               </a:rPr>
-              <a:t>2</a:t>
-            </a:r>
+              <a:t>Find </a:t>
+            </a:r>
+          </a:p>
+        </p:txBody>
+      </p:sp>
+      <p:pic>
+        <p:nvPicPr>
+          <p:cNvPr id="16" name="Picture 15" descr="15aa4a684a6a761c.png"/>
+          <p:cNvPicPr>
+            <a:picLocks noChangeAspect="1"/>
+          </p:cNvPicPr>
+          <p:nvPr/>
+        </p:nvPicPr>
+        <p:blipFill>
+          <a:blip r:embed="rId4"/>
+          <a:stretch>
+            <a:fillRect/>
+          </a:stretch>
+        </p:blipFill>
+        <p:spPr>
+          <a:xfrm>
+            <a:off x="3669186" y="3599290"/>
+            <a:ext cx="155448" cy="231648"/>
+          </a:xfrm>
+          <a:prstGeom prst="rect">
+            <a:avLst/>
+          </a:prstGeom>
+        </p:spPr>
+      </p:pic>
+      <p:sp>
+        <p:nvSpPr>
+          <p:cNvPr id="17" name="TextBox 16"/>
+          <p:cNvSpPr txBox="1"/>
+          <p:nvPr/>
+        </p:nvSpPr>
+        <p:spPr>
+          <a:xfrm>
+            <a:off x="3824634" y="3488038"/>
+            <a:ext cx="5611274" cy="457200"/>
+          </a:xfrm>
+          <a:prstGeom prst="rect">
+            <a:avLst/>
+          </a:prstGeom>
+          <a:noFill/>
+        </p:spPr>
+        <p:txBody>
+          <a:bodyPr wrap="none" lIns="45720" rIns="45720" tIns="18288" bIns="18288" anchor="ctr">
+            <a:noAutofit/>
+          </a:bodyPr>
+          <a:lstStyle/>
+          <a:p>
+            <a:pPr algn="l"/>
             <a:r>
               <a:rPr sz="2280" b="0" i="0">
                 <a:solidFill>
@@ -5046,60 +5580,7 @@
                 </a:solidFill>
                 <a:latin typeface="Lexend"/>
               </a:rPr>
-              <a:t>. Its scale copy has area 300 cm</a:t>
-            </a:r>
-            <a:r>
-              <a:rPr sz="2280" b="0" i="0" baseline="30000">
-                <a:solidFill>
-                  <a:srgbClr val="1A1A1A"/>
-                </a:solidFill>
-                <a:latin typeface="Lexend"/>
-              </a:rPr>
-              <a:t>2</a:t>
-            </a:r>
-            <a:r>
-              <a:rPr sz="2280" b="0" i="0">
-                <a:solidFill>
-                  <a:srgbClr val="1A1A1A"/>
-                </a:solidFill>
-                <a:latin typeface="Lexend"/>
-              </a:rPr>
-              <a:t>. A side of the original is 2 cm.</a:t>
-            </a:r>
-          </a:p>
-        </p:txBody>
-      </p:sp>
-      <p:sp>
-        <p:nvSpPr>
-          <p:cNvPr id="9" name="TextBox 8"/>
-          <p:cNvSpPr txBox="1"/>
-          <p:nvPr/>
-        </p:nvSpPr>
-        <p:spPr>
-          <a:xfrm>
-            <a:off x="777240" y="2568668"/>
-            <a:ext cx="10607040" cy="429370"/>
-          </a:xfrm>
-          <a:prstGeom prst="rect">
-            <a:avLst/>
-          </a:prstGeom>
-          <a:noFill/>
-        </p:spPr>
-        <p:txBody>
-          <a:bodyPr wrap="square" lIns="45720" rIns="45720" tIns="18288" bIns="18288" anchor="t">
-            <a:spAutoFit/>
-          </a:bodyPr>
-          <a:lstStyle/>
-          <a:p>
-            <a:pPr algn="ctr"/>
-            <a:r>
-              <a:rPr sz="2280" b="0" i="0">
-                <a:solidFill>
-                  <a:srgbClr val="1A1A1A"/>
-                </a:solidFill>
-                <a:latin typeface="Lexend"/>
-              </a:rPr>
-              <a:t>Find k, then the matching side of the copy.</a:t>
+              <a:t>, then the matching side of the copy.</a:t>
             </a:r>
           </a:p>
         </p:txBody>
@@ -5340,21 +5821,21 @@
         </p:nvSpPr>
         <p:spPr>
           <a:xfrm>
-            <a:off x="777240" y="1600200"/>
-            <a:ext cx="10607040" cy="858740"/>
-          </a:xfrm>
-          <a:prstGeom prst="rect">
-            <a:avLst/>
-          </a:prstGeom>
-          <a:noFill/>
-        </p:spPr>
-        <p:txBody>
-          <a:bodyPr wrap="square" lIns="45720" rIns="45720" tIns="18288" bIns="18288" anchor="t">
-            <a:spAutoFit/>
-          </a:bodyPr>
-          <a:lstStyle/>
-          <a:p>
-            <a:pPr algn="ctr"/>
+            <a:off x="4182793" y="1577340"/>
+            <a:ext cx="2863359" cy="457200"/>
+          </a:xfrm>
+          <a:prstGeom prst="rect">
+            <a:avLst/>
+          </a:prstGeom>
+          <a:noFill/>
+        </p:spPr>
+        <p:txBody>
+          <a:bodyPr wrap="none" lIns="45720" rIns="45720" tIns="18288" bIns="18288" anchor="ctr">
+            <a:noAutofit/>
+          </a:bodyPr>
+          <a:lstStyle/>
+          <a:p>
+            <a:pPr algn="l"/>
             <a:r>
               <a:rPr sz="2280" b="0" i="0">
                 <a:solidFill>
@@ -5362,85 +5843,14 @@
                 </a:solidFill>
                 <a:latin typeface="Lexend"/>
               </a:rPr>
-              <a:t>A figure has area 12 cm</a:t>
-            </a:r>
-            <a:r>
-              <a:rPr sz="2280" b="0" i="0" baseline="30000">
-                <a:solidFill>
-                  <a:srgbClr val="1A1A1A"/>
-                </a:solidFill>
-                <a:latin typeface="Lexend"/>
-              </a:rPr>
-              <a:t>2</a:t>
-            </a:r>
-            <a:r>
-              <a:rPr sz="2280" b="0" i="0">
-                <a:solidFill>
-                  <a:srgbClr val="1A1A1A"/>
-                </a:solidFill>
-                <a:latin typeface="Lexend"/>
-              </a:rPr>
-              <a:t>. Its scale copy has area 300 cm</a:t>
-            </a:r>
-            <a:r>
-              <a:rPr sz="2280" b="0" i="0" baseline="30000">
-                <a:solidFill>
-                  <a:srgbClr val="1A1A1A"/>
-                </a:solidFill>
-                <a:latin typeface="Lexend"/>
-              </a:rPr>
-              <a:t>2</a:t>
-            </a:r>
-            <a:r>
-              <a:rPr sz="2280" b="0" i="0">
-                <a:solidFill>
-                  <a:srgbClr val="1A1A1A"/>
-                </a:solidFill>
-                <a:latin typeface="Lexend"/>
-              </a:rPr>
-              <a:t>. A side of the original is 2 cm.</a:t>
-            </a:r>
-          </a:p>
-        </p:txBody>
-      </p:sp>
-      <p:sp>
-        <p:nvSpPr>
-          <p:cNvPr id="9" name="TextBox 8"/>
-          <p:cNvSpPr txBox="1"/>
-          <p:nvPr/>
-        </p:nvSpPr>
-        <p:spPr>
-          <a:xfrm>
-            <a:off x="777240" y="2568668"/>
-            <a:ext cx="10607040" cy="429370"/>
-          </a:xfrm>
-          <a:prstGeom prst="rect">
-            <a:avLst/>
-          </a:prstGeom>
-          <a:noFill/>
-        </p:spPr>
-        <p:txBody>
-          <a:bodyPr wrap="square" lIns="45720" rIns="45720" tIns="18288" bIns="18288" anchor="t">
-            <a:spAutoFit/>
-          </a:bodyPr>
-          <a:lstStyle/>
-          <a:p>
-            <a:pPr algn="ctr"/>
-            <a:r>
-              <a:rPr sz="2280" b="0" i="0">
-                <a:solidFill>
-                  <a:srgbClr val="1A1A1A"/>
-                </a:solidFill>
-                <a:latin typeface="Lexend"/>
-              </a:rPr>
-              <a:t>Find k, then the matching side of the copy.</a:t>
+              <a:t>A figure has area </a:t>
             </a:r>
           </a:p>
         </p:txBody>
       </p:sp>
       <p:pic>
         <p:nvPicPr>
-          <p:cNvPr id="10" name="Picture 9" descr="a02b1beb298b5d94.png"/>
+          <p:cNvPr id="9" name="Picture 8" descr="53872f328334515b.png"/>
           <p:cNvPicPr>
             <a:picLocks noChangeAspect="1"/>
           </p:cNvPicPr>
@@ -5454,17 +5864,87 @@
         </p:blipFill>
         <p:spPr>
           <a:xfrm>
-            <a:off x="4206240" y="3180919"/>
-            <a:ext cx="2048256" cy="609600"/>
+            <a:off x="6908993" y="1648968"/>
+            <a:ext cx="926592" cy="277368"/>
           </a:xfrm>
           <a:prstGeom prst="rect">
             <a:avLst/>
           </a:prstGeom>
         </p:spPr>
       </p:pic>
+      <p:sp>
+        <p:nvSpPr>
+          <p:cNvPr id="10" name="TextBox 9"/>
+          <p:cNvSpPr txBox="1"/>
+          <p:nvPr/>
+        </p:nvSpPr>
+        <p:spPr>
+          <a:xfrm>
+            <a:off x="7835585" y="1577340"/>
+            <a:ext cx="280301" cy="457200"/>
+          </a:xfrm>
+          <a:prstGeom prst="rect">
+            <a:avLst/>
+          </a:prstGeom>
+          <a:noFill/>
+        </p:spPr>
+        <p:txBody>
+          <a:bodyPr wrap="none" lIns="45720" rIns="45720" tIns="18288" bIns="18288" anchor="ctr">
+            <a:noAutofit/>
+          </a:bodyPr>
+          <a:lstStyle/>
+          <a:p>
+            <a:pPr algn="l"/>
+            <a:r>
+              <a:rPr sz="2280" b="0" i="0">
+                <a:solidFill>
+                  <a:srgbClr val="1A1A1A"/>
+                </a:solidFill>
+                <a:latin typeface="Lexend"/>
+              </a:rPr>
+              <a:t>.</a:t>
+            </a:r>
+          </a:p>
+        </p:txBody>
+      </p:sp>
+      <p:sp>
+        <p:nvSpPr>
+          <p:cNvPr id="11" name="TextBox 10"/>
+          <p:cNvSpPr txBox="1"/>
+          <p:nvPr/>
+        </p:nvSpPr>
+        <p:spPr>
+          <a:xfrm>
+            <a:off x="3621480" y="2263140"/>
+            <a:ext cx="3745193" cy="457200"/>
+          </a:xfrm>
+          <a:prstGeom prst="rect">
+            <a:avLst/>
+          </a:prstGeom>
+          <a:noFill/>
+        </p:spPr>
+        <p:txBody>
+          <a:bodyPr wrap="none" lIns="45720" rIns="45720" tIns="18288" bIns="18288" anchor="ctr">
+            <a:noAutofit/>
+          </a:bodyPr>
+          <a:lstStyle/>
+          <a:p>
+            <a:pPr algn="l"/>
+            <a:r>
+              <a:rPr sz="2280" b="0" i="0">
+                <a:solidFill>
+                  <a:srgbClr val="1A1A1A"/>
+                </a:solidFill>
+                <a:latin typeface="Lexend"/>
+              </a:rPr>
+              <a:t>Its scale copy has area </a:t>
+            </a:r>
+          </a:p>
+        </p:txBody>
+      </p:sp>
       <p:pic>
         <p:nvPicPr>
-          <p:cNvPr id="11" name="Picture 10" descr="c6b6368f1cca46d2.png"/>
+          <p:cNvPr id="12" name="Picture 11" descr="8031aa25e0fc3e7d.png"/>
           <p:cNvPicPr>
             <a:picLocks noChangeAspect="1"/>
           </p:cNvPicPr>
@@ -5478,7 +5958,219 @@
         </p:blipFill>
         <p:spPr>
           <a:xfrm>
-            <a:off x="4206240" y="3918535"/>
+            <a:off x="7229514" y="2334768"/>
+            <a:ext cx="1167384" cy="277368"/>
+          </a:xfrm>
+          <a:prstGeom prst="rect">
+            <a:avLst/>
+          </a:prstGeom>
+        </p:spPr>
+      </p:pic>
+      <p:sp>
+        <p:nvSpPr>
+          <p:cNvPr id="13" name="TextBox 12"/>
+          <p:cNvSpPr txBox="1"/>
+          <p:nvPr/>
+        </p:nvSpPr>
+        <p:spPr>
+          <a:xfrm>
+            <a:off x="8396898" y="2263140"/>
+            <a:ext cx="280301" cy="457200"/>
+          </a:xfrm>
+          <a:prstGeom prst="rect">
+            <a:avLst/>
+          </a:prstGeom>
+          <a:noFill/>
+        </p:spPr>
+        <p:txBody>
+          <a:bodyPr wrap="none" lIns="45720" rIns="45720" tIns="18288" bIns="18288" anchor="ctr">
+            <a:noAutofit/>
+          </a:bodyPr>
+          <a:lstStyle/>
+          <a:p>
+            <a:pPr algn="l"/>
+            <a:r>
+              <a:rPr sz="2280" b="0" i="0">
+                <a:solidFill>
+                  <a:srgbClr val="1A1A1A"/>
+                </a:solidFill>
+                <a:latin typeface="Lexend"/>
+              </a:rPr>
+              <a:t>.</a:t>
+            </a:r>
+          </a:p>
+        </p:txBody>
+      </p:sp>
+      <p:sp>
+        <p:nvSpPr>
+          <p:cNvPr id="14" name="TextBox 13"/>
+          <p:cNvSpPr txBox="1"/>
+          <p:nvPr/>
+        </p:nvSpPr>
+        <p:spPr>
+          <a:xfrm>
+            <a:off x="777240" y="2971800"/>
+            <a:ext cx="10607040" cy="429370"/>
+          </a:xfrm>
+          <a:prstGeom prst="rect">
+            <a:avLst/>
+          </a:prstGeom>
+          <a:noFill/>
+        </p:spPr>
+        <p:txBody>
+          <a:bodyPr wrap="square" lIns="45720" rIns="45720" tIns="18288" bIns="18288" anchor="t">
+            <a:spAutoFit/>
+          </a:bodyPr>
+          <a:lstStyle/>
+          <a:p>
+            <a:pPr algn="ctr"/>
+            <a:r>
+              <a:rPr sz="2280" b="0" i="0">
+                <a:solidFill>
+                  <a:srgbClr val="1A1A1A"/>
+                </a:solidFill>
+                <a:latin typeface="Lexend"/>
+              </a:rPr>
+              <a:t>A side of the original is 2 cm.</a:t>
+            </a:r>
+          </a:p>
+        </p:txBody>
+      </p:sp>
+      <p:sp>
+        <p:nvSpPr>
+          <p:cNvPr id="15" name="TextBox 14"/>
+          <p:cNvSpPr txBox="1"/>
+          <p:nvPr/>
+        </p:nvSpPr>
+        <p:spPr>
+          <a:xfrm>
+            <a:off x="2862771" y="3488038"/>
+            <a:ext cx="943575" cy="457200"/>
+          </a:xfrm>
+          <a:prstGeom prst="rect">
+            <a:avLst/>
+          </a:prstGeom>
+          <a:noFill/>
+        </p:spPr>
+        <p:txBody>
+          <a:bodyPr wrap="none" lIns="45720" rIns="45720" tIns="18288" bIns="18288" anchor="ctr">
+            <a:noAutofit/>
+          </a:bodyPr>
+          <a:lstStyle/>
+          <a:p>
+            <a:pPr algn="l"/>
+            <a:r>
+              <a:rPr sz="2280" b="0" i="0">
+                <a:solidFill>
+                  <a:srgbClr val="1A1A1A"/>
+                </a:solidFill>
+                <a:latin typeface="Lexend"/>
+              </a:rPr>
+              <a:t>Find </a:t>
+            </a:r>
+          </a:p>
+        </p:txBody>
+      </p:sp>
+      <p:pic>
+        <p:nvPicPr>
+          <p:cNvPr id="16" name="Picture 15" descr="15aa4a684a6a761c.png"/>
+          <p:cNvPicPr>
+            <a:picLocks noChangeAspect="1"/>
+          </p:cNvPicPr>
+          <p:nvPr/>
+        </p:nvPicPr>
+        <p:blipFill>
+          <a:blip r:embed="rId4"/>
+          <a:stretch>
+            <a:fillRect/>
+          </a:stretch>
+        </p:blipFill>
+        <p:spPr>
+          <a:xfrm>
+            <a:off x="3669186" y="3599290"/>
+            <a:ext cx="155448" cy="231648"/>
+          </a:xfrm>
+          <a:prstGeom prst="rect">
+            <a:avLst/>
+          </a:prstGeom>
+        </p:spPr>
+      </p:pic>
+      <p:sp>
+        <p:nvSpPr>
+          <p:cNvPr id="17" name="TextBox 16"/>
+          <p:cNvSpPr txBox="1"/>
+          <p:nvPr/>
+        </p:nvSpPr>
+        <p:spPr>
+          <a:xfrm>
+            <a:off x="3824634" y="3488038"/>
+            <a:ext cx="5611274" cy="457200"/>
+          </a:xfrm>
+          <a:prstGeom prst="rect">
+            <a:avLst/>
+          </a:prstGeom>
+          <a:noFill/>
+        </p:spPr>
+        <p:txBody>
+          <a:bodyPr wrap="none" lIns="45720" rIns="45720" tIns="18288" bIns="18288" anchor="ctr">
+            <a:noAutofit/>
+          </a:bodyPr>
+          <a:lstStyle/>
+          <a:p>
+            <a:pPr algn="l"/>
+            <a:r>
+              <a:rPr sz="2280" b="0" i="0">
+                <a:solidFill>
+                  <a:srgbClr val="1A1A1A"/>
+                </a:solidFill>
+                <a:latin typeface="Lexend"/>
+              </a:rPr>
+              <a:t>, then the matching side of the copy.</a:t>
+            </a:r>
+          </a:p>
+        </p:txBody>
+      </p:sp>
+      <p:pic>
+        <p:nvPicPr>
+          <p:cNvPr id="18" name="Picture 17" descr="a02b1beb298b5d94.png"/>
+          <p:cNvPicPr>
+            <a:picLocks noChangeAspect="1"/>
+          </p:cNvPicPr>
+          <p:nvPr/>
+        </p:nvPicPr>
+        <p:blipFill>
+          <a:blip r:embed="rId5"/>
+          <a:stretch>
+            <a:fillRect/>
+          </a:stretch>
+        </p:blipFill>
+        <p:spPr>
+          <a:xfrm>
+            <a:off x="4206240" y="4269850"/>
+            <a:ext cx="2048256" cy="609600"/>
+          </a:xfrm>
+          <a:prstGeom prst="rect">
+            <a:avLst/>
+          </a:prstGeom>
+        </p:spPr>
+      </p:pic>
+      <p:pic>
+        <p:nvPicPr>
+          <p:cNvPr id="19" name="Picture 18" descr="c6b6368f1cca46d2.png"/>
+          <p:cNvPicPr>
+            <a:picLocks noChangeAspect="1"/>
+          </p:cNvPicPr>
+          <p:nvPr/>
+        </p:nvPicPr>
+        <p:blipFill>
+          <a:blip r:embed="rId6"/>
+          <a:stretch>
+            <a:fillRect/>
+          </a:stretch>
+        </p:blipFill>
+        <p:spPr>
+          <a:xfrm>
+            <a:off x="4206240" y="5007466"/>
             <a:ext cx="3861816" cy="432816"/>
           </a:xfrm>
           <a:prstGeom prst="rect">
@@ -5488,13 +6180,13 @@
       </p:pic>
       <p:sp>
         <p:nvSpPr>
-          <p:cNvPr id="12" name="TextBox 11"/>
-          <p:cNvSpPr txBox="1"/>
-          <p:nvPr/>
-        </p:nvSpPr>
-        <p:spPr>
-          <a:xfrm>
-            <a:off x="777240" y="4572000"/>
+          <p:cNvPr id="20" name="TextBox 19"/>
+          <p:cNvSpPr txBox="1"/>
+          <p:nvPr/>
+        </p:nvSpPr>
+        <p:spPr>
+          <a:xfrm>
+            <a:off x="777240" y="5577442"/>
             <a:ext cx="10607040" cy="548640"/>
           </a:xfrm>
           <a:prstGeom prst="rect">
@@ -5757,7 +6449,101 @@
         </p:nvSpPr>
         <p:spPr>
           <a:xfrm>
-            <a:off x="1234440" y="1874519"/>
+            <a:off x="1234440" y="1851660"/>
+            <a:ext cx="6522483" cy="457200"/>
+          </a:xfrm>
+          <a:prstGeom prst="rect">
+            <a:avLst/>
+          </a:prstGeom>
+          <a:noFill/>
+        </p:spPr>
+        <p:txBody>
+          <a:bodyPr wrap="none" lIns="45720" rIns="45720" tIns="18288" bIns="18288" anchor="ctr">
+            <a:noAutofit/>
+          </a:bodyPr>
+          <a:lstStyle/>
+          <a:p>
+            <a:pPr algn="l"/>
+            <a:r>
+              <a:rPr sz="2280" b="0" i="0">
+                <a:solidFill>
+                  <a:srgbClr val="1A1A1A"/>
+                </a:solidFill>
+                <a:latin typeface="Lexend"/>
+              </a:rPr>
+              <a:t>A figure with perimeter 14 cm is scaled by </a:t>
+            </a:r>
+          </a:p>
+        </p:txBody>
+      </p:sp>
+      <p:pic>
+        <p:nvPicPr>
+          <p:cNvPr id="9" name="Picture 8" descr="365db93adf7efc23.png"/>
+          <p:cNvPicPr>
+            <a:picLocks noChangeAspect="1"/>
+          </p:cNvPicPr>
+          <p:nvPr/>
+        </p:nvPicPr>
+        <p:blipFill>
+          <a:blip r:embed="rId2"/>
+          <a:stretch>
+            <a:fillRect/>
+          </a:stretch>
+        </p:blipFill>
+        <p:spPr>
+          <a:xfrm>
+            <a:off x="7619763" y="1962911"/>
+            <a:ext cx="612648" cy="231648"/>
+          </a:xfrm>
+          <a:prstGeom prst="rect">
+            <a:avLst/>
+          </a:prstGeom>
+        </p:spPr>
+      </p:pic>
+      <p:sp>
+        <p:nvSpPr>
+          <p:cNvPr id="10" name="TextBox 9"/>
+          <p:cNvSpPr txBox="1"/>
+          <p:nvPr/>
+        </p:nvSpPr>
+        <p:spPr>
+          <a:xfrm>
+            <a:off x="8232411" y="1851660"/>
+            <a:ext cx="280301" cy="457200"/>
+          </a:xfrm>
+          <a:prstGeom prst="rect">
+            <a:avLst/>
+          </a:prstGeom>
+          <a:noFill/>
+        </p:spPr>
+        <p:txBody>
+          <a:bodyPr wrap="none" lIns="45720" rIns="45720" tIns="18288" bIns="18288" anchor="ctr">
+            <a:noAutofit/>
+          </a:bodyPr>
+          <a:lstStyle/>
+          <a:p>
+            <a:pPr algn="l"/>
+            <a:r>
+              <a:rPr sz="2280" b="0" i="0">
+                <a:solidFill>
+                  <a:srgbClr val="1A1A1A"/>
+                </a:solidFill>
+                <a:latin typeface="Lexend"/>
+              </a:rPr>
+              <a:t>.</a:t>
+            </a:r>
+          </a:p>
+        </p:txBody>
+      </p:sp>
+      <p:sp>
+        <p:nvSpPr>
+          <p:cNvPr id="11" name="TextBox 10"/>
+          <p:cNvSpPr txBox="1"/>
+          <p:nvPr/>
+        </p:nvSpPr>
+        <p:spPr>
+          <a:xfrm>
+            <a:off x="1234440" y="2487168"/>
             <a:ext cx="10058400" cy="429370"/>
           </a:xfrm>
           <a:prstGeom prst="rect">
@@ -5773,47 +6559,12 @@
           <a:p>
             <a:pPr algn="l"/>
             <a:r>
-              <a:rPr sz="2280" b="0" i="0">
+              <a:rPr sz="2280" b="1" i="0">
                 <a:solidFill>
                   <a:srgbClr val="1A1A1A"/>
                 </a:solidFill>
                 <a:latin typeface="Lexend"/>
               </a:rPr>
-              <a:t>A figure with perimeter 14 cm is scaled by k = 2.</a:t>
-            </a:r>
-          </a:p>
-        </p:txBody>
-      </p:sp>
-      <p:sp>
-        <p:nvSpPr>
-          <p:cNvPr id="9" name="TextBox 8"/>
-          <p:cNvSpPr txBox="1"/>
-          <p:nvPr/>
-        </p:nvSpPr>
-        <p:spPr>
-          <a:xfrm>
-            <a:off x="1234440" y="2413618"/>
-            <a:ext cx="10058400" cy="429370"/>
-          </a:xfrm>
-          <a:prstGeom prst="rect">
-            <a:avLst/>
-          </a:prstGeom>
-          <a:noFill/>
-        </p:spPr>
-        <p:txBody>
-          <a:bodyPr wrap="square" lIns="45720" rIns="45720" tIns="18288" bIns="18288" anchor="t">
-            <a:spAutoFit/>
-          </a:bodyPr>
-          <a:lstStyle/>
-          <a:p>
-            <a:pPr algn="l"/>
-            <a:r>
-              <a:rPr sz="2280" b="1" i="0">
-                <a:solidFill>
-                  <a:srgbClr val="1A1A1A"/>
-                </a:solidFill>
-                <a:latin typeface="Lexend"/>
-              </a:rPr>
               <a:t>What is the copy's perimeter?</a:t>
             </a:r>
           </a:p>
@@ -5821,7 +6572,7 @@
       </p:sp>
       <p:sp>
         <p:nvSpPr>
-          <p:cNvPr id="10" name="TextBox 9"/>
+          <p:cNvPr id="12" name="TextBox 11"/>
           <p:cNvSpPr txBox="1"/>
           <p:nvPr/>
         </p:nvSpPr>
@@ -6090,17 +6841,17 @@
         </p:nvSpPr>
         <p:spPr>
           <a:xfrm>
-            <a:off x="1234440" y="1874519"/>
-            <a:ext cx="10058400" cy="429370"/>
-          </a:xfrm>
-          <a:prstGeom prst="rect">
-            <a:avLst/>
-          </a:prstGeom>
-          <a:noFill/>
-        </p:spPr>
-        <p:txBody>
-          <a:bodyPr wrap="square" lIns="45720" rIns="45720" tIns="18288" bIns="18288" anchor="t">
-            <a:spAutoFit/>
+            <a:off x="1234440" y="1851660"/>
+            <a:ext cx="6522483" cy="457200"/>
+          </a:xfrm>
+          <a:prstGeom prst="rect">
+            <a:avLst/>
+          </a:prstGeom>
+          <a:noFill/>
+        </p:spPr>
+        <p:txBody>
+          <a:bodyPr wrap="none" lIns="45720" rIns="45720" tIns="18288" bIns="18288" anchor="ctr">
+            <a:noAutofit/>
           </a:bodyPr>
           <a:lstStyle/>
           <a:p>
@@ -6112,49 +6863,14 @@
                 </a:solidFill>
                 <a:latin typeface="Lexend"/>
               </a:rPr>
-              <a:t>A figure with perimeter 14 cm is scaled by k = 2.</a:t>
-            </a:r>
-          </a:p>
-        </p:txBody>
-      </p:sp>
-      <p:sp>
-        <p:nvSpPr>
-          <p:cNvPr id="9" name="TextBox 8"/>
-          <p:cNvSpPr txBox="1"/>
-          <p:nvPr/>
-        </p:nvSpPr>
-        <p:spPr>
-          <a:xfrm>
-            <a:off x="1234440" y="2413618"/>
-            <a:ext cx="10058400" cy="429370"/>
-          </a:xfrm>
-          <a:prstGeom prst="rect">
-            <a:avLst/>
-          </a:prstGeom>
-          <a:noFill/>
-        </p:spPr>
-        <p:txBody>
-          <a:bodyPr wrap="square" lIns="45720" rIns="45720" tIns="18288" bIns="18288" anchor="t">
-            <a:spAutoFit/>
-          </a:bodyPr>
-          <a:lstStyle/>
-          <a:p>
-            <a:pPr algn="l"/>
-            <a:r>
-              <a:rPr sz="2280" b="1" i="0">
-                <a:solidFill>
-                  <a:srgbClr val="1A1A1A"/>
-                </a:solidFill>
-                <a:latin typeface="Lexend"/>
-              </a:rPr>
-              <a:t>What is the copy's perimeter?</a:t>
+              <a:t>A figure with perimeter 14 cm is scaled by </a:t>
             </a:r>
           </a:p>
         </p:txBody>
       </p:sp>
       <p:pic>
         <p:nvPicPr>
-          <p:cNvPr id="10" name="Picture 9" descr="d860927724a30923.png"/>
+          <p:cNvPr id="9" name="Picture 8" descr="4b3d59f7957f5c02.png"/>
           <p:cNvPicPr>
             <a:picLocks noChangeAspect="1"/>
           </p:cNvPicPr>
@@ -6168,7 +6884,101 @@
         </p:blipFill>
         <p:spPr>
           <a:xfrm>
-            <a:off x="5356859" y="3152360"/>
+            <a:off x="7619763" y="1962911"/>
+            <a:ext cx="615696" cy="231648"/>
+          </a:xfrm>
+          <a:prstGeom prst="rect">
+            <a:avLst/>
+          </a:prstGeom>
+        </p:spPr>
+      </p:pic>
+      <p:sp>
+        <p:nvSpPr>
+          <p:cNvPr id="10" name="TextBox 9"/>
+          <p:cNvSpPr txBox="1"/>
+          <p:nvPr/>
+        </p:nvSpPr>
+        <p:spPr>
+          <a:xfrm>
+            <a:off x="8235459" y="1851660"/>
+            <a:ext cx="280301" cy="457200"/>
+          </a:xfrm>
+          <a:prstGeom prst="rect">
+            <a:avLst/>
+          </a:prstGeom>
+          <a:noFill/>
+        </p:spPr>
+        <p:txBody>
+          <a:bodyPr wrap="none" lIns="45720" rIns="45720" tIns="18288" bIns="18288" anchor="ctr">
+            <a:noAutofit/>
+          </a:bodyPr>
+          <a:lstStyle/>
+          <a:p>
+            <a:pPr algn="l"/>
+            <a:r>
+              <a:rPr sz="2280" b="0" i="0">
+                <a:solidFill>
+                  <a:srgbClr val="1A1A1A"/>
+                </a:solidFill>
+                <a:latin typeface="Lexend"/>
+              </a:rPr>
+              <a:t>.</a:t>
+            </a:r>
+          </a:p>
+        </p:txBody>
+      </p:sp>
+      <p:sp>
+        <p:nvSpPr>
+          <p:cNvPr id="11" name="TextBox 10"/>
+          <p:cNvSpPr txBox="1"/>
+          <p:nvPr/>
+        </p:nvSpPr>
+        <p:spPr>
+          <a:xfrm>
+            <a:off x="1234440" y="2487168"/>
+            <a:ext cx="10058400" cy="429370"/>
+          </a:xfrm>
+          <a:prstGeom prst="rect">
+            <a:avLst/>
+          </a:prstGeom>
+          <a:noFill/>
+        </p:spPr>
+        <p:txBody>
+          <a:bodyPr wrap="square" lIns="45720" rIns="45720" tIns="18288" bIns="18288" anchor="t">
+            <a:spAutoFit/>
+          </a:bodyPr>
+          <a:lstStyle/>
+          <a:p>
+            <a:pPr algn="l"/>
+            <a:r>
+              <a:rPr sz="2280" b="1" i="0">
+                <a:solidFill>
+                  <a:srgbClr val="1A1A1A"/>
+                </a:solidFill>
+                <a:latin typeface="Lexend"/>
+              </a:rPr>
+              <a:t>What is the copy's perimeter?</a:t>
+            </a:r>
+          </a:p>
+        </p:txBody>
+      </p:sp>
+      <p:pic>
+        <p:nvPicPr>
+          <p:cNvPr id="12" name="Picture 11" descr="d860927724a30923.png"/>
+          <p:cNvPicPr>
+            <a:picLocks noChangeAspect="1"/>
+          </p:cNvPicPr>
+          <p:nvPr/>
+        </p:nvPicPr>
+        <p:blipFill>
+          <a:blip r:embed="rId3"/>
+          <a:stretch>
+            <a:fillRect/>
+          </a:stretch>
+        </p:blipFill>
+        <p:spPr>
+          <a:xfrm>
+            <a:off x="5356859" y="3242102"/>
             <a:ext cx="1554480" cy="249935"/>
           </a:xfrm>
           <a:prstGeom prst="rect">
@@ -6178,7 +6988,7 @@
       </p:pic>
       <p:sp>
         <p:nvSpPr>
-          <p:cNvPr id="11" name="TextBox 10"/>
+          <p:cNvPr id="13" name="TextBox 12"/>
           <p:cNvSpPr txBox="1"/>
           <p:nvPr/>
         </p:nvSpPr>
@@ -6447,7 +7257,160 @@
         </p:nvSpPr>
         <p:spPr>
           <a:xfrm>
-            <a:off x="1234440" y="1874519"/>
+            <a:off x="1234440" y="1851660"/>
+            <a:ext cx="2970766" cy="457200"/>
+          </a:xfrm>
+          <a:prstGeom prst="rect">
+            <a:avLst/>
+          </a:prstGeom>
+          <a:noFill/>
+        </p:spPr>
+        <p:txBody>
+          <a:bodyPr wrap="none" lIns="45720" rIns="45720" tIns="18288" bIns="18288" anchor="ctr">
+            <a:noAutofit/>
+          </a:bodyPr>
+          <a:lstStyle/>
+          <a:p>
+            <a:pPr algn="l"/>
+            <a:r>
+              <a:rPr sz="2280" b="0" i="0">
+                <a:solidFill>
+                  <a:srgbClr val="1A1A1A"/>
+                </a:solidFill>
+                <a:latin typeface="Lexend"/>
+              </a:rPr>
+              <a:t>A figure with area </a:t>
+            </a:r>
+          </a:p>
+        </p:txBody>
+      </p:sp>
+      <p:pic>
+        <p:nvPicPr>
+          <p:cNvPr id="9" name="Picture 8" descr="7ced559aec939d71.png"/>
+          <p:cNvPicPr>
+            <a:picLocks noChangeAspect="1"/>
+          </p:cNvPicPr>
+          <p:nvPr/>
+        </p:nvPicPr>
+        <p:blipFill>
+          <a:blip r:embed="rId2"/>
+          <a:stretch>
+            <a:fillRect/>
+          </a:stretch>
+        </p:blipFill>
+        <p:spPr>
+          <a:xfrm>
+            <a:off x="4068046" y="1923287"/>
+            <a:ext cx="926592" cy="277368"/>
+          </a:xfrm>
+          <a:prstGeom prst="rect">
+            <a:avLst/>
+          </a:prstGeom>
+        </p:spPr>
+      </p:pic>
+      <p:sp>
+        <p:nvSpPr>
+          <p:cNvPr id="10" name="TextBox 9"/>
+          <p:cNvSpPr txBox="1"/>
+          <p:nvPr/>
+        </p:nvSpPr>
+        <p:spPr>
+          <a:xfrm>
+            <a:off x="4994638" y="1851660"/>
+            <a:ext cx="2105866" cy="457200"/>
+          </a:xfrm>
+          <a:prstGeom prst="rect">
+            <a:avLst/>
+          </a:prstGeom>
+          <a:noFill/>
+        </p:spPr>
+        <p:txBody>
+          <a:bodyPr wrap="none" lIns="45720" rIns="45720" tIns="18288" bIns="18288" anchor="ctr">
+            <a:noAutofit/>
+          </a:bodyPr>
+          <a:lstStyle/>
+          <a:p>
+            <a:pPr algn="l"/>
+            <a:r>
+              <a:rPr sz="2280" b="0" i="0">
+                <a:solidFill>
+                  <a:srgbClr val="1A1A1A"/>
+                </a:solidFill>
+                <a:latin typeface="Lexend"/>
+              </a:rPr>
+              <a:t> is scaled by </a:t>
+            </a:r>
+          </a:p>
+        </p:txBody>
+      </p:sp>
+      <p:pic>
+        <p:nvPicPr>
+          <p:cNvPr id="11" name="Picture 10" descr="365db93adf7efc23.png"/>
+          <p:cNvPicPr>
+            <a:picLocks noChangeAspect="1"/>
+          </p:cNvPicPr>
+          <p:nvPr/>
+        </p:nvPicPr>
+        <p:blipFill>
+          <a:blip r:embed="rId3"/>
+          <a:stretch>
+            <a:fillRect/>
+          </a:stretch>
+        </p:blipFill>
+        <p:spPr>
+          <a:xfrm>
+            <a:off x="6963344" y="1962911"/>
+            <a:ext cx="612648" cy="231648"/>
+          </a:xfrm>
+          <a:prstGeom prst="rect">
+            <a:avLst/>
+          </a:prstGeom>
+        </p:spPr>
+      </p:pic>
+      <p:sp>
+        <p:nvSpPr>
+          <p:cNvPr id="12" name="TextBox 11"/>
+          <p:cNvSpPr txBox="1"/>
+          <p:nvPr/>
+        </p:nvSpPr>
+        <p:spPr>
+          <a:xfrm>
+            <a:off x="7575992" y="1851660"/>
+            <a:ext cx="280301" cy="457200"/>
+          </a:xfrm>
+          <a:prstGeom prst="rect">
+            <a:avLst/>
+          </a:prstGeom>
+          <a:noFill/>
+        </p:spPr>
+        <p:txBody>
+          <a:bodyPr wrap="none" lIns="45720" rIns="45720" tIns="18288" bIns="18288" anchor="ctr">
+            <a:noAutofit/>
+          </a:bodyPr>
+          <a:lstStyle/>
+          <a:p>
+            <a:pPr algn="l"/>
+            <a:r>
+              <a:rPr sz="2280" b="0" i="0">
+                <a:solidFill>
+                  <a:srgbClr val="1A1A1A"/>
+                </a:solidFill>
+                <a:latin typeface="Lexend"/>
+              </a:rPr>
+              <a:t>.</a:t>
+            </a:r>
+          </a:p>
+        </p:txBody>
+      </p:sp>
+      <p:sp>
+        <p:nvSpPr>
+          <p:cNvPr id="13" name="TextBox 12"/>
+          <p:cNvSpPr txBox="1"/>
+          <p:nvPr/>
+        </p:nvSpPr>
+        <p:spPr>
+          <a:xfrm>
+            <a:off x="1234440" y="2487168"/>
             <a:ext cx="10058400" cy="429370"/>
           </a:xfrm>
           <a:prstGeom prst="rect">
@@ -6463,65 +7426,12 @@
           <a:p>
             <a:pPr algn="l"/>
             <a:r>
-              <a:rPr sz="2280" b="0" i="0">
+              <a:rPr sz="2280" b="1" i="0">
                 <a:solidFill>
                   <a:srgbClr val="1A1A1A"/>
                 </a:solidFill>
                 <a:latin typeface="Lexend"/>
               </a:rPr>
-              <a:t>A figure with area 12 cm</a:t>
-            </a:r>
-            <a:r>
-              <a:rPr sz="2280" b="0" i="0" baseline="30000">
-                <a:solidFill>
-                  <a:srgbClr val="1A1A1A"/>
-                </a:solidFill>
-                <a:latin typeface="Lexend"/>
-              </a:rPr>
-              <a:t>2</a:t>
-            </a:r>
-            <a:r>
-              <a:rPr sz="2280" b="0" i="0">
-                <a:solidFill>
-                  <a:srgbClr val="1A1A1A"/>
-                </a:solidFill>
-                <a:latin typeface="Lexend"/>
-              </a:rPr>
-              <a:t> is scaled by k = 2.</a:t>
-            </a:r>
-          </a:p>
-        </p:txBody>
-      </p:sp>
-      <p:sp>
-        <p:nvSpPr>
-          <p:cNvPr id="9" name="TextBox 8"/>
-          <p:cNvSpPr txBox="1"/>
-          <p:nvPr/>
-        </p:nvSpPr>
-        <p:spPr>
-          <a:xfrm>
-            <a:off x="1234440" y="2413618"/>
-            <a:ext cx="10058400" cy="429370"/>
-          </a:xfrm>
-          <a:prstGeom prst="rect">
-            <a:avLst/>
-          </a:prstGeom>
-          <a:noFill/>
-        </p:spPr>
-        <p:txBody>
-          <a:bodyPr wrap="square" lIns="45720" rIns="45720" tIns="18288" bIns="18288" anchor="t">
-            <a:spAutoFit/>
-          </a:bodyPr>
-          <a:lstStyle/>
-          <a:p>
-            <a:pPr algn="l"/>
-            <a:r>
-              <a:rPr sz="2280" b="1" i="0">
-                <a:solidFill>
-                  <a:srgbClr val="1A1A1A"/>
-                </a:solidFill>
-                <a:latin typeface="Lexend"/>
-              </a:rPr>
               <a:t>What is the copy's area?</a:t>
             </a:r>
           </a:p>
@@ -6529,7 +7439,7 @@
       </p:sp>
       <p:sp>
         <p:nvSpPr>
-          <p:cNvPr id="10" name="TextBox 9"/>
+          <p:cNvPr id="14" name="TextBox 13"/>
           <p:cNvSpPr txBox="1"/>
           <p:nvPr/>
         </p:nvSpPr>
@@ -6798,17 +7708,17 @@
         </p:nvSpPr>
         <p:spPr>
           <a:xfrm>
-            <a:off x="1234440" y="1874519"/>
-            <a:ext cx="10058400" cy="429370"/>
-          </a:xfrm>
-          <a:prstGeom prst="rect">
-            <a:avLst/>
-          </a:prstGeom>
-          <a:noFill/>
-        </p:spPr>
-        <p:txBody>
-          <a:bodyPr wrap="square" lIns="45720" rIns="45720" tIns="18288" bIns="18288" anchor="t">
-            <a:spAutoFit/>
+            <a:off x="1234440" y="1851660"/>
+            <a:ext cx="2970766" cy="457200"/>
+          </a:xfrm>
+          <a:prstGeom prst="rect">
+            <a:avLst/>
+          </a:prstGeom>
+          <a:noFill/>
+        </p:spPr>
+        <p:txBody>
+          <a:bodyPr wrap="none" lIns="45720" rIns="45720" tIns="18288" bIns="18288" anchor="ctr">
+            <a:noAutofit/>
           </a:bodyPr>
           <a:lstStyle/>
           <a:p>
@@ -6820,67 +7730,14 @@
                 </a:solidFill>
                 <a:latin typeface="Lexend"/>
               </a:rPr>
-              <a:t>A figure with area 12 cm</a:t>
-            </a:r>
-            <a:r>
-              <a:rPr sz="2280" b="0" i="0" baseline="30000">
-                <a:solidFill>
-                  <a:srgbClr val="1A1A1A"/>
-                </a:solidFill>
-                <a:latin typeface="Lexend"/>
-              </a:rPr>
-              <a:t>2</a:t>
-            </a:r>
-            <a:r>
-              <a:rPr sz="2280" b="0" i="0">
-                <a:solidFill>
-                  <a:srgbClr val="1A1A1A"/>
-                </a:solidFill>
-                <a:latin typeface="Lexend"/>
-              </a:rPr>
-              <a:t> is scaled by k = 2.</a:t>
-            </a:r>
-          </a:p>
-        </p:txBody>
-      </p:sp>
-      <p:sp>
-        <p:nvSpPr>
-          <p:cNvPr id="9" name="TextBox 8"/>
-          <p:cNvSpPr txBox="1"/>
-          <p:nvPr/>
-        </p:nvSpPr>
-        <p:spPr>
-          <a:xfrm>
-            <a:off x="1234440" y="2413618"/>
-            <a:ext cx="10058400" cy="429370"/>
-          </a:xfrm>
-          <a:prstGeom prst="rect">
-            <a:avLst/>
-          </a:prstGeom>
-          <a:noFill/>
-        </p:spPr>
-        <p:txBody>
-          <a:bodyPr wrap="square" lIns="45720" rIns="45720" tIns="18288" bIns="18288" anchor="t">
-            <a:spAutoFit/>
-          </a:bodyPr>
-          <a:lstStyle/>
-          <a:p>
-            <a:pPr algn="l"/>
-            <a:r>
-              <a:rPr sz="2280" b="1" i="0">
-                <a:solidFill>
-                  <a:srgbClr val="1A1A1A"/>
-                </a:solidFill>
-                <a:latin typeface="Lexend"/>
-              </a:rPr>
-              <a:t>What is the copy's area?</a:t>
+              <a:t>A figure with area </a:t>
             </a:r>
           </a:p>
         </p:txBody>
       </p:sp>
       <p:pic>
         <p:nvPicPr>
-          <p:cNvPr id="10" name="Picture 9" descr="427887251510c88c.png"/>
+          <p:cNvPr id="9" name="Picture 8" descr="53872f328334515b.png"/>
           <p:cNvPicPr>
             <a:picLocks noChangeAspect="1"/>
           </p:cNvPicPr>
@@ -6894,7 +7751,160 @@
         </p:blipFill>
         <p:spPr>
           <a:xfrm>
-            <a:off x="4680203" y="3126452"/>
+            <a:off x="4068046" y="1923287"/>
+            <a:ext cx="926592" cy="277368"/>
+          </a:xfrm>
+          <a:prstGeom prst="rect">
+            <a:avLst/>
+          </a:prstGeom>
+        </p:spPr>
+      </p:pic>
+      <p:sp>
+        <p:nvSpPr>
+          <p:cNvPr id="10" name="TextBox 9"/>
+          <p:cNvSpPr txBox="1"/>
+          <p:nvPr/>
+        </p:nvSpPr>
+        <p:spPr>
+          <a:xfrm>
+            <a:off x="4994638" y="1851660"/>
+            <a:ext cx="2105866" cy="457200"/>
+          </a:xfrm>
+          <a:prstGeom prst="rect">
+            <a:avLst/>
+          </a:prstGeom>
+          <a:noFill/>
+        </p:spPr>
+        <p:txBody>
+          <a:bodyPr wrap="none" lIns="45720" rIns="45720" tIns="18288" bIns="18288" anchor="ctr">
+            <a:noAutofit/>
+          </a:bodyPr>
+          <a:lstStyle/>
+          <a:p>
+            <a:pPr algn="l"/>
+            <a:r>
+              <a:rPr sz="2280" b="0" i="0">
+                <a:solidFill>
+                  <a:srgbClr val="1A1A1A"/>
+                </a:solidFill>
+                <a:latin typeface="Lexend"/>
+              </a:rPr>
+              <a:t> is scaled by </a:t>
+            </a:r>
+          </a:p>
+        </p:txBody>
+      </p:sp>
+      <p:pic>
+        <p:nvPicPr>
+          <p:cNvPr id="11" name="Picture 10" descr="4b3d59f7957f5c02.png"/>
+          <p:cNvPicPr>
+            <a:picLocks noChangeAspect="1"/>
+          </p:cNvPicPr>
+          <p:nvPr/>
+        </p:nvPicPr>
+        <p:blipFill>
+          <a:blip r:embed="rId3"/>
+          <a:stretch>
+            <a:fillRect/>
+          </a:stretch>
+        </p:blipFill>
+        <p:spPr>
+          <a:xfrm>
+            <a:off x="6963344" y="1962911"/>
+            <a:ext cx="615696" cy="231648"/>
+          </a:xfrm>
+          <a:prstGeom prst="rect">
+            <a:avLst/>
+          </a:prstGeom>
+        </p:spPr>
+      </p:pic>
+      <p:sp>
+        <p:nvSpPr>
+          <p:cNvPr id="12" name="TextBox 11"/>
+          <p:cNvSpPr txBox="1"/>
+          <p:nvPr/>
+        </p:nvSpPr>
+        <p:spPr>
+          <a:xfrm>
+            <a:off x="7579040" y="1851660"/>
+            <a:ext cx="280301" cy="457200"/>
+          </a:xfrm>
+          <a:prstGeom prst="rect">
+            <a:avLst/>
+          </a:prstGeom>
+          <a:noFill/>
+        </p:spPr>
+        <p:txBody>
+          <a:bodyPr wrap="none" lIns="45720" rIns="45720" tIns="18288" bIns="18288" anchor="ctr">
+            <a:noAutofit/>
+          </a:bodyPr>
+          <a:lstStyle/>
+          <a:p>
+            <a:pPr algn="l"/>
+            <a:r>
+              <a:rPr sz="2280" b="0" i="0">
+                <a:solidFill>
+                  <a:srgbClr val="1A1A1A"/>
+                </a:solidFill>
+                <a:latin typeface="Lexend"/>
+              </a:rPr>
+              <a:t>.</a:t>
+            </a:r>
+          </a:p>
+        </p:txBody>
+      </p:sp>
+      <p:sp>
+        <p:nvSpPr>
+          <p:cNvPr id="13" name="TextBox 12"/>
+          <p:cNvSpPr txBox="1"/>
+          <p:nvPr/>
+        </p:nvSpPr>
+        <p:spPr>
+          <a:xfrm>
+            <a:off x="1234440" y="2487168"/>
+            <a:ext cx="10058400" cy="429370"/>
+          </a:xfrm>
+          <a:prstGeom prst="rect">
+            <a:avLst/>
+          </a:prstGeom>
+          <a:noFill/>
+        </p:spPr>
+        <p:txBody>
+          <a:bodyPr wrap="square" lIns="45720" rIns="45720" tIns="18288" bIns="18288" anchor="t">
+            <a:spAutoFit/>
+          </a:bodyPr>
+          <a:lstStyle/>
+          <a:p>
+            <a:pPr algn="l"/>
+            <a:r>
+              <a:rPr sz="2280" b="1" i="0">
+                <a:solidFill>
+                  <a:srgbClr val="1A1A1A"/>
+                </a:solidFill>
+                <a:latin typeface="Lexend"/>
+              </a:rPr>
+              <a:t>What is the copy's area?</a:t>
+            </a:r>
+          </a:p>
+        </p:txBody>
+      </p:sp>
+      <p:pic>
+        <p:nvPicPr>
+          <p:cNvPr id="14" name="Picture 13" descr="427887251510c88c.png"/>
+          <p:cNvPicPr>
+            <a:picLocks noChangeAspect="1"/>
+          </p:cNvPicPr>
+          <p:nvPr/>
+        </p:nvPicPr>
+        <p:blipFill>
+          <a:blip r:embed="rId4"/>
+          <a:stretch>
+            <a:fillRect/>
+          </a:stretch>
+        </p:blipFill>
+        <p:spPr>
+          <a:xfrm>
+            <a:off x="4680203" y="3190286"/>
             <a:ext cx="2910840" cy="301752"/>
           </a:xfrm>
           <a:prstGeom prst="rect">
@@ -6904,7 +7914,7 @@
       </p:pic>
       <p:sp>
         <p:nvSpPr>
-          <p:cNvPr id="11" name="TextBox 10"/>
+          <p:cNvPr id="15" name="TextBox 14"/>
           <p:cNvSpPr txBox="1"/>
           <p:nvPr/>
         </p:nvSpPr>
@@ -7260,7 +8270,7 @@
         </p:blipFill>
         <p:spPr>
           <a:xfrm>
-            <a:off x="4673306" y="2086356"/>
+            <a:off x="4673306" y="2083117"/>
             <a:ext cx="886968" cy="390144"/>
           </a:xfrm>
           <a:prstGeom prst="rect">
@@ -7319,7 +8329,7 @@
         </p:blipFill>
         <p:spPr>
           <a:xfrm>
-            <a:off x="4808588" y="2755392"/>
+            <a:off x="4808588" y="2732341"/>
             <a:ext cx="277368" cy="277368"/>
           </a:xfrm>
           <a:prstGeom prst="rect">
@@ -7378,7 +8388,7 @@
         </p:blipFill>
         <p:spPr>
           <a:xfrm>
-            <a:off x="6036297" y="2758440"/>
+            <a:off x="6036297" y="2738437"/>
             <a:ext cx="271272" cy="271272"/>
           </a:xfrm>
           <a:prstGeom prst="rect">
@@ -7657,7 +8667,160 @@
         </p:nvSpPr>
         <p:spPr>
           <a:xfrm>
-            <a:off x="1234440" y="1874519"/>
+            <a:off x="1234440" y="1917192"/>
+            <a:ext cx="2970766" cy="457200"/>
+          </a:xfrm>
+          <a:prstGeom prst="rect">
+            <a:avLst/>
+          </a:prstGeom>
+          <a:noFill/>
+        </p:spPr>
+        <p:txBody>
+          <a:bodyPr wrap="none" lIns="45720" rIns="45720" tIns="18288" bIns="18288" anchor="ctr">
+            <a:noAutofit/>
+          </a:bodyPr>
+          <a:lstStyle/>
+          <a:p>
+            <a:pPr algn="l"/>
+            <a:r>
+              <a:rPr sz="2280" b="0" i="0">
+                <a:solidFill>
+                  <a:srgbClr val="1A1A1A"/>
+                </a:solidFill>
+                <a:latin typeface="Lexend"/>
+              </a:rPr>
+              <a:t>A figure with area </a:t>
+            </a:r>
+          </a:p>
+        </p:txBody>
+      </p:sp>
+      <p:pic>
+        <p:nvPicPr>
+          <p:cNvPr id="9" name="Picture 8" descr="8e6d7d6e505860ca.png"/>
+          <p:cNvPicPr>
+            <a:picLocks noChangeAspect="1"/>
+          </p:cNvPicPr>
+          <p:nvPr/>
+        </p:nvPicPr>
+        <p:blipFill>
+          <a:blip r:embed="rId2"/>
+          <a:stretch>
+            <a:fillRect/>
+          </a:stretch>
+        </p:blipFill>
+        <p:spPr>
+          <a:xfrm>
+            <a:off x="4068046" y="1988819"/>
+            <a:ext cx="987552" cy="277368"/>
+          </a:xfrm>
+          <a:prstGeom prst="rect">
+            <a:avLst/>
+          </a:prstGeom>
+        </p:spPr>
+      </p:pic>
+      <p:sp>
+        <p:nvSpPr>
+          <p:cNvPr id="10" name="TextBox 9"/>
+          <p:cNvSpPr txBox="1"/>
+          <p:nvPr/>
+        </p:nvSpPr>
+        <p:spPr>
+          <a:xfrm>
+            <a:off x="5055598" y="1917192"/>
+            <a:ext cx="2105866" cy="457200"/>
+          </a:xfrm>
+          <a:prstGeom prst="rect">
+            <a:avLst/>
+          </a:prstGeom>
+          <a:noFill/>
+        </p:spPr>
+        <p:txBody>
+          <a:bodyPr wrap="none" lIns="45720" rIns="45720" tIns="18288" bIns="18288" anchor="ctr">
+            <a:noAutofit/>
+          </a:bodyPr>
+          <a:lstStyle/>
+          <a:p>
+            <a:pPr algn="l"/>
+            <a:r>
+              <a:rPr sz="2280" b="0" i="0">
+                <a:solidFill>
+                  <a:srgbClr val="1A1A1A"/>
+                </a:solidFill>
+                <a:latin typeface="Lexend"/>
+              </a:rPr>
+              <a:t> is scaled by </a:t>
+            </a:r>
+          </a:p>
+        </p:txBody>
+      </p:sp>
+      <p:pic>
+        <p:nvPicPr>
+          <p:cNvPr id="11" name="Picture 10" descr="3bcf9a6d74a2c992.png"/>
+          <p:cNvPicPr>
+            <a:picLocks noChangeAspect="1"/>
+          </p:cNvPicPr>
+          <p:nvPr/>
+        </p:nvPicPr>
+        <p:blipFill>
+          <a:blip r:embed="rId3"/>
+          <a:stretch>
+            <a:fillRect/>
+          </a:stretch>
+        </p:blipFill>
+        <p:spPr>
+          <a:xfrm>
+            <a:off x="7024304" y="1874519"/>
+            <a:ext cx="624840" cy="542544"/>
+          </a:xfrm>
+          <a:prstGeom prst="rect">
+            <a:avLst/>
+          </a:prstGeom>
+        </p:spPr>
+      </p:pic>
+      <p:sp>
+        <p:nvSpPr>
+          <p:cNvPr id="12" name="TextBox 11"/>
+          <p:cNvSpPr txBox="1"/>
+          <p:nvPr/>
+        </p:nvSpPr>
+        <p:spPr>
+          <a:xfrm>
+            <a:off x="7649144" y="1917192"/>
+            <a:ext cx="280301" cy="457200"/>
+          </a:xfrm>
+          <a:prstGeom prst="rect">
+            <a:avLst/>
+          </a:prstGeom>
+          <a:noFill/>
+        </p:spPr>
+        <p:txBody>
+          <a:bodyPr wrap="none" lIns="45720" rIns="45720" tIns="18288" bIns="18288" anchor="ctr">
+            <a:noAutofit/>
+          </a:bodyPr>
+          <a:lstStyle/>
+          <a:p>
+            <a:pPr algn="l"/>
+            <a:r>
+              <a:rPr sz="2280" b="0" i="0">
+                <a:solidFill>
+                  <a:srgbClr val="1A1A1A"/>
+                </a:solidFill>
+                <a:latin typeface="Lexend"/>
+              </a:rPr>
+              <a:t>.</a:t>
+            </a:r>
+          </a:p>
+        </p:txBody>
+      </p:sp>
+      <p:sp>
+        <p:nvSpPr>
+          <p:cNvPr id="13" name="TextBox 12"/>
+          <p:cNvSpPr txBox="1"/>
+          <p:nvPr/>
+        </p:nvSpPr>
+        <p:spPr>
+          <a:xfrm>
+            <a:off x="1234440" y="2618232"/>
             <a:ext cx="10058400" cy="429370"/>
           </a:xfrm>
           <a:prstGeom prst="rect">
@@ -7673,65 +8836,12 @@
           <a:p>
             <a:pPr algn="l"/>
             <a:r>
-              <a:rPr sz="2280" b="0" i="0">
+              <a:rPr sz="2280" b="1" i="0">
                 <a:solidFill>
                   <a:srgbClr val="1A1A1A"/>
                 </a:solidFill>
                 <a:latin typeface="Lexend"/>
               </a:rPr>
-              <a:t>A figure with area 48 cm</a:t>
-            </a:r>
-            <a:r>
-              <a:rPr sz="2280" b="0" i="0" baseline="30000">
-                <a:solidFill>
-                  <a:srgbClr val="1A1A1A"/>
-                </a:solidFill>
-                <a:latin typeface="Lexend"/>
-              </a:rPr>
-              <a:t>2</a:t>
-            </a:r>
-            <a:r>
-              <a:rPr sz="2280" b="0" i="0">
-                <a:solidFill>
-                  <a:srgbClr val="1A1A1A"/>
-                </a:solidFill>
-                <a:latin typeface="Lexend"/>
-              </a:rPr>
-              <a:t> is scaled by k = ½.</a:t>
-            </a:r>
-          </a:p>
-        </p:txBody>
-      </p:sp>
-      <p:sp>
-        <p:nvSpPr>
-          <p:cNvPr id="9" name="TextBox 8"/>
-          <p:cNvSpPr txBox="1"/>
-          <p:nvPr/>
-        </p:nvSpPr>
-        <p:spPr>
-          <a:xfrm>
-            <a:off x="1234440" y="2413618"/>
-            <a:ext cx="10058400" cy="429370"/>
-          </a:xfrm>
-          <a:prstGeom prst="rect">
-            <a:avLst/>
-          </a:prstGeom>
-          <a:noFill/>
-        </p:spPr>
-        <p:txBody>
-          <a:bodyPr wrap="square" lIns="45720" rIns="45720" tIns="18288" bIns="18288" anchor="t">
-            <a:spAutoFit/>
-          </a:bodyPr>
-          <a:lstStyle/>
-          <a:p>
-            <a:pPr algn="l"/>
-            <a:r>
-              <a:rPr sz="2280" b="1" i="0">
-                <a:solidFill>
-                  <a:srgbClr val="1A1A1A"/>
-                </a:solidFill>
-                <a:latin typeface="Lexend"/>
-              </a:rPr>
               <a:t>What is the copy's area?</a:t>
             </a:r>
           </a:p>
@@ -7739,7 +8849,7 @@
       </p:sp>
       <p:sp>
         <p:nvSpPr>
-          <p:cNvPr id="10" name="TextBox 9"/>
+          <p:cNvPr id="14" name="TextBox 13"/>
           <p:cNvSpPr txBox="1"/>
           <p:nvPr/>
         </p:nvSpPr>
@@ -8008,17 +9118,17 @@
         </p:nvSpPr>
         <p:spPr>
           <a:xfrm>
-            <a:off x="1234440" y="1874519"/>
-            <a:ext cx="10058400" cy="429370"/>
-          </a:xfrm>
-          <a:prstGeom prst="rect">
-            <a:avLst/>
-          </a:prstGeom>
-          <a:noFill/>
-        </p:spPr>
-        <p:txBody>
-          <a:bodyPr wrap="square" lIns="45720" rIns="45720" tIns="18288" bIns="18288" anchor="t">
-            <a:spAutoFit/>
+            <a:off x="1234440" y="1917192"/>
+            <a:ext cx="2970766" cy="457200"/>
+          </a:xfrm>
+          <a:prstGeom prst="rect">
+            <a:avLst/>
+          </a:prstGeom>
+          <a:noFill/>
+        </p:spPr>
+        <p:txBody>
+          <a:bodyPr wrap="none" lIns="45720" rIns="45720" tIns="18288" bIns="18288" anchor="ctr">
+            <a:noAutofit/>
           </a:bodyPr>
           <a:lstStyle/>
           <a:p>
@@ -8030,67 +9140,14 @@
                 </a:solidFill>
                 <a:latin typeface="Lexend"/>
               </a:rPr>
-              <a:t>A figure with area 48 cm</a:t>
-            </a:r>
-            <a:r>
-              <a:rPr sz="2280" b="0" i="0" baseline="30000">
-                <a:solidFill>
-                  <a:srgbClr val="1A1A1A"/>
-                </a:solidFill>
-                <a:latin typeface="Lexend"/>
-              </a:rPr>
-              <a:t>2</a:t>
-            </a:r>
-            <a:r>
-              <a:rPr sz="2280" b="0" i="0">
-                <a:solidFill>
-                  <a:srgbClr val="1A1A1A"/>
-                </a:solidFill>
-                <a:latin typeface="Lexend"/>
-              </a:rPr>
-              <a:t> is scaled by k = ½.</a:t>
-            </a:r>
-          </a:p>
-        </p:txBody>
-      </p:sp>
-      <p:sp>
-        <p:nvSpPr>
-          <p:cNvPr id="9" name="TextBox 8"/>
-          <p:cNvSpPr txBox="1"/>
-          <p:nvPr/>
-        </p:nvSpPr>
-        <p:spPr>
-          <a:xfrm>
-            <a:off x="1234440" y="2413618"/>
-            <a:ext cx="10058400" cy="429370"/>
-          </a:xfrm>
-          <a:prstGeom prst="rect">
-            <a:avLst/>
-          </a:prstGeom>
-          <a:noFill/>
-        </p:spPr>
-        <p:txBody>
-          <a:bodyPr wrap="square" lIns="45720" rIns="45720" tIns="18288" bIns="18288" anchor="t">
-            <a:spAutoFit/>
-          </a:bodyPr>
-          <a:lstStyle/>
-          <a:p>
-            <a:pPr algn="l"/>
-            <a:r>
-              <a:rPr sz="2280" b="1" i="0">
-                <a:solidFill>
-                  <a:srgbClr val="1A1A1A"/>
-                </a:solidFill>
-                <a:latin typeface="Lexend"/>
-              </a:rPr>
-              <a:t>What is the copy's area?</a:t>
+              <a:t>A figure with area </a:t>
             </a:r>
           </a:p>
         </p:txBody>
       </p:sp>
       <p:pic>
         <p:nvPicPr>
-          <p:cNvPr id="10" name="Picture 9" descr="ba1e3c512174bce1.png"/>
+          <p:cNvPr id="9" name="Picture 8" descr="05de746722b060c4.png"/>
           <p:cNvPicPr>
             <a:picLocks noChangeAspect="1"/>
           </p:cNvPicPr>
@@ -8104,7 +9161,160 @@
         </p:blipFill>
         <p:spPr>
           <a:xfrm>
-            <a:off x="4401311" y="3071588"/>
+            <a:off x="4068046" y="1988819"/>
+            <a:ext cx="993648" cy="277368"/>
+          </a:xfrm>
+          <a:prstGeom prst="rect">
+            <a:avLst/>
+          </a:prstGeom>
+        </p:spPr>
+      </p:pic>
+      <p:sp>
+        <p:nvSpPr>
+          <p:cNvPr id="10" name="TextBox 9"/>
+          <p:cNvSpPr txBox="1"/>
+          <p:nvPr/>
+        </p:nvSpPr>
+        <p:spPr>
+          <a:xfrm>
+            <a:off x="5061694" y="1917192"/>
+            <a:ext cx="2105866" cy="457200"/>
+          </a:xfrm>
+          <a:prstGeom prst="rect">
+            <a:avLst/>
+          </a:prstGeom>
+          <a:noFill/>
+        </p:spPr>
+        <p:txBody>
+          <a:bodyPr wrap="none" lIns="45720" rIns="45720" tIns="18288" bIns="18288" anchor="ctr">
+            <a:noAutofit/>
+          </a:bodyPr>
+          <a:lstStyle/>
+          <a:p>
+            <a:pPr algn="l"/>
+            <a:r>
+              <a:rPr sz="2280" b="0" i="0">
+                <a:solidFill>
+                  <a:srgbClr val="1A1A1A"/>
+                </a:solidFill>
+                <a:latin typeface="Lexend"/>
+              </a:rPr>
+              <a:t> is scaled by </a:t>
+            </a:r>
+          </a:p>
+        </p:txBody>
+      </p:sp>
+      <p:pic>
+        <p:nvPicPr>
+          <p:cNvPr id="11" name="Picture 10" descr="f7228653a96dd5cd.png"/>
+          <p:cNvPicPr>
+            <a:picLocks noChangeAspect="1"/>
+          </p:cNvPicPr>
+          <p:nvPr/>
+        </p:nvPicPr>
+        <p:blipFill>
+          <a:blip r:embed="rId3"/>
+          <a:stretch>
+            <a:fillRect/>
+          </a:stretch>
+        </p:blipFill>
+        <p:spPr>
+          <a:xfrm>
+            <a:off x="7030400" y="1874519"/>
+            <a:ext cx="621792" cy="542544"/>
+          </a:xfrm>
+          <a:prstGeom prst="rect">
+            <a:avLst/>
+          </a:prstGeom>
+        </p:spPr>
+      </p:pic>
+      <p:sp>
+        <p:nvSpPr>
+          <p:cNvPr id="12" name="TextBox 11"/>
+          <p:cNvSpPr txBox="1"/>
+          <p:nvPr/>
+        </p:nvSpPr>
+        <p:spPr>
+          <a:xfrm>
+            <a:off x="7652192" y="1917192"/>
+            <a:ext cx="280301" cy="457200"/>
+          </a:xfrm>
+          <a:prstGeom prst="rect">
+            <a:avLst/>
+          </a:prstGeom>
+          <a:noFill/>
+        </p:spPr>
+        <p:txBody>
+          <a:bodyPr wrap="none" lIns="45720" rIns="45720" tIns="18288" bIns="18288" anchor="ctr">
+            <a:noAutofit/>
+          </a:bodyPr>
+          <a:lstStyle/>
+          <a:p>
+            <a:pPr algn="l"/>
+            <a:r>
+              <a:rPr sz="2280" b="0" i="0">
+                <a:solidFill>
+                  <a:srgbClr val="1A1A1A"/>
+                </a:solidFill>
+                <a:latin typeface="Lexend"/>
+              </a:rPr>
+              <a:t>.</a:t>
+            </a:r>
+          </a:p>
+        </p:txBody>
+      </p:sp>
+      <p:sp>
+        <p:nvSpPr>
+          <p:cNvPr id="13" name="TextBox 12"/>
+          <p:cNvSpPr txBox="1"/>
+          <p:nvPr/>
+        </p:nvSpPr>
+        <p:spPr>
+          <a:xfrm>
+            <a:off x="1234440" y="2618232"/>
+            <a:ext cx="10058400" cy="429370"/>
+          </a:xfrm>
+          <a:prstGeom prst="rect">
+            <a:avLst/>
+          </a:prstGeom>
+          <a:noFill/>
+        </p:spPr>
+        <p:txBody>
+          <a:bodyPr wrap="square" lIns="45720" rIns="45720" tIns="18288" bIns="18288" anchor="t">
+            <a:spAutoFit/>
+          </a:bodyPr>
+          <a:lstStyle/>
+          <a:p>
+            <a:pPr algn="l"/>
+            <a:r>
+              <a:rPr sz="2280" b="1" i="0">
+                <a:solidFill>
+                  <a:srgbClr val="1A1A1A"/>
+                </a:solidFill>
+                <a:latin typeface="Lexend"/>
+              </a:rPr>
+              <a:t>What is the copy's area?</a:t>
+            </a:r>
+          </a:p>
+        </p:txBody>
+      </p:sp>
+      <p:pic>
+        <p:nvPicPr>
+          <p:cNvPr id="14" name="Picture 13" descr="ba1e3c512174bce1.png"/>
+          <p:cNvPicPr>
+            <a:picLocks noChangeAspect="1"/>
+          </p:cNvPicPr>
+          <p:nvPr/>
+        </p:nvPicPr>
+        <p:blipFill>
+          <a:blip r:embed="rId4"/>
+          <a:stretch>
+            <a:fillRect/>
+          </a:stretch>
+        </p:blipFill>
+        <p:spPr>
+          <a:xfrm>
+            <a:off x="4401311" y="3276202"/>
             <a:ext cx="3474720" cy="612648"/>
           </a:xfrm>
           <a:prstGeom prst="rect">
@@ -8114,7 +9324,7 @@
       </p:pic>
       <p:sp>
         <p:nvSpPr>
-          <p:cNvPr id="11" name="TextBox 10"/>
+          <p:cNvPr id="15" name="TextBox 14"/>
           <p:cNvSpPr txBox="1"/>
           <p:nvPr/>
         </p:nvSpPr>
@@ -8392,17 +9602,17 @@
         </p:nvSpPr>
         <p:spPr>
           <a:xfrm>
-            <a:off x="1234440" y="1874519"/>
-            <a:ext cx="10058400" cy="429370"/>
-          </a:xfrm>
-          <a:prstGeom prst="rect">
-            <a:avLst/>
-          </a:prstGeom>
-          <a:noFill/>
-        </p:spPr>
-        <p:txBody>
-          <a:bodyPr wrap="square" lIns="45720" rIns="45720" tIns="18288" bIns="18288" anchor="t">
-            <a:spAutoFit/>
+            <a:off x="1234440" y="1851660"/>
+            <a:ext cx="2970766" cy="457200"/>
+          </a:xfrm>
+          <a:prstGeom prst="rect">
+            <a:avLst/>
+          </a:prstGeom>
+          <a:noFill/>
+        </p:spPr>
+        <p:txBody>
+          <a:bodyPr wrap="none" lIns="45720" rIns="45720" tIns="18288" bIns="18288" anchor="ctr">
+            <a:noAutofit/>
           </a:bodyPr>
           <a:lstStyle/>
           <a:p>
@@ -8414,102 +9624,14 @@
                 </a:solidFill>
                 <a:latin typeface="Lexend"/>
               </a:rPr>
-              <a:t>A figure with area 10 cm</a:t>
-            </a:r>
-            <a:r>
-              <a:rPr sz="2280" b="0" i="0" baseline="30000">
-                <a:solidFill>
-                  <a:srgbClr val="1A1A1A"/>
-                </a:solidFill>
-                <a:latin typeface="Lexend"/>
-              </a:rPr>
-              <a:t>2</a:t>
-            </a:r>
-            <a:r>
-              <a:rPr sz="2280" b="0" i="0">
-                <a:solidFill>
-                  <a:srgbClr val="1A1A1A"/>
-                </a:solidFill>
-                <a:latin typeface="Lexend"/>
-              </a:rPr>
-              <a:t> is scaled by k = 3.</a:t>
-            </a:r>
-          </a:p>
-        </p:txBody>
-      </p:sp>
-      <p:sp>
-        <p:nvSpPr>
-          <p:cNvPr id="9" name="TextBox 8"/>
-          <p:cNvSpPr txBox="1"/>
-          <p:nvPr/>
-        </p:nvSpPr>
-        <p:spPr>
-          <a:xfrm>
-            <a:off x="1234440" y="2413618"/>
-            <a:ext cx="10058400" cy="429370"/>
-          </a:xfrm>
-          <a:prstGeom prst="rect">
-            <a:avLst/>
-          </a:prstGeom>
-          <a:noFill/>
-        </p:spPr>
-        <p:txBody>
-          <a:bodyPr wrap="square" lIns="45720" rIns="45720" tIns="18288" bIns="18288" anchor="t">
-            <a:spAutoFit/>
-          </a:bodyPr>
-          <a:lstStyle/>
-          <a:p>
-            <a:pPr algn="l"/>
-            <a:r>
-              <a:rPr sz="2280" b="1" i="0">
-                <a:solidFill>
-                  <a:srgbClr val="1A1A1A"/>
-                </a:solidFill>
-                <a:latin typeface="Lexend"/>
-              </a:rPr>
-              <a:t>What is the copy's area?</a:t>
-            </a:r>
-          </a:p>
-        </p:txBody>
-      </p:sp>
-      <p:sp>
-        <p:nvSpPr>
-          <p:cNvPr id="10" name="TextBox 9"/>
-          <p:cNvSpPr txBox="1"/>
-          <p:nvPr/>
-        </p:nvSpPr>
-        <p:spPr>
-          <a:xfrm>
-            <a:off x="1691640" y="3144740"/>
-            <a:ext cx="594360" cy="457200"/>
-          </a:xfrm>
-          <a:prstGeom prst="rect">
-            <a:avLst/>
-          </a:prstGeom>
-          <a:noFill/>
-        </p:spPr>
-        <p:txBody>
-          <a:bodyPr wrap="square" lIns="45720" rIns="45720" tIns="18288" bIns="18288" anchor="t">
-            <a:spAutoFit/>
-          </a:bodyPr>
-          <a:lstStyle/>
-          <a:p>
-            <a:pPr algn="l"/>
-            <a:r>
-              <a:rPr sz="2280" b="1" i="0">
-                <a:solidFill>
-                  <a:srgbClr val="1A1A1A"/>
-                </a:solidFill>
-                <a:latin typeface="Lexend"/>
-              </a:rPr>
-              <a:t>A.</a:t>
+              <a:t>A figure with area </a:t>
             </a:r>
           </a:p>
         </p:txBody>
       </p:sp>
       <p:pic>
         <p:nvPicPr>
-          <p:cNvPr id="11" name="Picture 10" descr="78f7267bd6258a9f.png"/>
+          <p:cNvPr id="9" name="Picture 8" descr="6285ccdfa38694a2.png"/>
           <p:cNvPicPr>
             <a:picLocks noChangeAspect="1"/>
           </p:cNvPicPr>
@@ -8523,8 +9645,8 @@
         </p:blipFill>
         <p:spPr>
           <a:xfrm>
-            <a:off x="2258568" y="3155408"/>
-            <a:ext cx="420624" cy="280416"/>
+            <a:off x="4068046" y="1923287"/>
+            <a:ext cx="944880" cy="277368"/>
           </a:xfrm>
           <a:prstGeom prst="rect">
             <a:avLst/>
@@ -8533,42 +9655,42 @@
       </p:pic>
       <p:sp>
         <p:nvSpPr>
-          <p:cNvPr id="12" name="TextBox 11"/>
-          <p:cNvSpPr txBox="1"/>
-          <p:nvPr/>
-        </p:nvSpPr>
-        <p:spPr>
-          <a:xfrm>
-            <a:off x="6537959" y="3144740"/>
-            <a:ext cx="594360" cy="457200"/>
-          </a:xfrm>
-          <a:prstGeom prst="rect">
-            <a:avLst/>
-          </a:prstGeom>
-          <a:noFill/>
-        </p:spPr>
-        <p:txBody>
-          <a:bodyPr wrap="square" lIns="45720" rIns="45720" tIns="18288" bIns="18288" anchor="t">
-            <a:spAutoFit/>
-          </a:bodyPr>
-          <a:lstStyle/>
-          <a:p>
-            <a:pPr algn="l"/>
-            <a:r>
-              <a:rPr sz="2280" b="1" i="0">
+          <p:cNvPr id="10" name="TextBox 9"/>
+          <p:cNvSpPr txBox="1"/>
+          <p:nvPr/>
+        </p:nvSpPr>
+        <p:spPr>
+          <a:xfrm>
+            <a:off x="5012926" y="1851660"/>
+            <a:ext cx="2105866" cy="457200"/>
+          </a:xfrm>
+          <a:prstGeom prst="rect">
+            <a:avLst/>
+          </a:prstGeom>
+          <a:noFill/>
+        </p:spPr>
+        <p:txBody>
+          <a:bodyPr wrap="none" lIns="45720" rIns="45720" tIns="18288" bIns="18288" anchor="ctr">
+            <a:noAutofit/>
+          </a:bodyPr>
+          <a:lstStyle/>
+          <a:p>
+            <a:pPr algn="l"/>
+            <a:r>
+              <a:rPr sz="2280" b="0" i="0">
                 <a:solidFill>
                   <a:srgbClr val="1A1A1A"/>
                 </a:solidFill>
                 <a:latin typeface="Lexend"/>
               </a:rPr>
-              <a:t>B.</a:t>
+              <a:t> is scaled by </a:t>
             </a:r>
           </a:p>
         </p:txBody>
       </p:sp>
       <p:pic>
         <p:nvPicPr>
-          <p:cNvPr id="13" name="Picture 12" descr="b6b586116b6ce2ae.png"/>
+          <p:cNvPr id="11" name="Picture 10" descr="0937735c0d6e3897.png"/>
           <p:cNvPicPr>
             <a:picLocks noChangeAspect="1"/>
           </p:cNvPicPr>
@@ -8582,8 +9704,8 @@
         </p:blipFill>
         <p:spPr>
           <a:xfrm>
-            <a:off x="7104888" y="3155408"/>
-            <a:ext cx="417576" cy="280416"/>
+            <a:off x="6981632" y="1965960"/>
+            <a:ext cx="603504" cy="234696"/>
           </a:xfrm>
           <a:prstGeom prst="rect">
             <a:avLst/>
@@ -8592,14 +9714,49 @@
       </p:pic>
       <p:sp>
         <p:nvSpPr>
-          <p:cNvPr id="14" name="TextBox 13"/>
-          <p:cNvSpPr txBox="1"/>
-          <p:nvPr/>
-        </p:nvSpPr>
-        <p:spPr>
-          <a:xfrm>
-            <a:off x="1691640" y="3757388"/>
-            <a:ext cx="594360" cy="457200"/>
+          <p:cNvPr id="12" name="TextBox 11"/>
+          <p:cNvSpPr txBox="1"/>
+          <p:nvPr/>
+        </p:nvSpPr>
+        <p:spPr>
+          <a:xfrm>
+            <a:off x="7585136" y="1851660"/>
+            <a:ext cx="280301" cy="457200"/>
+          </a:xfrm>
+          <a:prstGeom prst="rect">
+            <a:avLst/>
+          </a:prstGeom>
+          <a:noFill/>
+        </p:spPr>
+        <p:txBody>
+          <a:bodyPr wrap="none" lIns="45720" rIns="45720" tIns="18288" bIns="18288" anchor="ctr">
+            <a:noAutofit/>
+          </a:bodyPr>
+          <a:lstStyle/>
+          <a:p>
+            <a:pPr algn="l"/>
+            <a:r>
+              <a:rPr sz="2280" b="0" i="0">
+                <a:solidFill>
+                  <a:srgbClr val="1A1A1A"/>
+                </a:solidFill>
+                <a:latin typeface="Lexend"/>
+              </a:rPr>
+              <a:t>.</a:t>
+            </a:r>
+          </a:p>
+        </p:txBody>
+      </p:sp>
+      <p:sp>
+        <p:nvSpPr>
+          <p:cNvPr id="13" name="TextBox 12"/>
+          <p:cNvSpPr txBox="1"/>
+          <p:nvPr/>
+        </p:nvSpPr>
+        <p:spPr>
+          <a:xfrm>
+            <a:off x="1234440" y="2487168"/>
+            <a:ext cx="10058400" cy="429370"/>
           </a:xfrm>
           <a:prstGeom prst="rect">
             <a:avLst/>
@@ -8620,14 +9777,49 @@
                 </a:solidFill>
                 <a:latin typeface="Lexend"/>
               </a:rPr>
-              <a:t>C.</a:t>
+              <a:t>What is the copy's area?</a:t>
+            </a:r>
+          </a:p>
+        </p:txBody>
+      </p:sp>
+      <p:sp>
+        <p:nvSpPr>
+          <p:cNvPr id="14" name="TextBox 13"/>
+          <p:cNvSpPr txBox="1"/>
+          <p:nvPr/>
+        </p:nvSpPr>
+        <p:spPr>
+          <a:xfrm>
+            <a:off x="1691640" y="3218290"/>
+            <a:ext cx="594360" cy="457200"/>
+          </a:xfrm>
+          <a:prstGeom prst="rect">
+            <a:avLst/>
+          </a:prstGeom>
+          <a:noFill/>
+        </p:spPr>
+        <p:txBody>
+          <a:bodyPr wrap="square" lIns="45720" rIns="45720" tIns="18288" bIns="18288" anchor="t">
+            <a:spAutoFit/>
+          </a:bodyPr>
+          <a:lstStyle/>
+          <a:p>
+            <a:pPr algn="l"/>
+            <a:r>
+              <a:rPr sz="2280" b="1" i="0">
+                <a:solidFill>
+                  <a:srgbClr val="1A1A1A"/>
+                </a:solidFill>
+                <a:latin typeface="Lexend"/>
+              </a:rPr>
+              <a:t>A.</a:t>
             </a:r>
           </a:p>
         </p:txBody>
       </p:sp>
       <p:pic>
         <p:nvPicPr>
-          <p:cNvPr id="15" name="Picture 14" descr="da98a1872183d6f8.png"/>
+          <p:cNvPr id="15" name="Picture 14" descr="78f7267bd6258a9f.png"/>
           <p:cNvPicPr>
             <a:picLocks noChangeAspect="1"/>
           </p:cNvPicPr>
@@ -8641,8 +9833,8 @@
         </p:blipFill>
         <p:spPr>
           <a:xfrm>
-            <a:off x="2258568" y="3769580"/>
-            <a:ext cx="414528" cy="277368"/>
+            <a:off x="2258568" y="3209146"/>
+            <a:ext cx="420624" cy="280416"/>
           </a:xfrm>
           <a:prstGeom prst="rect">
             <a:avLst/>
@@ -8657,7 +9849,7 @@
         </p:nvSpPr>
         <p:spPr>
           <a:xfrm>
-            <a:off x="6537959" y="3757388"/>
+            <a:off x="6537959" y="3218290"/>
             <a:ext cx="594360" cy="457200"/>
           </a:xfrm>
           <a:prstGeom prst="rect">
@@ -8679,14 +9871,14 @@
                 </a:solidFill>
                 <a:latin typeface="Lexend"/>
               </a:rPr>
-              <a:t>D.</a:t>
+              <a:t>B.</a:t>
             </a:r>
           </a:p>
         </p:txBody>
       </p:sp>
       <p:pic>
         <p:nvPicPr>
-          <p:cNvPr id="17" name="Picture 16" descr="65ff48fc3d12dc08.png"/>
+          <p:cNvPr id="17" name="Picture 16" descr="b6b586116b6ce2ae.png"/>
           <p:cNvPicPr>
             <a:picLocks noChangeAspect="1"/>
           </p:cNvPicPr>
@@ -8700,7 +9892,125 @@
         </p:blipFill>
         <p:spPr>
           <a:xfrm>
-            <a:off x="7104888" y="3769580"/>
+            <a:off x="7104888" y="3209146"/>
+            <a:ext cx="417576" cy="280416"/>
+          </a:xfrm>
+          <a:prstGeom prst="rect">
+            <a:avLst/>
+          </a:prstGeom>
+        </p:spPr>
+      </p:pic>
+      <p:sp>
+        <p:nvSpPr>
+          <p:cNvPr id="18" name="TextBox 17"/>
+          <p:cNvSpPr txBox="1"/>
+          <p:nvPr/>
+        </p:nvSpPr>
+        <p:spPr>
+          <a:xfrm>
+            <a:off x="1691640" y="3830938"/>
+            <a:ext cx="594360" cy="457200"/>
+          </a:xfrm>
+          <a:prstGeom prst="rect">
+            <a:avLst/>
+          </a:prstGeom>
+          <a:noFill/>
+        </p:spPr>
+        <p:txBody>
+          <a:bodyPr wrap="square" lIns="45720" rIns="45720" tIns="18288" bIns="18288" anchor="t">
+            <a:spAutoFit/>
+          </a:bodyPr>
+          <a:lstStyle/>
+          <a:p>
+            <a:pPr algn="l"/>
+            <a:r>
+              <a:rPr sz="2280" b="1" i="0">
+                <a:solidFill>
+                  <a:srgbClr val="1A1A1A"/>
+                </a:solidFill>
+                <a:latin typeface="Lexend"/>
+              </a:rPr>
+              <a:t>C.</a:t>
+            </a:r>
+          </a:p>
+        </p:txBody>
+      </p:sp>
+      <p:pic>
+        <p:nvPicPr>
+          <p:cNvPr id="19" name="Picture 18" descr="da98a1872183d6f8.png"/>
+          <p:cNvPicPr>
+            <a:picLocks noChangeAspect="1"/>
+          </p:cNvPicPr>
+          <p:nvPr/>
+        </p:nvPicPr>
+        <p:blipFill>
+          <a:blip r:embed="rId6"/>
+          <a:stretch>
+            <a:fillRect/>
+          </a:stretch>
+        </p:blipFill>
+        <p:spPr>
+          <a:xfrm>
+            <a:off x="2258568" y="3824842"/>
+            <a:ext cx="414528" cy="277368"/>
+          </a:xfrm>
+          <a:prstGeom prst="rect">
+            <a:avLst/>
+          </a:prstGeom>
+        </p:spPr>
+      </p:pic>
+      <p:sp>
+        <p:nvSpPr>
+          <p:cNvPr id="20" name="TextBox 19"/>
+          <p:cNvSpPr txBox="1"/>
+          <p:nvPr/>
+        </p:nvSpPr>
+        <p:spPr>
+          <a:xfrm>
+            <a:off x="6537959" y="3830938"/>
+            <a:ext cx="594360" cy="457200"/>
+          </a:xfrm>
+          <a:prstGeom prst="rect">
+            <a:avLst/>
+          </a:prstGeom>
+          <a:noFill/>
+        </p:spPr>
+        <p:txBody>
+          <a:bodyPr wrap="square" lIns="45720" rIns="45720" tIns="18288" bIns="18288" anchor="t">
+            <a:spAutoFit/>
+          </a:bodyPr>
+          <a:lstStyle/>
+          <a:p>
+            <a:pPr algn="l"/>
+            <a:r>
+              <a:rPr sz="2280" b="1" i="0">
+                <a:solidFill>
+                  <a:srgbClr val="1A1A1A"/>
+                </a:solidFill>
+                <a:latin typeface="Lexend"/>
+              </a:rPr>
+              <a:t>D.</a:t>
+            </a:r>
+          </a:p>
+        </p:txBody>
+      </p:sp>
+      <p:pic>
+        <p:nvPicPr>
+          <p:cNvPr id="21" name="Picture 20" descr="65ff48fc3d12dc08.png"/>
+          <p:cNvPicPr>
+            <a:picLocks noChangeAspect="1"/>
+          </p:cNvPicPr>
+          <p:nvPr/>
+        </p:nvPicPr>
+        <p:blipFill>
+          <a:blip r:embed="rId7"/>
+          <a:stretch>
+            <a:fillRect/>
+          </a:stretch>
+        </p:blipFill>
+        <p:spPr>
+          <a:xfrm>
+            <a:off x="7104888" y="3824842"/>
             <a:ext cx="350520" cy="277368"/>
           </a:xfrm>
           <a:prstGeom prst="rect">
@@ -8710,13 +10020,13 @@
       </p:pic>
       <p:sp>
         <p:nvSpPr>
-          <p:cNvPr id="18" name="TextBox 17"/>
-          <p:cNvSpPr txBox="1"/>
-          <p:nvPr/>
-        </p:nvSpPr>
-        <p:spPr>
-          <a:xfrm>
-            <a:off x="777240" y="4434044"/>
+          <p:cNvPr id="22" name="TextBox 21"/>
+          <p:cNvSpPr txBox="1"/>
+          <p:nvPr/>
+        </p:nvSpPr>
+        <p:spPr>
+          <a:xfrm>
+            <a:off x="777240" y="4507594"/>
             <a:ext cx="10607040" cy="457200"/>
           </a:xfrm>
           <a:prstGeom prst="rect">
@@ -8979,17 +10289,17 @@
         </p:nvSpPr>
         <p:spPr>
           <a:xfrm>
-            <a:off x="1234440" y="1874519"/>
-            <a:ext cx="10058400" cy="429370"/>
-          </a:xfrm>
-          <a:prstGeom prst="rect">
-            <a:avLst/>
-          </a:prstGeom>
-          <a:noFill/>
-        </p:spPr>
-        <p:txBody>
-          <a:bodyPr wrap="square" lIns="45720" rIns="45720" tIns="18288" bIns="18288" anchor="t">
-            <a:spAutoFit/>
+            <a:off x="1234440" y="1851660"/>
+            <a:ext cx="2970766" cy="457200"/>
+          </a:xfrm>
+          <a:prstGeom prst="rect">
+            <a:avLst/>
+          </a:prstGeom>
+          <a:noFill/>
+        </p:spPr>
+        <p:txBody>
+          <a:bodyPr wrap="none" lIns="45720" rIns="45720" tIns="18288" bIns="18288" anchor="ctr">
+            <a:noAutofit/>
           </a:bodyPr>
           <a:lstStyle/>
           <a:p>
@@ -9001,67 +10311,14 @@
                 </a:solidFill>
                 <a:latin typeface="Lexend"/>
               </a:rPr>
-              <a:t>A figure with area 10 cm</a:t>
-            </a:r>
-            <a:r>
-              <a:rPr sz="2280" b="0" i="0" baseline="30000">
-                <a:solidFill>
-                  <a:srgbClr val="1A1A1A"/>
-                </a:solidFill>
-                <a:latin typeface="Lexend"/>
-              </a:rPr>
-              <a:t>2</a:t>
-            </a:r>
-            <a:r>
-              <a:rPr sz="2280" b="0" i="0">
-                <a:solidFill>
-                  <a:srgbClr val="1A1A1A"/>
-                </a:solidFill>
-                <a:latin typeface="Lexend"/>
-              </a:rPr>
-              <a:t> is scaled by k = 3.</a:t>
-            </a:r>
-          </a:p>
-        </p:txBody>
-      </p:sp>
-      <p:sp>
-        <p:nvSpPr>
-          <p:cNvPr id="9" name="TextBox 8"/>
-          <p:cNvSpPr txBox="1"/>
-          <p:nvPr/>
-        </p:nvSpPr>
-        <p:spPr>
-          <a:xfrm>
-            <a:off x="1234440" y="2413618"/>
-            <a:ext cx="10058400" cy="429370"/>
-          </a:xfrm>
-          <a:prstGeom prst="rect">
-            <a:avLst/>
-          </a:prstGeom>
-          <a:noFill/>
-        </p:spPr>
-        <p:txBody>
-          <a:bodyPr wrap="square" lIns="45720" rIns="45720" tIns="18288" bIns="18288" anchor="t">
-            <a:spAutoFit/>
-          </a:bodyPr>
-          <a:lstStyle/>
-          <a:p>
-            <a:pPr algn="l"/>
-            <a:r>
-              <a:rPr sz="2280" b="1" i="0">
-                <a:solidFill>
-                  <a:srgbClr val="1A1A1A"/>
-                </a:solidFill>
-                <a:latin typeface="Lexend"/>
-              </a:rPr>
-              <a:t>What is the copy's area?</a:t>
+              <a:t>A figure with area </a:t>
             </a:r>
           </a:p>
         </p:txBody>
       </p:sp>
       <p:pic>
         <p:nvPicPr>
-          <p:cNvPr id="10" name="Picture 9" descr="8413de0e199e541e.png"/>
+          <p:cNvPr id="9" name="Picture 8" descr="090d1f48e1a71801.png"/>
           <p:cNvPicPr>
             <a:picLocks noChangeAspect="1"/>
           </p:cNvPicPr>
@@ -9075,7 +10332,160 @@
         </p:blipFill>
         <p:spPr>
           <a:xfrm>
-            <a:off x="4680203" y="3124928"/>
+            <a:off x="4068046" y="1923287"/>
+            <a:ext cx="944880" cy="277368"/>
+          </a:xfrm>
+          <a:prstGeom prst="rect">
+            <a:avLst/>
+          </a:prstGeom>
+        </p:spPr>
+      </p:pic>
+      <p:sp>
+        <p:nvSpPr>
+          <p:cNvPr id="10" name="TextBox 9"/>
+          <p:cNvSpPr txBox="1"/>
+          <p:nvPr/>
+        </p:nvSpPr>
+        <p:spPr>
+          <a:xfrm>
+            <a:off x="5012926" y="1851660"/>
+            <a:ext cx="2105866" cy="457200"/>
+          </a:xfrm>
+          <a:prstGeom prst="rect">
+            <a:avLst/>
+          </a:prstGeom>
+          <a:noFill/>
+        </p:spPr>
+        <p:txBody>
+          <a:bodyPr wrap="none" lIns="45720" rIns="45720" tIns="18288" bIns="18288" anchor="ctr">
+            <a:noAutofit/>
+          </a:bodyPr>
+          <a:lstStyle/>
+          <a:p>
+            <a:pPr algn="l"/>
+            <a:r>
+              <a:rPr sz="2280" b="0" i="0">
+                <a:solidFill>
+                  <a:srgbClr val="1A1A1A"/>
+                </a:solidFill>
+                <a:latin typeface="Lexend"/>
+              </a:rPr>
+              <a:t> is scaled by </a:t>
+            </a:r>
+          </a:p>
+        </p:txBody>
+      </p:sp>
+      <p:pic>
+        <p:nvPicPr>
+          <p:cNvPr id="11" name="Picture 10" descr="065fb73e082dfec6.png"/>
+          <p:cNvPicPr>
+            <a:picLocks noChangeAspect="1"/>
+          </p:cNvPicPr>
+          <p:nvPr/>
+        </p:nvPicPr>
+        <p:blipFill>
+          <a:blip r:embed="rId3"/>
+          <a:stretch>
+            <a:fillRect/>
+          </a:stretch>
+        </p:blipFill>
+        <p:spPr>
+          <a:xfrm>
+            <a:off x="6981632" y="1965960"/>
+            <a:ext cx="606552" cy="234696"/>
+          </a:xfrm>
+          <a:prstGeom prst="rect">
+            <a:avLst/>
+          </a:prstGeom>
+        </p:spPr>
+      </p:pic>
+      <p:sp>
+        <p:nvSpPr>
+          <p:cNvPr id="12" name="TextBox 11"/>
+          <p:cNvSpPr txBox="1"/>
+          <p:nvPr/>
+        </p:nvSpPr>
+        <p:spPr>
+          <a:xfrm>
+            <a:off x="7588184" y="1851660"/>
+            <a:ext cx="280301" cy="457200"/>
+          </a:xfrm>
+          <a:prstGeom prst="rect">
+            <a:avLst/>
+          </a:prstGeom>
+          <a:noFill/>
+        </p:spPr>
+        <p:txBody>
+          <a:bodyPr wrap="none" lIns="45720" rIns="45720" tIns="18288" bIns="18288" anchor="ctr">
+            <a:noAutofit/>
+          </a:bodyPr>
+          <a:lstStyle/>
+          <a:p>
+            <a:pPr algn="l"/>
+            <a:r>
+              <a:rPr sz="2280" b="0" i="0">
+                <a:solidFill>
+                  <a:srgbClr val="1A1A1A"/>
+                </a:solidFill>
+                <a:latin typeface="Lexend"/>
+              </a:rPr>
+              <a:t>.</a:t>
+            </a:r>
+          </a:p>
+        </p:txBody>
+      </p:sp>
+      <p:sp>
+        <p:nvSpPr>
+          <p:cNvPr id="13" name="TextBox 12"/>
+          <p:cNvSpPr txBox="1"/>
+          <p:nvPr/>
+        </p:nvSpPr>
+        <p:spPr>
+          <a:xfrm>
+            <a:off x="1234440" y="2487168"/>
+            <a:ext cx="10058400" cy="429370"/>
+          </a:xfrm>
+          <a:prstGeom prst="rect">
+            <a:avLst/>
+          </a:prstGeom>
+          <a:noFill/>
+        </p:spPr>
+        <p:txBody>
+          <a:bodyPr wrap="square" lIns="45720" rIns="45720" tIns="18288" bIns="18288" anchor="t">
+            <a:spAutoFit/>
+          </a:bodyPr>
+          <a:lstStyle/>
+          <a:p>
+            <a:pPr algn="l"/>
+            <a:r>
+              <a:rPr sz="2280" b="1" i="0">
+                <a:solidFill>
+                  <a:srgbClr val="1A1A1A"/>
+                </a:solidFill>
+                <a:latin typeface="Lexend"/>
+              </a:rPr>
+              <a:t>What is the copy's area?</a:t>
+            </a:r>
+          </a:p>
+        </p:txBody>
+      </p:sp>
+      <p:pic>
+        <p:nvPicPr>
+          <p:cNvPr id="14" name="Picture 13" descr="8413de0e199e541e.png"/>
+          <p:cNvPicPr>
+            <a:picLocks noChangeAspect="1"/>
+          </p:cNvPicPr>
+          <p:nvPr/>
+        </p:nvPicPr>
+        <p:blipFill>
+          <a:blip r:embed="rId4"/>
+          <a:stretch>
+            <a:fillRect/>
+          </a:stretch>
+        </p:blipFill>
+        <p:spPr>
+          <a:xfrm>
+            <a:off x="4680203" y="3190286"/>
             <a:ext cx="2910840" cy="304800"/>
           </a:xfrm>
           <a:prstGeom prst="rect">
@@ -9085,7 +10495,7 @@
       </p:pic>
       <p:sp>
         <p:nvSpPr>
-          <p:cNvPr id="11" name="TextBox 10"/>
+          <p:cNvPr id="15" name="TextBox 14"/>
           <p:cNvSpPr txBox="1"/>
           <p:nvPr/>
         </p:nvSpPr>
@@ -9363,7 +10773,160 @@
         </p:nvSpPr>
         <p:spPr>
           <a:xfrm>
-            <a:off x="1234440" y="1874519"/>
+            <a:off x="1234440" y="1851660"/>
+            <a:ext cx="2970766" cy="457200"/>
+          </a:xfrm>
+          <a:prstGeom prst="rect">
+            <a:avLst/>
+          </a:prstGeom>
+          <a:noFill/>
+        </p:spPr>
+        <p:txBody>
+          <a:bodyPr wrap="none" lIns="45720" rIns="45720" tIns="18288" bIns="18288" anchor="ctr">
+            <a:noAutofit/>
+          </a:bodyPr>
+          <a:lstStyle/>
+          <a:p>
+            <a:pPr algn="l"/>
+            <a:r>
+              <a:rPr sz="2280" b="0" i="0">
+                <a:solidFill>
+                  <a:srgbClr val="1A1A1A"/>
+                </a:solidFill>
+                <a:latin typeface="Lexend"/>
+              </a:rPr>
+              <a:t>A figure with area </a:t>
+            </a:r>
+          </a:p>
+        </p:txBody>
+      </p:sp>
+      <p:pic>
+        <p:nvPicPr>
+          <p:cNvPr id="9" name="Picture 8" descr="d7fc11fcb5d46be6.png"/>
+          <p:cNvPicPr>
+            <a:picLocks noChangeAspect="1"/>
+          </p:cNvPicPr>
+          <p:nvPr/>
+        </p:nvPicPr>
+        <p:blipFill>
+          <a:blip r:embed="rId2"/>
+          <a:stretch>
+            <a:fillRect/>
+          </a:stretch>
+        </p:blipFill>
+        <p:spPr>
+          <a:xfrm>
+            <a:off x="4068046" y="1923287"/>
+            <a:ext cx="789432" cy="277368"/>
+          </a:xfrm>
+          <a:prstGeom prst="rect">
+            <a:avLst/>
+          </a:prstGeom>
+        </p:spPr>
+      </p:pic>
+      <p:sp>
+        <p:nvSpPr>
+          <p:cNvPr id="10" name="TextBox 9"/>
+          <p:cNvSpPr txBox="1"/>
+          <p:nvPr/>
+        </p:nvSpPr>
+        <p:spPr>
+          <a:xfrm>
+            <a:off x="4857478" y="1851660"/>
+            <a:ext cx="2105866" cy="457200"/>
+          </a:xfrm>
+          <a:prstGeom prst="rect">
+            <a:avLst/>
+          </a:prstGeom>
+          <a:noFill/>
+        </p:spPr>
+        <p:txBody>
+          <a:bodyPr wrap="none" lIns="45720" rIns="45720" tIns="18288" bIns="18288" anchor="ctr">
+            <a:noAutofit/>
+          </a:bodyPr>
+          <a:lstStyle/>
+          <a:p>
+            <a:pPr algn="l"/>
+            <a:r>
+              <a:rPr sz="2280" b="0" i="0">
+                <a:solidFill>
+                  <a:srgbClr val="1A1A1A"/>
+                </a:solidFill>
+                <a:latin typeface="Lexend"/>
+              </a:rPr>
+              <a:t> is scaled by </a:t>
+            </a:r>
+          </a:p>
+        </p:txBody>
+      </p:sp>
+      <p:pic>
+        <p:nvPicPr>
+          <p:cNvPr id="11" name="Picture 10" descr="981713b65bc0abe8.png"/>
+          <p:cNvPicPr>
+            <a:picLocks noChangeAspect="1"/>
+          </p:cNvPicPr>
+          <p:nvPr/>
+        </p:nvPicPr>
+        <p:blipFill>
+          <a:blip r:embed="rId3"/>
+          <a:stretch>
+            <a:fillRect/>
+          </a:stretch>
+        </p:blipFill>
+        <p:spPr>
+          <a:xfrm>
+            <a:off x="6826184" y="1965960"/>
+            <a:ext cx="838200" cy="234696"/>
+          </a:xfrm>
+          <a:prstGeom prst="rect">
+            <a:avLst/>
+          </a:prstGeom>
+        </p:spPr>
+      </p:pic>
+      <p:sp>
+        <p:nvSpPr>
+          <p:cNvPr id="12" name="TextBox 11"/>
+          <p:cNvSpPr txBox="1"/>
+          <p:nvPr/>
+        </p:nvSpPr>
+        <p:spPr>
+          <a:xfrm>
+            <a:off x="7664384" y="1851660"/>
+            <a:ext cx="280301" cy="457200"/>
+          </a:xfrm>
+          <a:prstGeom prst="rect">
+            <a:avLst/>
+          </a:prstGeom>
+          <a:noFill/>
+        </p:spPr>
+        <p:txBody>
+          <a:bodyPr wrap="none" lIns="45720" rIns="45720" tIns="18288" bIns="18288" anchor="ctr">
+            <a:noAutofit/>
+          </a:bodyPr>
+          <a:lstStyle/>
+          <a:p>
+            <a:pPr algn="l"/>
+            <a:r>
+              <a:rPr sz="2280" b="0" i="0">
+                <a:solidFill>
+                  <a:srgbClr val="1A1A1A"/>
+                </a:solidFill>
+                <a:latin typeface="Lexend"/>
+              </a:rPr>
+              <a:t>.</a:t>
+            </a:r>
+          </a:p>
+        </p:txBody>
+      </p:sp>
+      <p:sp>
+        <p:nvSpPr>
+          <p:cNvPr id="13" name="TextBox 12"/>
+          <p:cNvSpPr txBox="1"/>
+          <p:nvPr/>
+        </p:nvSpPr>
+        <p:spPr>
+          <a:xfrm>
+            <a:off x="1234440" y="2487168"/>
             <a:ext cx="10058400" cy="429370"/>
           </a:xfrm>
           <a:prstGeom prst="rect">
@@ -9379,65 +10942,12 @@
           <a:p>
             <a:pPr algn="l"/>
             <a:r>
-              <a:rPr sz="2280" b="0" i="0">
+              <a:rPr sz="2280" b="1" i="0">
                 <a:solidFill>
                   <a:srgbClr val="1A1A1A"/>
                 </a:solidFill>
                 <a:latin typeface="Lexend"/>
               </a:rPr>
-              <a:t>A figure with area 8 cm</a:t>
-            </a:r>
-            <a:r>
-              <a:rPr sz="2280" b="0" i="0" baseline="30000">
-                <a:solidFill>
-                  <a:srgbClr val="1A1A1A"/>
-                </a:solidFill>
-                <a:latin typeface="Lexend"/>
-              </a:rPr>
-              <a:t>2</a:t>
-            </a:r>
-            <a:r>
-              <a:rPr sz="2280" b="0" i="0">
-                <a:solidFill>
-                  <a:srgbClr val="1A1A1A"/>
-                </a:solidFill>
-                <a:latin typeface="Lexend"/>
-              </a:rPr>
-              <a:t> is scaled by k = 1.5.</a:t>
-            </a:r>
-          </a:p>
-        </p:txBody>
-      </p:sp>
-      <p:sp>
-        <p:nvSpPr>
-          <p:cNvPr id="9" name="TextBox 8"/>
-          <p:cNvSpPr txBox="1"/>
-          <p:nvPr/>
-        </p:nvSpPr>
-        <p:spPr>
-          <a:xfrm>
-            <a:off x="1234440" y="2413618"/>
-            <a:ext cx="10058400" cy="429370"/>
-          </a:xfrm>
-          <a:prstGeom prst="rect">
-            <a:avLst/>
-          </a:prstGeom>
-          <a:noFill/>
-        </p:spPr>
-        <p:txBody>
-          <a:bodyPr wrap="square" lIns="45720" rIns="45720" tIns="18288" bIns="18288" anchor="t">
-            <a:spAutoFit/>
-          </a:bodyPr>
-          <a:lstStyle/>
-          <a:p>
-            <a:pPr algn="l"/>
-            <a:r>
-              <a:rPr sz="2280" b="1" i="0">
-                <a:solidFill>
-                  <a:srgbClr val="1A1A1A"/>
-                </a:solidFill>
-                <a:latin typeface="Lexend"/>
-              </a:rPr>
               <a:t>What is the copy's area?</a:t>
             </a:r>
           </a:p>
@@ -9445,7 +10955,7 @@
       </p:sp>
       <p:sp>
         <p:nvSpPr>
-          <p:cNvPr id="10" name="TextBox 9"/>
+          <p:cNvPr id="14" name="TextBox 13"/>
           <p:cNvSpPr txBox="1"/>
           <p:nvPr/>
         </p:nvSpPr>
@@ -9714,17 +11224,17 @@
         </p:nvSpPr>
         <p:spPr>
           <a:xfrm>
-            <a:off x="1234440" y="1874519"/>
-            <a:ext cx="10058400" cy="429370"/>
-          </a:xfrm>
-          <a:prstGeom prst="rect">
-            <a:avLst/>
-          </a:prstGeom>
-          <a:noFill/>
-        </p:spPr>
-        <p:txBody>
-          <a:bodyPr wrap="square" lIns="45720" rIns="45720" tIns="18288" bIns="18288" anchor="t">
-            <a:spAutoFit/>
+            <a:off x="1234440" y="1851660"/>
+            <a:ext cx="2970766" cy="457200"/>
+          </a:xfrm>
+          <a:prstGeom prst="rect">
+            <a:avLst/>
+          </a:prstGeom>
+          <a:noFill/>
+        </p:spPr>
+        <p:txBody>
+          <a:bodyPr wrap="none" lIns="45720" rIns="45720" tIns="18288" bIns="18288" anchor="ctr">
+            <a:noAutofit/>
           </a:bodyPr>
           <a:lstStyle/>
           <a:p>
@@ -9736,67 +11246,14 @@
                 </a:solidFill>
                 <a:latin typeface="Lexend"/>
               </a:rPr>
-              <a:t>A figure with area 8 cm</a:t>
-            </a:r>
-            <a:r>
-              <a:rPr sz="2280" b="0" i="0" baseline="30000">
-                <a:solidFill>
-                  <a:srgbClr val="1A1A1A"/>
-                </a:solidFill>
-                <a:latin typeface="Lexend"/>
-              </a:rPr>
-              <a:t>2</a:t>
-            </a:r>
-            <a:r>
-              <a:rPr sz="2280" b="0" i="0">
-                <a:solidFill>
-                  <a:srgbClr val="1A1A1A"/>
-                </a:solidFill>
-                <a:latin typeface="Lexend"/>
-              </a:rPr>
-              <a:t> is scaled by k = 1.5.</a:t>
-            </a:r>
-          </a:p>
-        </p:txBody>
-      </p:sp>
-      <p:sp>
-        <p:nvSpPr>
-          <p:cNvPr id="9" name="TextBox 8"/>
-          <p:cNvSpPr txBox="1"/>
-          <p:nvPr/>
-        </p:nvSpPr>
-        <p:spPr>
-          <a:xfrm>
-            <a:off x="1234440" y="2413618"/>
-            <a:ext cx="10058400" cy="429370"/>
-          </a:xfrm>
-          <a:prstGeom prst="rect">
-            <a:avLst/>
-          </a:prstGeom>
-          <a:noFill/>
-        </p:spPr>
-        <p:txBody>
-          <a:bodyPr wrap="square" lIns="45720" rIns="45720" tIns="18288" bIns="18288" anchor="t">
-            <a:spAutoFit/>
-          </a:bodyPr>
-          <a:lstStyle/>
-          <a:p>
-            <a:pPr algn="l"/>
-            <a:r>
-              <a:rPr sz="2280" b="1" i="0">
-                <a:solidFill>
-                  <a:srgbClr val="1A1A1A"/>
-                </a:solidFill>
-                <a:latin typeface="Lexend"/>
-              </a:rPr>
-              <a:t>What is the copy's area?</a:t>
+              <a:t>A figure with area </a:t>
             </a:r>
           </a:p>
         </p:txBody>
       </p:sp>
       <p:pic>
         <p:nvPicPr>
-          <p:cNvPr id="10" name="Picture 9" descr="3c70ee3fe6f12619.png"/>
+          <p:cNvPr id="9" name="Picture 8" descr="206fc3ce5420f406.png"/>
           <p:cNvPicPr>
             <a:picLocks noChangeAspect="1"/>
           </p:cNvPicPr>
@@ -9810,17 +11267,52 @@
         </p:blipFill>
         <p:spPr>
           <a:xfrm>
-            <a:off x="5221223" y="3124928"/>
-            <a:ext cx="1539240" cy="304800"/>
+            <a:off x="4068046" y="1923287"/>
+            <a:ext cx="789432" cy="277368"/>
           </a:xfrm>
           <a:prstGeom prst="rect">
             <a:avLst/>
           </a:prstGeom>
         </p:spPr>
       </p:pic>
+      <p:sp>
+        <p:nvSpPr>
+          <p:cNvPr id="10" name="TextBox 9"/>
+          <p:cNvSpPr txBox="1"/>
+          <p:nvPr/>
+        </p:nvSpPr>
+        <p:spPr>
+          <a:xfrm>
+            <a:off x="4857478" y="1851660"/>
+            <a:ext cx="2105866" cy="457200"/>
+          </a:xfrm>
+          <a:prstGeom prst="rect">
+            <a:avLst/>
+          </a:prstGeom>
+          <a:noFill/>
+        </p:spPr>
+        <p:txBody>
+          <a:bodyPr wrap="none" lIns="45720" rIns="45720" tIns="18288" bIns="18288" anchor="ctr">
+            <a:noAutofit/>
+          </a:bodyPr>
+          <a:lstStyle/>
+          <a:p>
+            <a:pPr algn="l"/>
+            <a:r>
+              <a:rPr sz="2280" b="0" i="0">
+                <a:solidFill>
+                  <a:srgbClr val="1A1A1A"/>
+                </a:solidFill>
+                <a:latin typeface="Lexend"/>
+              </a:rPr>
+              <a:t> is scaled by </a:t>
+            </a:r>
+          </a:p>
+        </p:txBody>
+      </p:sp>
       <p:pic>
         <p:nvPicPr>
-          <p:cNvPr id="11" name="Picture 10" descr="2e3c5fba163c0dbb.png"/>
+          <p:cNvPr id="11" name="Picture 10" descr="beaaa9fd83ee57b2.png"/>
           <p:cNvPicPr>
             <a:picLocks noChangeAspect="1"/>
           </p:cNvPicPr>
@@ -9834,7 +11326,125 @@
         </p:blipFill>
         <p:spPr>
           <a:xfrm>
-            <a:off x="5221223" y="3690332"/>
+            <a:off x="6826184" y="1965960"/>
+            <a:ext cx="838200" cy="234696"/>
+          </a:xfrm>
+          <a:prstGeom prst="rect">
+            <a:avLst/>
+          </a:prstGeom>
+        </p:spPr>
+      </p:pic>
+      <p:sp>
+        <p:nvSpPr>
+          <p:cNvPr id="12" name="TextBox 11"/>
+          <p:cNvSpPr txBox="1"/>
+          <p:nvPr/>
+        </p:nvSpPr>
+        <p:spPr>
+          <a:xfrm>
+            <a:off x="7664384" y="1851660"/>
+            <a:ext cx="280301" cy="457200"/>
+          </a:xfrm>
+          <a:prstGeom prst="rect">
+            <a:avLst/>
+          </a:prstGeom>
+          <a:noFill/>
+        </p:spPr>
+        <p:txBody>
+          <a:bodyPr wrap="none" lIns="45720" rIns="45720" tIns="18288" bIns="18288" anchor="ctr">
+            <a:noAutofit/>
+          </a:bodyPr>
+          <a:lstStyle/>
+          <a:p>
+            <a:pPr algn="l"/>
+            <a:r>
+              <a:rPr sz="2280" b="0" i="0">
+                <a:solidFill>
+                  <a:srgbClr val="1A1A1A"/>
+                </a:solidFill>
+                <a:latin typeface="Lexend"/>
+              </a:rPr>
+              <a:t>.</a:t>
+            </a:r>
+          </a:p>
+        </p:txBody>
+      </p:sp>
+      <p:sp>
+        <p:nvSpPr>
+          <p:cNvPr id="13" name="TextBox 12"/>
+          <p:cNvSpPr txBox="1"/>
+          <p:nvPr/>
+        </p:nvSpPr>
+        <p:spPr>
+          <a:xfrm>
+            <a:off x="1234440" y="2487168"/>
+            <a:ext cx="10058400" cy="429370"/>
+          </a:xfrm>
+          <a:prstGeom prst="rect">
+            <a:avLst/>
+          </a:prstGeom>
+          <a:noFill/>
+        </p:spPr>
+        <p:txBody>
+          <a:bodyPr wrap="square" lIns="45720" rIns="45720" tIns="18288" bIns="18288" anchor="t">
+            <a:spAutoFit/>
+          </a:bodyPr>
+          <a:lstStyle/>
+          <a:p>
+            <a:pPr algn="l"/>
+            <a:r>
+              <a:rPr sz="2280" b="1" i="0">
+                <a:solidFill>
+                  <a:srgbClr val="1A1A1A"/>
+                </a:solidFill>
+                <a:latin typeface="Lexend"/>
+              </a:rPr>
+              <a:t>What is the copy's area?</a:t>
+            </a:r>
+          </a:p>
+        </p:txBody>
+      </p:sp>
+      <p:pic>
+        <p:nvPicPr>
+          <p:cNvPr id="14" name="Picture 13" descr="3c70ee3fe6f12619.png"/>
+          <p:cNvPicPr>
+            <a:picLocks noChangeAspect="1"/>
+          </p:cNvPicPr>
+          <p:nvPr/>
+        </p:nvPicPr>
+        <p:blipFill>
+          <a:blip r:embed="rId4"/>
+          <a:stretch>
+            <a:fillRect/>
+          </a:stretch>
+        </p:blipFill>
+        <p:spPr>
+          <a:xfrm>
+            <a:off x="5221223" y="3190286"/>
+            <a:ext cx="1539240" cy="304800"/>
+          </a:xfrm>
+          <a:prstGeom prst="rect">
+            <a:avLst/>
+          </a:prstGeom>
+        </p:spPr>
+      </p:pic>
+      <p:pic>
+        <p:nvPicPr>
+          <p:cNvPr id="15" name="Picture 14" descr="2e3c5fba163c0dbb.png"/>
+          <p:cNvPicPr>
+            <a:picLocks noChangeAspect="1"/>
+          </p:cNvPicPr>
+          <p:nvPr/>
+        </p:nvPicPr>
+        <p:blipFill>
+          <a:blip r:embed="rId5"/>
+          <a:stretch>
+            <a:fillRect/>
+          </a:stretch>
+        </p:blipFill>
+        <p:spPr>
+          <a:xfrm>
+            <a:off x="5221223" y="3781598"/>
             <a:ext cx="1831848" cy="252984"/>
           </a:xfrm>
           <a:prstGeom prst="rect">
@@ -9844,7 +11454,7 @@
       </p:pic>
       <p:sp>
         <p:nvSpPr>
-          <p:cNvPr id="12" name="TextBox 11"/>
+          <p:cNvPr id="16" name="TextBox 15"/>
           <p:cNvSpPr txBox="1"/>
           <p:nvPr/>
         </p:nvSpPr>
@@ -10235,7 +11845,7 @@
         </p:blipFill>
         <p:spPr>
           <a:xfrm>
-            <a:off x="2258568" y="3156932"/>
+            <a:off x="2258568" y="3132548"/>
             <a:ext cx="188976" cy="277368"/>
           </a:xfrm>
           <a:prstGeom prst="rect">
@@ -10294,7 +11904,7 @@
         </p:blipFill>
         <p:spPr>
           <a:xfrm>
-            <a:off x="7104888" y="3158456"/>
+            <a:off x="7104888" y="3141692"/>
             <a:ext cx="185928" cy="274320"/>
           </a:xfrm>
           <a:prstGeom prst="rect">
@@ -10353,7 +11963,7 @@
         </p:blipFill>
         <p:spPr>
           <a:xfrm>
-            <a:off x="2258568" y="3769580"/>
+            <a:off x="2258568" y="3751292"/>
             <a:ext cx="448056" cy="277368"/>
           </a:xfrm>
           <a:prstGeom prst="rect">
@@ -10412,7 +12022,7 @@
         </p:blipFill>
         <p:spPr>
           <a:xfrm>
-            <a:off x="7104888" y="3769580"/>
+            <a:off x="7104888" y="3745196"/>
             <a:ext cx="192024" cy="277368"/>
           </a:xfrm>
           <a:prstGeom prst="rect">
@@ -10828,7 +12438,7 @@
         </p:blipFill>
         <p:spPr>
           <a:xfrm>
-            <a:off x="3225813" y="3873212"/>
+            <a:off x="3225813" y="3860449"/>
             <a:ext cx="853440" cy="301752"/>
           </a:xfrm>
           <a:prstGeom prst="rect">
@@ -11142,8 +12752,196 @@
         </p:nvSpPr>
         <p:spPr>
           <a:xfrm>
-            <a:off x="1234440" y="1874519"/>
-            <a:ext cx="10058400" cy="858740"/>
+            <a:off x="1234440" y="1917192"/>
+            <a:ext cx="7338824" cy="457200"/>
+          </a:xfrm>
+          <a:prstGeom prst="rect">
+            <a:avLst/>
+          </a:prstGeom>
+          <a:noFill/>
+        </p:spPr>
+        <p:txBody>
+          <a:bodyPr wrap="none" lIns="45720" rIns="45720" tIns="18288" bIns="18288" anchor="ctr">
+            <a:noAutofit/>
+          </a:bodyPr>
+          <a:lstStyle/>
+          <a:p>
+            <a:pPr algn="l"/>
+            <a:r>
+              <a:rPr sz="2280" b="0" i="0">
+                <a:solidFill>
+                  <a:srgbClr val="1A1A1A"/>
+                </a:solidFill>
+                <a:latin typeface="Lexend"/>
+              </a:rPr>
+              <a:t>A triangle with sides 6, 8 and 10 cm is scaled by </a:t>
+            </a:r>
+          </a:p>
+        </p:txBody>
+      </p:sp>
+      <p:pic>
+        <p:nvPicPr>
+          <p:cNvPr id="9" name="Picture 8" descr="3bcf9a6d74a2c992.png"/>
+          <p:cNvPicPr>
+            <a:picLocks noChangeAspect="1"/>
+          </p:cNvPicPr>
+          <p:nvPr/>
+        </p:nvPicPr>
+        <p:blipFill>
+          <a:blip r:embed="rId2"/>
+          <a:stretch>
+            <a:fillRect/>
+          </a:stretch>
+        </p:blipFill>
+        <p:spPr>
+          <a:xfrm>
+            <a:off x="8436104" y="1874519"/>
+            <a:ext cx="624840" cy="542544"/>
+          </a:xfrm>
+          <a:prstGeom prst="rect">
+            <a:avLst/>
+          </a:prstGeom>
+        </p:spPr>
+      </p:pic>
+      <p:sp>
+        <p:nvSpPr>
+          <p:cNvPr id="10" name="TextBox 9"/>
+          <p:cNvSpPr txBox="1"/>
+          <p:nvPr/>
+        </p:nvSpPr>
+        <p:spPr>
+          <a:xfrm>
+            <a:off x="9060944" y="1917192"/>
+            <a:ext cx="280301" cy="457200"/>
+          </a:xfrm>
+          <a:prstGeom prst="rect">
+            <a:avLst/>
+          </a:prstGeom>
+          <a:noFill/>
+        </p:spPr>
+        <p:txBody>
+          <a:bodyPr wrap="none" lIns="45720" rIns="45720" tIns="18288" bIns="18288" anchor="ctr">
+            <a:noAutofit/>
+          </a:bodyPr>
+          <a:lstStyle/>
+          <a:p>
+            <a:pPr algn="l"/>
+            <a:r>
+              <a:rPr sz="2280" b="0" i="0">
+                <a:solidFill>
+                  <a:srgbClr val="1A1A1A"/>
+                </a:solidFill>
+                <a:latin typeface="Lexend"/>
+              </a:rPr>
+              <a:t>.</a:t>
+            </a:r>
+          </a:p>
+        </p:txBody>
+      </p:sp>
+      <p:sp>
+        <p:nvSpPr>
+          <p:cNvPr id="11" name="TextBox 10"/>
+          <p:cNvSpPr txBox="1"/>
+          <p:nvPr/>
+        </p:nvSpPr>
+        <p:spPr>
+          <a:xfrm>
+            <a:off x="1234440" y="2595372"/>
+            <a:ext cx="1803529" cy="457200"/>
+          </a:xfrm>
+          <a:prstGeom prst="rect">
+            <a:avLst/>
+          </a:prstGeom>
+          <a:noFill/>
+        </p:spPr>
+        <p:txBody>
+          <a:bodyPr wrap="none" lIns="45720" rIns="45720" tIns="18288" bIns="18288" anchor="ctr">
+            <a:noAutofit/>
+          </a:bodyPr>
+          <a:lstStyle/>
+          <a:p>
+            <a:pPr algn="l"/>
+            <a:r>
+              <a:rPr sz="2280" b="0" i="0">
+                <a:solidFill>
+                  <a:srgbClr val="1A1A1A"/>
+                </a:solidFill>
+                <a:latin typeface="Lexend"/>
+              </a:rPr>
+              <a:t>Its area is </a:t>
+            </a:r>
+          </a:p>
+        </p:txBody>
+      </p:sp>
+      <p:pic>
+        <p:nvPicPr>
+          <p:cNvPr id="12" name="Picture 11" descr="050f2fbd0e1306f9.png"/>
+          <p:cNvPicPr>
+            <a:picLocks noChangeAspect="1"/>
+          </p:cNvPicPr>
+          <p:nvPr/>
+        </p:nvPicPr>
+        <p:blipFill>
+          <a:blip r:embed="rId3"/>
+          <a:stretch>
+            <a:fillRect/>
+          </a:stretch>
+        </p:blipFill>
+        <p:spPr>
+          <a:xfrm>
+            <a:off x="2900809" y="2667000"/>
+            <a:ext cx="972311" cy="277368"/>
+          </a:xfrm>
+          <a:prstGeom prst="rect">
+            <a:avLst/>
+          </a:prstGeom>
+        </p:spPr>
+      </p:pic>
+      <p:sp>
+        <p:nvSpPr>
+          <p:cNvPr id="13" name="TextBox 12"/>
+          <p:cNvSpPr txBox="1"/>
+          <p:nvPr/>
+        </p:nvSpPr>
+        <p:spPr>
+          <a:xfrm>
+            <a:off x="3873121" y="2595372"/>
+            <a:ext cx="280301" cy="457200"/>
+          </a:xfrm>
+          <a:prstGeom prst="rect">
+            <a:avLst/>
+          </a:prstGeom>
+          <a:noFill/>
+        </p:spPr>
+        <p:txBody>
+          <a:bodyPr wrap="none" lIns="45720" rIns="45720" tIns="18288" bIns="18288" anchor="ctr">
+            <a:noAutofit/>
+          </a:bodyPr>
+          <a:lstStyle/>
+          <a:p>
+            <a:pPr algn="l"/>
+            <a:r>
+              <a:rPr sz="2280" b="0" i="0">
+                <a:solidFill>
+                  <a:srgbClr val="1A1A1A"/>
+                </a:solidFill>
+                <a:latin typeface="Lexend"/>
+              </a:rPr>
+              <a:t>.</a:t>
+            </a:r>
+          </a:p>
+        </p:txBody>
+      </p:sp>
+      <p:sp>
+        <p:nvSpPr>
+          <p:cNvPr id="14" name="TextBox 13"/>
+          <p:cNvSpPr txBox="1"/>
+          <p:nvPr/>
+        </p:nvSpPr>
+        <p:spPr>
+          <a:xfrm>
+            <a:off x="1234440" y="3230880"/>
+            <a:ext cx="10058400" cy="429370"/>
           </a:xfrm>
           <a:prstGeom prst="rect">
             <a:avLst/>
@@ -11158,65 +12956,12 @@
           <a:p>
             <a:pPr algn="l"/>
             <a:r>
-              <a:rPr sz="2280" b="0" i="0">
+              <a:rPr sz="2280" b="1" i="0">
                 <a:solidFill>
                   <a:srgbClr val="1A1A1A"/>
                 </a:solidFill>
                 <a:latin typeface="Lexend"/>
               </a:rPr>
-              <a:t>A triangle with sides 6, 8 and 10 cm is scaled by k = ½. Its area is 24 cm</a:t>
-            </a:r>
-            <a:r>
-              <a:rPr sz="2280" b="0" i="0" baseline="30000">
-                <a:solidFill>
-                  <a:srgbClr val="1A1A1A"/>
-                </a:solidFill>
-                <a:latin typeface="Lexend"/>
-              </a:rPr>
-              <a:t>2</a:t>
-            </a:r>
-            <a:r>
-              <a:rPr sz="2280" b="0" i="0">
-                <a:solidFill>
-                  <a:srgbClr val="1A1A1A"/>
-                </a:solidFill>
-                <a:latin typeface="Lexend"/>
-              </a:rPr>
-              <a:t>.</a:t>
-            </a:r>
-          </a:p>
-        </p:txBody>
-      </p:sp>
-      <p:sp>
-        <p:nvSpPr>
-          <p:cNvPr id="9" name="TextBox 8"/>
-          <p:cNvSpPr txBox="1"/>
-          <p:nvPr/>
-        </p:nvSpPr>
-        <p:spPr>
-          <a:xfrm>
-            <a:off x="1234440" y="2842988"/>
-            <a:ext cx="10058400" cy="429370"/>
-          </a:xfrm>
-          <a:prstGeom prst="rect">
-            <a:avLst/>
-          </a:prstGeom>
-          <a:noFill/>
-        </p:spPr>
-        <p:txBody>
-          <a:bodyPr wrap="square" lIns="45720" rIns="45720" tIns="18288" bIns="18288" anchor="t">
-            <a:spAutoFit/>
-          </a:bodyPr>
-          <a:lstStyle/>
-          <a:p>
-            <a:pPr algn="l"/>
-            <a:r>
-              <a:rPr sz="2280" b="1" i="0">
-                <a:solidFill>
-                  <a:srgbClr val="1A1A1A"/>
-                </a:solidFill>
-                <a:latin typeface="Lexend"/>
-              </a:rPr>
               <a:t>Find the copy's perimeter and area.</a:t>
             </a:r>
           </a:p>
@@ -11224,7 +12969,7 @@
       </p:sp>
       <p:sp>
         <p:nvSpPr>
-          <p:cNvPr id="10" name="TextBox 9"/>
+          <p:cNvPr id="15" name="TextBox 14"/>
           <p:cNvSpPr txBox="1"/>
           <p:nvPr/>
         </p:nvSpPr>
@@ -11493,17 +13238,17 @@
         </p:nvSpPr>
         <p:spPr>
           <a:xfrm>
-            <a:off x="1234440" y="1874519"/>
-            <a:ext cx="10058400" cy="858740"/>
-          </a:xfrm>
-          <a:prstGeom prst="rect">
-            <a:avLst/>
-          </a:prstGeom>
-          <a:noFill/>
-        </p:spPr>
-        <p:txBody>
-          <a:bodyPr wrap="square" lIns="45720" rIns="45720" tIns="18288" bIns="18288" anchor="t">
-            <a:spAutoFit/>
+            <a:off x="1234440" y="1917192"/>
+            <a:ext cx="7338824" cy="457200"/>
+          </a:xfrm>
+          <a:prstGeom prst="rect">
+            <a:avLst/>
+          </a:prstGeom>
+          <a:noFill/>
+        </p:spPr>
+        <p:txBody>
+          <a:bodyPr wrap="none" lIns="45720" rIns="45720" tIns="18288" bIns="18288" anchor="ctr">
+            <a:noAutofit/>
           </a:bodyPr>
           <a:lstStyle/>
           <a:p>
@@ -11515,67 +13260,14 @@
                 </a:solidFill>
                 <a:latin typeface="Lexend"/>
               </a:rPr>
-              <a:t>A triangle with sides 6, 8 and 10 cm is scaled by k = ½. Its area is 24 cm</a:t>
-            </a:r>
-            <a:r>
-              <a:rPr sz="2280" b="0" i="0" baseline="30000">
-                <a:solidFill>
-                  <a:srgbClr val="1A1A1A"/>
-                </a:solidFill>
-                <a:latin typeface="Lexend"/>
-              </a:rPr>
-              <a:t>2</a:t>
-            </a:r>
-            <a:r>
-              <a:rPr sz="2280" b="0" i="0">
-                <a:solidFill>
-                  <a:srgbClr val="1A1A1A"/>
-                </a:solidFill>
-                <a:latin typeface="Lexend"/>
-              </a:rPr>
-              <a:t>.</a:t>
-            </a:r>
-          </a:p>
-        </p:txBody>
-      </p:sp>
-      <p:sp>
-        <p:nvSpPr>
-          <p:cNvPr id="9" name="TextBox 8"/>
-          <p:cNvSpPr txBox="1"/>
-          <p:nvPr/>
-        </p:nvSpPr>
-        <p:spPr>
-          <a:xfrm>
-            <a:off x="1234440" y="2842988"/>
-            <a:ext cx="10058400" cy="429370"/>
-          </a:xfrm>
-          <a:prstGeom prst="rect">
-            <a:avLst/>
-          </a:prstGeom>
-          <a:noFill/>
-        </p:spPr>
-        <p:txBody>
-          <a:bodyPr wrap="square" lIns="45720" rIns="45720" tIns="18288" bIns="18288" anchor="t">
-            <a:spAutoFit/>
-          </a:bodyPr>
-          <a:lstStyle/>
-          <a:p>
-            <a:pPr algn="l"/>
-            <a:r>
-              <a:rPr sz="2280" b="1" i="0">
-                <a:solidFill>
-                  <a:srgbClr val="1A1A1A"/>
-                </a:solidFill>
-                <a:latin typeface="Lexend"/>
-              </a:rPr>
-              <a:t>Find the copy's perimeter and area.</a:t>
+              <a:t>A triangle with sides 6, 8 and 10 cm is scaled by </a:t>
             </a:r>
           </a:p>
         </p:txBody>
       </p:sp>
       <p:pic>
         <p:nvPicPr>
-          <p:cNvPr id="10" name="Picture 9" descr="288a399f2ce56119.png"/>
+          <p:cNvPr id="9" name="Picture 8" descr="f7228653a96dd5cd.png"/>
           <p:cNvPicPr>
             <a:picLocks noChangeAspect="1"/>
           </p:cNvPicPr>
@@ -11589,17 +13281,87 @@
         </p:blipFill>
         <p:spPr>
           <a:xfrm>
-            <a:off x="5065775" y="3500959"/>
-            <a:ext cx="2145792" cy="606552"/>
+            <a:off x="8436104" y="1874519"/>
+            <a:ext cx="621792" cy="542544"/>
           </a:xfrm>
           <a:prstGeom prst="rect">
             <a:avLst/>
           </a:prstGeom>
         </p:spPr>
       </p:pic>
+      <p:sp>
+        <p:nvSpPr>
+          <p:cNvPr id="10" name="TextBox 9"/>
+          <p:cNvSpPr txBox="1"/>
+          <p:nvPr/>
+        </p:nvSpPr>
+        <p:spPr>
+          <a:xfrm>
+            <a:off x="9057896" y="1917192"/>
+            <a:ext cx="280301" cy="457200"/>
+          </a:xfrm>
+          <a:prstGeom prst="rect">
+            <a:avLst/>
+          </a:prstGeom>
+          <a:noFill/>
+        </p:spPr>
+        <p:txBody>
+          <a:bodyPr wrap="none" lIns="45720" rIns="45720" tIns="18288" bIns="18288" anchor="ctr">
+            <a:noAutofit/>
+          </a:bodyPr>
+          <a:lstStyle/>
+          <a:p>
+            <a:pPr algn="l"/>
+            <a:r>
+              <a:rPr sz="2280" b="0" i="0">
+                <a:solidFill>
+                  <a:srgbClr val="1A1A1A"/>
+                </a:solidFill>
+                <a:latin typeface="Lexend"/>
+              </a:rPr>
+              <a:t>.</a:t>
+            </a:r>
+          </a:p>
+        </p:txBody>
+      </p:sp>
+      <p:sp>
+        <p:nvSpPr>
+          <p:cNvPr id="11" name="TextBox 10"/>
+          <p:cNvSpPr txBox="1"/>
+          <p:nvPr/>
+        </p:nvSpPr>
+        <p:spPr>
+          <a:xfrm>
+            <a:off x="1234440" y="2595372"/>
+            <a:ext cx="1803529" cy="457200"/>
+          </a:xfrm>
+          <a:prstGeom prst="rect">
+            <a:avLst/>
+          </a:prstGeom>
+          <a:noFill/>
+        </p:spPr>
+        <p:txBody>
+          <a:bodyPr wrap="none" lIns="45720" rIns="45720" tIns="18288" bIns="18288" anchor="ctr">
+            <a:noAutofit/>
+          </a:bodyPr>
+          <a:lstStyle/>
+          <a:p>
+            <a:pPr algn="l"/>
+            <a:r>
+              <a:rPr sz="2280" b="0" i="0">
+                <a:solidFill>
+                  <a:srgbClr val="1A1A1A"/>
+                </a:solidFill>
+                <a:latin typeface="Lexend"/>
+              </a:rPr>
+              <a:t>Its area is </a:t>
+            </a:r>
+          </a:p>
+        </p:txBody>
+      </p:sp>
       <p:pic>
         <p:nvPicPr>
-          <p:cNvPr id="11" name="Picture 10" descr="392447636256ad17.png"/>
+          <p:cNvPr id="12" name="Picture 11" descr="7eb340286a1c1c14.png"/>
           <p:cNvPicPr>
             <a:picLocks noChangeAspect="1"/>
           </p:cNvPicPr>
@@ -11613,7 +13375,125 @@
         </p:blipFill>
         <p:spPr>
           <a:xfrm>
-            <a:off x="5065775" y="4235527"/>
+            <a:off x="2900809" y="2667000"/>
+            <a:ext cx="975360" cy="277368"/>
+          </a:xfrm>
+          <a:prstGeom prst="rect">
+            <a:avLst/>
+          </a:prstGeom>
+        </p:spPr>
+      </p:pic>
+      <p:sp>
+        <p:nvSpPr>
+          <p:cNvPr id="13" name="TextBox 12"/>
+          <p:cNvSpPr txBox="1"/>
+          <p:nvPr/>
+        </p:nvSpPr>
+        <p:spPr>
+          <a:xfrm>
+            <a:off x="3876169" y="2595372"/>
+            <a:ext cx="280301" cy="457200"/>
+          </a:xfrm>
+          <a:prstGeom prst="rect">
+            <a:avLst/>
+          </a:prstGeom>
+          <a:noFill/>
+        </p:spPr>
+        <p:txBody>
+          <a:bodyPr wrap="none" lIns="45720" rIns="45720" tIns="18288" bIns="18288" anchor="ctr">
+            <a:noAutofit/>
+          </a:bodyPr>
+          <a:lstStyle/>
+          <a:p>
+            <a:pPr algn="l"/>
+            <a:r>
+              <a:rPr sz="2280" b="0" i="0">
+                <a:solidFill>
+                  <a:srgbClr val="1A1A1A"/>
+                </a:solidFill>
+                <a:latin typeface="Lexend"/>
+              </a:rPr>
+              <a:t>.</a:t>
+            </a:r>
+          </a:p>
+        </p:txBody>
+      </p:sp>
+      <p:sp>
+        <p:nvSpPr>
+          <p:cNvPr id="14" name="TextBox 13"/>
+          <p:cNvSpPr txBox="1"/>
+          <p:nvPr/>
+        </p:nvSpPr>
+        <p:spPr>
+          <a:xfrm>
+            <a:off x="1234440" y="3230880"/>
+            <a:ext cx="10058400" cy="429370"/>
+          </a:xfrm>
+          <a:prstGeom prst="rect">
+            <a:avLst/>
+          </a:prstGeom>
+          <a:noFill/>
+        </p:spPr>
+        <p:txBody>
+          <a:bodyPr wrap="square" lIns="45720" rIns="45720" tIns="18288" bIns="18288" anchor="t">
+            <a:spAutoFit/>
+          </a:bodyPr>
+          <a:lstStyle/>
+          <a:p>
+            <a:pPr algn="l"/>
+            <a:r>
+              <a:rPr sz="2280" b="1" i="0">
+                <a:solidFill>
+                  <a:srgbClr val="1A1A1A"/>
+                </a:solidFill>
+                <a:latin typeface="Lexend"/>
+              </a:rPr>
+              <a:t>Find the copy's perimeter and area.</a:t>
+            </a:r>
+          </a:p>
+        </p:txBody>
+      </p:sp>
+      <p:pic>
+        <p:nvPicPr>
+          <p:cNvPr id="15" name="Picture 14" descr="288a399f2ce56119.png"/>
+          <p:cNvPicPr>
+            <a:picLocks noChangeAspect="1"/>
+          </p:cNvPicPr>
+          <p:nvPr/>
+        </p:nvPicPr>
+        <p:blipFill>
+          <a:blip r:embed="rId4"/>
+          <a:stretch>
+            <a:fillRect/>
+          </a:stretch>
+        </p:blipFill>
+        <p:spPr>
+          <a:xfrm>
+            <a:off x="5065775" y="3888850"/>
+            <a:ext cx="2145792" cy="606552"/>
+          </a:xfrm>
+          <a:prstGeom prst="rect">
+            <a:avLst/>
+          </a:prstGeom>
+        </p:spPr>
+      </p:pic>
+      <p:pic>
+        <p:nvPicPr>
+          <p:cNvPr id="16" name="Picture 15" descr="392447636256ad17.png"/>
+          <p:cNvPicPr>
+            <a:picLocks noChangeAspect="1"/>
+          </p:cNvPicPr>
+          <p:nvPr/>
+        </p:nvPicPr>
+        <p:blipFill>
+          <a:blip r:embed="rId5"/>
+          <a:stretch>
+            <a:fillRect/>
+          </a:stretch>
+        </p:blipFill>
+        <p:spPr>
+          <a:xfrm>
+            <a:off x="5065775" y="4623418"/>
             <a:ext cx="2042160" cy="603504"/>
           </a:xfrm>
           <a:prstGeom prst="rect">
@@ -11623,13 +13503,13 @@
       </p:pic>
       <p:sp>
         <p:nvSpPr>
-          <p:cNvPr id="12" name="TextBox 11"/>
-          <p:cNvSpPr txBox="1"/>
-          <p:nvPr/>
-        </p:nvSpPr>
-        <p:spPr>
-          <a:xfrm>
-            <a:off x="777240" y="4976191"/>
+          <p:cNvPr id="17" name="TextBox 16"/>
+          <p:cNvSpPr txBox="1"/>
+          <p:nvPr/>
+        </p:nvSpPr>
+        <p:spPr>
+          <a:xfrm>
+            <a:off x="777240" y="5364082"/>
             <a:ext cx="10607040" cy="548640"/>
           </a:xfrm>
           <a:prstGeom prst="rect">
@@ -12014,7 +13894,7 @@
         </p:blipFill>
         <p:spPr>
           <a:xfrm>
-            <a:off x="4673306" y="2543556"/>
+            <a:off x="4673306" y="2540317"/>
             <a:ext cx="886968" cy="390144"/>
           </a:xfrm>
           <a:prstGeom prst="rect">
@@ -12108,7 +13988,7 @@
         </p:blipFill>
         <p:spPr>
           <a:xfrm>
-            <a:off x="4808588" y="3212592"/>
+            <a:off x="4808588" y="3189541"/>
             <a:ext cx="277368" cy="277368"/>
           </a:xfrm>
           <a:prstGeom prst="rect">
@@ -12167,7 +14047,7 @@
         </p:blipFill>
         <p:spPr>
           <a:xfrm>
-            <a:off x="6036297" y="3215640"/>
+            <a:off x="6036297" y="3195637"/>
             <a:ext cx="271272" cy="271272"/>
           </a:xfrm>
           <a:prstGeom prst="rect">
@@ -12525,7 +14405,101 @@
         </p:nvSpPr>
         <p:spPr>
           <a:xfrm>
-            <a:off x="1234440" y="1874519"/>
+            <a:off x="1234440" y="1851660"/>
+            <a:ext cx="8198278" cy="457200"/>
+          </a:xfrm>
+          <a:prstGeom prst="rect">
+            <a:avLst/>
+          </a:prstGeom>
+          <a:noFill/>
+        </p:spPr>
+        <p:txBody>
+          <a:bodyPr wrap="none" lIns="45720" rIns="45720" tIns="18288" bIns="18288" anchor="ctr">
+            <a:noAutofit/>
+          </a:bodyPr>
+          <a:lstStyle/>
+          <a:p>
+            <a:pPr algn="l"/>
+            <a:r>
+              <a:rPr sz="2280" b="0" i="0">
+                <a:solidFill>
+                  <a:srgbClr val="1A1A1A"/>
+                </a:solidFill>
+                <a:latin typeface="Lexend"/>
+              </a:rPr>
+              <a:t>A 4 in by 6 in photo, taken 3 years ago, is enlarged at </a:t>
+            </a:r>
+          </a:p>
+        </p:txBody>
+      </p:sp>
+      <p:pic>
+        <p:nvPicPr>
+          <p:cNvPr id="9" name="Picture 8" descr="fc22e08664d80881.png"/>
+          <p:cNvPicPr>
+            <a:picLocks noChangeAspect="1"/>
+          </p:cNvPicPr>
+          <p:nvPr/>
+        </p:nvPicPr>
+        <p:blipFill>
+          <a:blip r:embed="rId2"/>
+          <a:stretch>
+            <a:fillRect/>
+          </a:stretch>
+        </p:blipFill>
+        <p:spPr>
+          <a:xfrm>
+            <a:off x="9295558" y="1965960"/>
+            <a:ext cx="853440" cy="234696"/>
+          </a:xfrm>
+          <a:prstGeom prst="rect">
+            <a:avLst/>
+          </a:prstGeom>
+        </p:spPr>
+      </p:pic>
+      <p:sp>
+        <p:nvSpPr>
+          <p:cNvPr id="10" name="TextBox 9"/>
+          <p:cNvSpPr txBox="1"/>
+          <p:nvPr/>
+        </p:nvSpPr>
+        <p:spPr>
+          <a:xfrm>
+            <a:off x="10148998" y="1851660"/>
+            <a:ext cx="280301" cy="457200"/>
+          </a:xfrm>
+          <a:prstGeom prst="rect">
+            <a:avLst/>
+          </a:prstGeom>
+          <a:noFill/>
+        </p:spPr>
+        <p:txBody>
+          <a:bodyPr wrap="none" lIns="45720" rIns="45720" tIns="18288" bIns="18288" anchor="ctr">
+            <a:noAutofit/>
+          </a:bodyPr>
+          <a:lstStyle/>
+          <a:p>
+            <a:pPr algn="l"/>
+            <a:r>
+              <a:rPr sz="2280" b="0" i="0">
+                <a:solidFill>
+                  <a:srgbClr val="1A1A1A"/>
+                </a:solidFill>
+                <a:latin typeface="Lexend"/>
+              </a:rPr>
+              <a:t>.</a:t>
+            </a:r>
+          </a:p>
+        </p:txBody>
+      </p:sp>
+      <p:sp>
+        <p:nvSpPr>
+          <p:cNvPr id="11" name="TextBox 10"/>
+          <p:cNvSpPr txBox="1"/>
+          <p:nvPr/>
+        </p:nvSpPr>
+        <p:spPr>
+          <a:xfrm>
+            <a:off x="1234440" y="2487168"/>
             <a:ext cx="10058400" cy="429370"/>
           </a:xfrm>
           <a:prstGeom prst="rect">
@@ -12541,47 +14515,12 @@
           <a:p>
             <a:pPr algn="l"/>
             <a:r>
-              <a:rPr sz="2280" b="0" i="0">
+              <a:rPr sz="2280" b="1" i="0">
                 <a:solidFill>
                   <a:srgbClr val="1A1A1A"/>
                 </a:solidFill>
                 <a:latin typeface="Lexend"/>
               </a:rPr>
-              <a:t>A 4 in by 6 in photo, taken 3 years ago, is enlarged at k = 2.5.</a:t>
-            </a:r>
-          </a:p>
-        </p:txBody>
-      </p:sp>
-      <p:sp>
-        <p:nvSpPr>
-          <p:cNvPr id="9" name="TextBox 8"/>
-          <p:cNvSpPr txBox="1"/>
-          <p:nvPr/>
-        </p:nvSpPr>
-        <p:spPr>
-          <a:xfrm>
-            <a:off x="1234440" y="2413618"/>
-            <a:ext cx="10058400" cy="429370"/>
-          </a:xfrm>
-          <a:prstGeom prst="rect">
-            <a:avLst/>
-          </a:prstGeom>
-          <a:noFill/>
-        </p:spPr>
-        <p:txBody>
-          <a:bodyPr wrap="square" lIns="45720" rIns="45720" tIns="18288" bIns="18288" anchor="t">
-            <a:spAutoFit/>
-          </a:bodyPr>
-          <a:lstStyle/>
-          <a:p>
-            <a:pPr algn="l"/>
-            <a:r>
-              <a:rPr sz="2280" b="1" i="0">
-                <a:solidFill>
-                  <a:srgbClr val="1A1A1A"/>
-                </a:solidFill>
-                <a:latin typeface="Lexend"/>
-              </a:rPr>
               <a:t>What is the enlargement's area?</a:t>
             </a:r>
           </a:p>
@@ -12589,7 +14528,7 @@
       </p:sp>
       <p:sp>
         <p:nvSpPr>
-          <p:cNvPr id="10" name="TextBox 9"/>
+          <p:cNvPr id="12" name="TextBox 11"/>
           <p:cNvSpPr txBox="1"/>
           <p:nvPr/>
         </p:nvSpPr>
@@ -12858,17 +14797,17 @@
         </p:nvSpPr>
         <p:spPr>
           <a:xfrm>
-            <a:off x="1234440" y="1874519"/>
-            <a:ext cx="10058400" cy="429370"/>
-          </a:xfrm>
-          <a:prstGeom prst="rect">
-            <a:avLst/>
-          </a:prstGeom>
-          <a:noFill/>
-        </p:spPr>
-        <p:txBody>
-          <a:bodyPr wrap="square" lIns="45720" rIns="45720" tIns="18288" bIns="18288" anchor="t">
-            <a:spAutoFit/>
+            <a:off x="1234440" y="1851660"/>
+            <a:ext cx="8198278" cy="457200"/>
+          </a:xfrm>
+          <a:prstGeom prst="rect">
+            <a:avLst/>
+          </a:prstGeom>
+          <a:noFill/>
+        </p:spPr>
+        <p:txBody>
+          <a:bodyPr wrap="none" lIns="45720" rIns="45720" tIns="18288" bIns="18288" anchor="ctr">
+            <a:noAutofit/>
           </a:bodyPr>
           <a:lstStyle/>
           <a:p>
@@ -12880,49 +14819,14 @@
                 </a:solidFill>
                 <a:latin typeface="Lexend"/>
               </a:rPr>
-              <a:t>A 4 in by 6 in photo, taken 3 years ago, is enlarged at k = 2.5.</a:t>
-            </a:r>
-          </a:p>
-        </p:txBody>
-      </p:sp>
-      <p:sp>
-        <p:nvSpPr>
-          <p:cNvPr id="9" name="TextBox 8"/>
-          <p:cNvSpPr txBox="1"/>
-          <p:nvPr/>
-        </p:nvSpPr>
-        <p:spPr>
-          <a:xfrm>
-            <a:off x="1234440" y="2413618"/>
-            <a:ext cx="10058400" cy="429370"/>
-          </a:xfrm>
-          <a:prstGeom prst="rect">
-            <a:avLst/>
-          </a:prstGeom>
-          <a:noFill/>
-        </p:spPr>
-        <p:txBody>
-          <a:bodyPr wrap="square" lIns="45720" rIns="45720" tIns="18288" bIns="18288" anchor="t">
-            <a:spAutoFit/>
-          </a:bodyPr>
-          <a:lstStyle/>
-          <a:p>
-            <a:pPr algn="l"/>
-            <a:r>
-              <a:rPr sz="2280" b="1" i="0">
-                <a:solidFill>
-                  <a:srgbClr val="1A1A1A"/>
-                </a:solidFill>
-                <a:latin typeface="Lexend"/>
-              </a:rPr>
-              <a:t>What is the enlargement's area?</a:t>
+              <a:t>A 4 in by 6 in photo, taken 3 years ago, is enlarged at </a:t>
             </a:r>
           </a:p>
         </p:txBody>
       </p:sp>
       <p:pic>
         <p:nvPicPr>
-          <p:cNvPr id="10" name="Picture 9" descr="2a69d4576013abfc.png"/>
+          <p:cNvPr id="9" name="Picture 8" descr="39705602679ca241.png"/>
           <p:cNvPicPr>
             <a:picLocks noChangeAspect="1"/>
           </p:cNvPicPr>
@@ -12936,17 +14840,87 @@
         </p:blipFill>
         <p:spPr>
           <a:xfrm>
-            <a:off x="4183379" y="3150836"/>
-            <a:ext cx="1996439" cy="252984"/>
+            <a:off x="9295558" y="1965960"/>
+            <a:ext cx="853440" cy="234696"/>
           </a:xfrm>
           <a:prstGeom prst="rect">
             <a:avLst/>
           </a:prstGeom>
         </p:spPr>
       </p:pic>
+      <p:sp>
+        <p:nvSpPr>
+          <p:cNvPr id="10" name="TextBox 9"/>
+          <p:cNvSpPr txBox="1"/>
+          <p:nvPr/>
+        </p:nvSpPr>
+        <p:spPr>
+          <a:xfrm>
+            <a:off x="10148998" y="1851660"/>
+            <a:ext cx="280301" cy="457200"/>
+          </a:xfrm>
+          <a:prstGeom prst="rect">
+            <a:avLst/>
+          </a:prstGeom>
+          <a:noFill/>
+        </p:spPr>
+        <p:txBody>
+          <a:bodyPr wrap="none" lIns="45720" rIns="45720" tIns="18288" bIns="18288" anchor="ctr">
+            <a:noAutofit/>
+          </a:bodyPr>
+          <a:lstStyle/>
+          <a:p>
+            <a:pPr algn="l"/>
+            <a:r>
+              <a:rPr sz="2280" b="0" i="0">
+                <a:solidFill>
+                  <a:srgbClr val="1A1A1A"/>
+                </a:solidFill>
+                <a:latin typeface="Lexend"/>
+              </a:rPr>
+              <a:t>.</a:t>
+            </a:r>
+          </a:p>
+        </p:txBody>
+      </p:sp>
+      <p:sp>
+        <p:nvSpPr>
+          <p:cNvPr id="11" name="TextBox 10"/>
+          <p:cNvSpPr txBox="1"/>
+          <p:nvPr/>
+        </p:nvSpPr>
+        <p:spPr>
+          <a:xfrm>
+            <a:off x="1234440" y="2487168"/>
+            <a:ext cx="10058400" cy="429370"/>
+          </a:xfrm>
+          <a:prstGeom prst="rect">
+            <a:avLst/>
+          </a:prstGeom>
+          <a:noFill/>
+        </p:spPr>
+        <p:txBody>
+          <a:bodyPr wrap="square" lIns="45720" rIns="45720" tIns="18288" bIns="18288" anchor="t">
+            <a:spAutoFit/>
+          </a:bodyPr>
+          <a:lstStyle/>
+          <a:p>
+            <a:pPr algn="l"/>
+            <a:r>
+              <a:rPr sz="2280" b="1" i="0">
+                <a:solidFill>
+                  <a:srgbClr val="1A1A1A"/>
+                </a:solidFill>
+                <a:latin typeface="Lexend"/>
+              </a:rPr>
+              <a:t>What is the enlargement's area?</a:t>
+            </a:r>
+          </a:p>
+        </p:txBody>
+      </p:sp>
       <p:pic>
         <p:nvPicPr>
-          <p:cNvPr id="11" name="Picture 10" descr="f562745388bd6474.png"/>
+          <p:cNvPr id="12" name="Picture 11" descr="2a69d4576013abfc.png"/>
           <p:cNvPicPr>
             <a:picLocks noChangeAspect="1"/>
           </p:cNvPicPr>
@@ -12960,7 +14934,31 @@
         </p:blipFill>
         <p:spPr>
           <a:xfrm>
-            <a:off x="4183379" y="3664424"/>
+            <a:off x="4183379" y="3236006"/>
+            <a:ext cx="1996439" cy="252984"/>
+          </a:xfrm>
+          <a:prstGeom prst="rect">
+            <a:avLst/>
+          </a:prstGeom>
+        </p:spPr>
+      </p:pic>
+      <p:pic>
+        <p:nvPicPr>
+          <p:cNvPr id="13" name="Picture 12" descr="f562745388bd6474.png"/>
+          <p:cNvPicPr>
+            <a:picLocks noChangeAspect="1"/>
+          </p:cNvPicPr>
+          <p:nvPr/>
+        </p:nvPicPr>
+        <p:blipFill>
+          <a:blip r:embed="rId4"/>
+          <a:stretch>
+            <a:fillRect/>
+          </a:stretch>
+        </p:blipFill>
+        <p:spPr>
+          <a:xfrm>
+            <a:off x="4183379" y="3729782"/>
             <a:ext cx="3901440" cy="304800"/>
           </a:xfrm>
           <a:prstGeom prst="rect">
@@ -12970,7 +14968,7 @@
       </p:pic>
       <p:sp>
         <p:nvSpPr>
-          <p:cNvPr id="12" name="TextBox 11"/>
+          <p:cNvPr id="14" name="TextBox 13"/>
           <p:cNvSpPr txBox="1"/>
           <p:nvPr/>
         </p:nvSpPr>
@@ -13659,7 +15657,7 @@
         </p:blipFill>
         <p:spPr>
           <a:xfrm>
-            <a:off x="3482340" y="3149312"/>
+            <a:off x="3482340" y="3162457"/>
             <a:ext cx="5306568" cy="256032"/>
           </a:xfrm>
           <a:prstGeom prst="rect">
@@ -13956,23 +15954,23 @@
         </p:nvSpPr>
         <p:spPr>
           <a:xfrm>
-            <a:off x="960120" y="1572768"/>
-            <a:ext cx="548640" cy="356616"/>
-          </a:xfrm>
-          <a:prstGeom prst="rect">
-            <a:avLst/>
-          </a:prstGeom>
-          <a:noFill/>
-        </p:spPr>
-        <p:txBody>
-          <a:bodyPr wrap="square" lIns="45720" rIns="45720" tIns="18288" bIns="18288" anchor="t">
+            <a:off x="960120" y="1497031"/>
+            <a:ext cx="548640" cy="417443"/>
+          </a:xfrm>
+          <a:prstGeom prst="rect">
+            <a:avLst/>
+          </a:prstGeom>
+          <a:noFill/>
+        </p:spPr>
+        <p:txBody>
+          <a:bodyPr wrap="square" lIns="45720" rIns="45720" tIns="18288" bIns="18288" anchor="ctr">
             <a:spAutoFit/>
           </a:bodyPr>
           <a:lstStyle/>
           <a:p>
             <a:pPr algn="l"/>
             <a:r>
-              <a:rPr sz="1810" b="1" i="0">
+              <a:rPr sz="1989" b="1" i="0">
                 <a:solidFill>
                   <a:srgbClr val="0B5394"/>
                 </a:solidFill>
@@ -13991,451 +15989,980 @@
         </p:nvSpPr>
         <p:spPr>
           <a:xfrm>
-            <a:off x="1554480" y="1572768"/>
-            <a:ext cx="9829800" cy="411480"/>
-          </a:xfrm>
-          <a:prstGeom prst="rect">
-            <a:avLst/>
-          </a:prstGeom>
-          <a:noFill/>
-        </p:spPr>
-        <p:txBody>
-          <a:bodyPr wrap="square" lIns="45720" rIns="45720" tIns="18288" bIns="18288" anchor="t">
+            <a:off x="1554480" y="1497031"/>
+            <a:ext cx="5722377" cy="417443"/>
+          </a:xfrm>
+          <a:prstGeom prst="rect">
+            <a:avLst/>
+          </a:prstGeom>
+          <a:noFill/>
+        </p:spPr>
+        <p:txBody>
+          <a:bodyPr wrap="none" lIns="45720" rIns="45720" tIns="18288" bIns="18288" anchor="ctr">
+            <a:noAutofit/>
+          </a:bodyPr>
+          <a:lstStyle/>
+          <a:p>
+            <a:pPr algn="l"/>
+            <a:r>
+              <a:rPr sz="1989" b="0" i="0">
+                <a:solidFill>
+                  <a:srgbClr val="1A1A1A"/>
+                </a:solidFill>
+                <a:latin typeface="Lexend"/>
+              </a:rPr>
+              <a:t>A figure with perimeter 18 cm is scaled by </a:t>
+            </a:r>
+          </a:p>
+        </p:txBody>
+      </p:sp>
+      <p:pic>
+        <p:nvPicPr>
+          <p:cNvPr id="10" name="Picture 9" descr="0937735c0d6e3897.png"/>
+          <p:cNvPicPr>
+            <a:picLocks noChangeAspect="1"/>
+          </p:cNvPicPr>
+          <p:nvPr/>
+        </p:nvPicPr>
+        <p:blipFill>
+          <a:blip r:embed="rId2"/>
+          <a:stretch>
+            <a:fillRect/>
+          </a:stretch>
+        </p:blipFill>
+        <p:spPr>
+          <a:xfrm>
+            <a:off x="7139697" y="1598609"/>
+            <a:ext cx="551025" cy="214287"/>
+          </a:xfrm>
+          <a:prstGeom prst="rect">
+            <a:avLst/>
+          </a:prstGeom>
+        </p:spPr>
+      </p:pic>
+      <p:sp>
+        <p:nvSpPr>
+          <p:cNvPr id="11" name="TextBox 10"/>
+          <p:cNvSpPr txBox="1"/>
+          <p:nvPr/>
+        </p:nvSpPr>
+        <p:spPr>
+          <a:xfrm>
+            <a:off x="7690723" y="1497031"/>
+            <a:ext cx="3684047" cy="417443"/>
+          </a:xfrm>
+          <a:prstGeom prst="rect">
+            <a:avLst/>
+          </a:prstGeom>
+          <a:noFill/>
+        </p:spPr>
+        <p:txBody>
+          <a:bodyPr wrap="none" lIns="45720" rIns="45720" tIns="18288" bIns="18288" anchor="ctr">
+            <a:noAutofit/>
+          </a:bodyPr>
+          <a:lstStyle/>
+          <a:p>
+            <a:pPr algn="l"/>
+            <a:r>
+              <a:rPr sz="1989" b="0" i="0">
+                <a:solidFill>
+                  <a:srgbClr val="1A1A1A"/>
+                </a:solidFill>
+                <a:latin typeface="Lexend"/>
+              </a:rPr>
+              <a:t>. Find the copy's perimeter.</a:t>
+            </a:r>
+          </a:p>
+        </p:txBody>
+      </p:sp>
+      <p:sp>
+        <p:nvSpPr>
+          <p:cNvPr id="12" name="TextBox 11"/>
+          <p:cNvSpPr txBox="1"/>
+          <p:nvPr/>
+        </p:nvSpPr>
+        <p:spPr>
+          <a:xfrm>
+            <a:off x="960120" y="2028178"/>
+            <a:ext cx="548640" cy="417443"/>
+          </a:xfrm>
+          <a:prstGeom prst="rect">
+            <a:avLst/>
+          </a:prstGeom>
+          <a:noFill/>
+        </p:spPr>
+        <p:txBody>
+          <a:bodyPr wrap="square" lIns="45720" rIns="45720" tIns="18288" bIns="18288" anchor="ctr">
             <a:spAutoFit/>
           </a:bodyPr>
           <a:lstStyle/>
           <a:p>
             <a:pPr algn="l"/>
             <a:r>
-              <a:rPr sz="1810" b="0" i="0">
+              <a:rPr sz="1989" b="1" i="0">
+                <a:solidFill>
+                  <a:srgbClr val="0B5394"/>
+                </a:solidFill>
+                <a:latin typeface="Lexend"/>
+              </a:rPr>
+              <a:t>2.</a:t>
+            </a:r>
+          </a:p>
+        </p:txBody>
+      </p:sp>
+      <p:sp>
+        <p:nvSpPr>
+          <p:cNvPr id="13" name="TextBox 12"/>
+          <p:cNvSpPr txBox="1"/>
+          <p:nvPr/>
+        </p:nvSpPr>
+        <p:spPr>
+          <a:xfrm>
+            <a:off x="1554480" y="2028178"/>
+            <a:ext cx="2625765" cy="417443"/>
+          </a:xfrm>
+          <a:prstGeom prst="rect">
+            <a:avLst/>
+          </a:prstGeom>
+          <a:noFill/>
+        </p:spPr>
+        <p:txBody>
+          <a:bodyPr wrap="none" lIns="45720" rIns="45720" tIns="18288" bIns="18288" anchor="ctr">
+            <a:noAutofit/>
+          </a:bodyPr>
+          <a:lstStyle/>
+          <a:p>
+            <a:pPr algn="l"/>
+            <a:r>
+              <a:rPr sz="1989" b="0" i="0">
                 <a:solidFill>
                   <a:srgbClr val="1A1A1A"/>
                 </a:solidFill>
                 <a:latin typeface="Lexend"/>
               </a:rPr>
-              <a:t>A figure with perimeter 18 cm is scaled by k = 3. Find the copy's perimeter.</a:t>
-            </a:r>
-          </a:p>
-        </p:txBody>
-      </p:sp>
-      <p:sp>
-        <p:nvSpPr>
-          <p:cNvPr id="10" name="TextBox 9"/>
-          <p:cNvSpPr txBox="1"/>
-          <p:nvPr/>
-        </p:nvSpPr>
-        <p:spPr>
-          <a:xfrm>
-            <a:off x="960120" y="2075688"/>
-            <a:ext cx="548640" cy="356616"/>
-          </a:xfrm>
-          <a:prstGeom prst="rect">
-            <a:avLst/>
-          </a:prstGeom>
-          <a:noFill/>
-        </p:spPr>
-        <p:txBody>
-          <a:bodyPr wrap="square" lIns="45720" rIns="45720" tIns="18288" bIns="18288" anchor="t">
+              <a:t>A figure with area </a:t>
+            </a:r>
+          </a:p>
+        </p:txBody>
+      </p:sp>
+      <p:pic>
+        <p:nvPicPr>
+          <p:cNvPr id="14" name="Picture 13" descr="15179f9c1b681126.png"/>
+          <p:cNvPicPr>
+            <a:picLocks noChangeAspect="1"/>
+          </p:cNvPicPr>
+          <p:nvPr/>
+        </p:nvPicPr>
+        <p:blipFill>
+          <a:blip r:embed="rId3"/>
+          <a:stretch>
+            <a:fillRect/>
+          </a:stretch>
+        </p:blipFill>
+        <p:spPr>
+          <a:xfrm>
+            <a:off x="4043085" y="2110276"/>
+            <a:ext cx="706870" cy="253249"/>
+          </a:xfrm>
+          <a:prstGeom prst="rect">
+            <a:avLst/>
+          </a:prstGeom>
+        </p:spPr>
+      </p:pic>
+      <p:sp>
+        <p:nvSpPr>
+          <p:cNvPr id="15" name="TextBox 14"/>
+          <p:cNvSpPr txBox="1"/>
+          <p:nvPr/>
+        </p:nvSpPr>
+        <p:spPr>
+          <a:xfrm>
+            <a:off x="4749956" y="2028178"/>
+            <a:ext cx="1868822" cy="417443"/>
+          </a:xfrm>
+          <a:prstGeom prst="rect">
+            <a:avLst/>
+          </a:prstGeom>
+          <a:noFill/>
+        </p:spPr>
+        <p:txBody>
+          <a:bodyPr wrap="none" lIns="45720" rIns="45720" tIns="18288" bIns="18288" anchor="ctr">
+            <a:noAutofit/>
+          </a:bodyPr>
+          <a:lstStyle/>
+          <a:p>
+            <a:pPr algn="l"/>
+            <a:r>
+              <a:rPr sz="1989" b="0" i="0">
+                <a:solidFill>
+                  <a:srgbClr val="1A1A1A"/>
+                </a:solidFill>
+                <a:latin typeface="Lexend"/>
+              </a:rPr>
+              <a:t> is scaled by </a:t>
+            </a:r>
+          </a:p>
+        </p:txBody>
+      </p:sp>
+      <p:pic>
+        <p:nvPicPr>
+          <p:cNvPr id="16" name="Picture 15" descr="0937735c0d6e3897.png"/>
+          <p:cNvPicPr>
+            <a:picLocks noChangeAspect="1"/>
+          </p:cNvPicPr>
+          <p:nvPr/>
+        </p:nvPicPr>
+        <p:blipFill>
+          <a:blip r:embed="rId2"/>
+          <a:stretch>
+            <a:fillRect/>
+          </a:stretch>
+        </p:blipFill>
+        <p:spPr>
+          <a:xfrm>
+            <a:off x="6481618" y="2129756"/>
+            <a:ext cx="551025" cy="214287"/>
+          </a:xfrm>
+          <a:prstGeom prst="rect">
+            <a:avLst/>
+          </a:prstGeom>
+        </p:spPr>
+      </p:pic>
+      <p:sp>
+        <p:nvSpPr>
+          <p:cNvPr id="17" name="TextBox 16"/>
+          <p:cNvSpPr txBox="1"/>
+          <p:nvPr/>
+        </p:nvSpPr>
+        <p:spPr>
+          <a:xfrm>
+            <a:off x="7032644" y="2028178"/>
+            <a:ext cx="3032562" cy="417443"/>
+          </a:xfrm>
+          <a:prstGeom prst="rect">
+            <a:avLst/>
+          </a:prstGeom>
+          <a:noFill/>
+        </p:spPr>
+        <p:txBody>
+          <a:bodyPr wrap="none" lIns="45720" rIns="45720" tIns="18288" bIns="18288" anchor="ctr">
+            <a:noAutofit/>
+          </a:bodyPr>
+          <a:lstStyle/>
+          <a:p>
+            <a:pPr algn="l"/>
+            <a:r>
+              <a:rPr sz="1989" b="0" i="0">
+                <a:solidFill>
+                  <a:srgbClr val="1A1A1A"/>
+                </a:solidFill>
+                <a:latin typeface="Lexend"/>
+              </a:rPr>
+              <a:t>. Find the copy's area.</a:t>
+            </a:r>
+          </a:p>
+        </p:txBody>
+      </p:sp>
+      <p:sp>
+        <p:nvSpPr>
+          <p:cNvPr id="18" name="TextBox 17"/>
+          <p:cNvSpPr txBox="1"/>
+          <p:nvPr/>
+        </p:nvSpPr>
+        <p:spPr>
+          <a:xfrm>
+            <a:off x="960120" y="2619159"/>
+            <a:ext cx="548640" cy="417443"/>
+          </a:xfrm>
+          <a:prstGeom prst="rect">
+            <a:avLst/>
+          </a:prstGeom>
+          <a:noFill/>
+        </p:spPr>
+        <p:txBody>
+          <a:bodyPr wrap="square" lIns="45720" rIns="45720" tIns="18288" bIns="18288" anchor="ctr">
             <a:spAutoFit/>
           </a:bodyPr>
           <a:lstStyle/>
           <a:p>
             <a:pPr algn="l"/>
             <a:r>
-              <a:rPr sz="1810" b="1" i="0">
+              <a:rPr sz="1989" b="1" i="0">
                 <a:solidFill>
                   <a:srgbClr val="0B5394"/>
                 </a:solidFill>
                 <a:latin typeface="Lexend"/>
               </a:rPr>
-              <a:t>2.</a:t>
-            </a:r>
-          </a:p>
-        </p:txBody>
-      </p:sp>
-      <p:sp>
-        <p:nvSpPr>
-          <p:cNvPr id="11" name="TextBox 10"/>
-          <p:cNvSpPr txBox="1"/>
-          <p:nvPr/>
-        </p:nvSpPr>
-        <p:spPr>
-          <a:xfrm>
-            <a:off x="1554480" y="2075688"/>
-            <a:ext cx="9829800" cy="411480"/>
-          </a:xfrm>
-          <a:prstGeom prst="rect">
-            <a:avLst/>
-          </a:prstGeom>
-          <a:noFill/>
-        </p:spPr>
-        <p:txBody>
-          <a:bodyPr wrap="square" lIns="45720" rIns="45720" tIns="18288" bIns="18288" anchor="t">
+              <a:t>3.</a:t>
+            </a:r>
+          </a:p>
+        </p:txBody>
+      </p:sp>
+      <p:sp>
+        <p:nvSpPr>
+          <p:cNvPr id="19" name="TextBox 18"/>
+          <p:cNvSpPr txBox="1"/>
+          <p:nvPr/>
+        </p:nvSpPr>
+        <p:spPr>
+          <a:xfrm>
+            <a:off x="1554480" y="2619159"/>
+            <a:ext cx="2625765" cy="417443"/>
+          </a:xfrm>
+          <a:prstGeom prst="rect">
+            <a:avLst/>
+          </a:prstGeom>
+          <a:noFill/>
+        </p:spPr>
+        <p:txBody>
+          <a:bodyPr wrap="none" lIns="45720" rIns="45720" tIns="18288" bIns="18288" anchor="ctr">
+            <a:noAutofit/>
+          </a:bodyPr>
+          <a:lstStyle/>
+          <a:p>
+            <a:pPr algn="l"/>
+            <a:r>
+              <a:rPr sz="1989" b="0" i="0">
+                <a:solidFill>
+                  <a:srgbClr val="1A1A1A"/>
+                </a:solidFill>
+                <a:latin typeface="Lexend"/>
+              </a:rPr>
+              <a:t>A figure with area </a:t>
+            </a:r>
+          </a:p>
+        </p:txBody>
+      </p:sp>
+      <p:pic>
+        <p:nvPicPr>
+          <p:cNvPr id="20" name="Picture 19" descr="f4387bd3ec8815b6.png"/>
+          <p:cNvPicPr>
+            <a:picLocks noChangeAspect="1"/>
+          </p:cNvPicPr>
+          <p:nvPr/>
+        </p:nvPicPr>
+        <p:blipFill>
+          <a:blip r:embed="rId4"/>
+          <a:stretch>
+            <a:fillRect/>
+          </a:stretch>
+        </p:blipFill>
+        <p:spPr>
+          <a:xfrm>
+            <a:off x="4043085" y="2701256"/>
+            <a:ext cx="910026" cy="253249"/>
+          </a:xfrm>
+          <a:prstGeom prst="rect">
+            <a:avLst/>
+          </a:prstGeom>
+        </p:spPr>
+      </p:pic>
+      <p:sp>
+        <p:nvSpPr>
+          <p:cNvPr id="21" name="TextBox 20"/>
+          <p:cNvSpPr txBox="1"/>
+          <p:nvPr/>
+        </p:nvSpPr>
+        <p:spPr>
+          <a:xfrm>
+            <a:off x="4953112" y="2619159"/>
+            <a:ext cx="1868822" cy="417443"/>
+          </a:xfrm>
+          <a:prstGeom prst="rect">
+            <a:avLst/>
+          </a:prstGeom>
+          <a:noFill/>
+        </p:spPr>
+        <p:txBody>
+          <a:bodyPr wrap="none" lIns="45720" rIns="45720" tIns="18288" bIns="18288" anchor="ctr">
+            <a:noAutofit/>
+          </a:bodyPr>
+          <a:lstStyle/>
+          <a:p>
+            <a:pPr algn="l"/>
+            <a:r>
+              <a:rPr sz="1989" b="0" i="0">
+                <a:solidFill>
+                  <a:srgbClr val="1A1A1A"/>
+                </a:solidFill>
+                <a:latin typeface="Lexend"/>
+              </a:rPr>
+              <a:t> is scaled by </a:t>
+            </a:r>
+          </a:p>
+        </p:txBody>
+      </p:sp>
+      <p:pic>
+        <p:nvPicPr>
+          <p:cNvPr id="22" name="Picture 21" descr="3bcf9a6d74a2c992.png"/>
+          <p:cNvPicPr>
+            <a:picLocks noChangeAspect="1"/>
+          </p:cNvPicPr>
+          <p:nvPr/>
+        </p:nvPicPr>
+        <p:blipFill>
+          <a:blip r:embed="rId5"/>
+          <a:stretch>
+            <a:fillRect/>
+          </a:stretch>
+        </p:blipFill>
+        <p:spPr>
+          <a:xfrm>
+            <a:off x="6684774" y="2580198"/>
+            <a:ext cx="570506" cy="495366"/>
+          </a:xfrm>
+          <a:prstGeom prst="rect">
+            <a:avLst/>
+          </a:prstGeom>
+        </p:spPr>
+      </p:pic>
+      <p:sp>
+        <p:nvSpPr>
+          <p:cNvPr id="23" name="TextBox 22"/>
+          <p:cNvSpPr txBox="1"/>
+          <p:nvPr/>
+        </p:nvSpPr>
+        <p:spPr>
+          <a:xfrm>
+            <a:off x="7255280" y="2619159"/>
+            <a:ext cx="3032562" cy="417443"/>
+          </a:xfrm>
+          <a:prstGeom prst="rect">
+            <a:avLst/>
+          </a:prstGeom>
+          <a:noFill/>
+        </p:spPr>
+        <p:txBody>
+          <a:bodyPr wrap="none" lIns="45720" rIns="45720" tIns="18288" bIns="18288" anchor="ctr">
+            <a:noAutofit/>
+          </a:bodyPr>
+          <a:lstStyle/>
+          <a:p>
+            <a:pPr algn="l"/>
+            <a:r>
+              <a:rPr sz="1989" b="0" i="0">
+                <a:solidFill>
+                  <a:srgbClr val="1A1A1A"/>
+                </a:solidFill>
+                <a:latin typeface="Lexend"/>
+              </a:rPr>
+              <a:t>. Find the copy's area.</a:t>
+            </a:r>
+          </a:p>
+        </p:txBody>
+      </p:sp>
+      <p:sp>
+        <p:nvSpPr>
+          <p:cNvPr id="24" name="TextBox 23"/>
+          <p:cNvSpPr txBox="1"/>
+          <p:nvPr/>
+        </p:nvSpPr>
+        <p:spPr>
+          <a:xfrm>
+            <a:off x="960120" y="3210140"/>
+            <a:ext cx="548640" cy="417443"/>
+          </a:xfrm>
+          <a:prstGeom prst="rect">
+            <a:avLst/>
+          </a:prstGeom>
+          <a:noFill/>
+        </p:spPr>
+        <p:txBody>
+          <a:bodyPr wrap="square" lIns="45720" rIns="45720" tIns="18288" bIns="18288" anchor="ctr">
             <a:spAutoFit/>
           </a:bodyPr>
           <a:lstStyle/>
           <a:p>
             <a:pPr algn="l"/>
             <a:r>
-              <a:rPr sz="1810" b="0" i="0">
+              <a:rPr sz="1989" b="1" i="0">
+                <a:solidFill>
+                  <a:srgbClr val="0B5394"/>
+                </a:solidFill>
+                <a:latin typeface="Lexend"/>
+              </a:rPr>
+              <a:t>4.</a:t>
+            </a:r>
+          </a:p>
+        </p:txBody>
+      </p:sp>
+      <p:sp>
+        <p:nvSpPr>
+          <p:cNvPr id="25" name="TextBox 24"/>
+          <p:cNvSpPr txBox="1"/>
+          <p:nvPr/>
+        </p:nvSpPr>
+        <p:spPr>
+          <a:xfrm>
+            <a:off x="1554480" y="3210140"/>
+            <a:ext cx="5140832" cy="417443"/>
+          </a:xfrm>
+          <a:prstGeom prst="rect">
+            <a:avLst/>
+          </a:prstGeom>
+          <a:noFill/>
+        </p:spPr>
+        <p:txBody>
+          <a:bodyPr wrap="none" lIns="45720" rIns="45720" tIns="18288" bIns="18288" anchor="ctr">
+            <a:noAutofit/>
+          </a:bodyPr>
+          <a:lstStyle/>
+          <a:p>
+            <a:pPr algn="l"/>
+            <a:r>
+              <a:rPr sz="1989" b="0" i="0">
                 <a:solidFill>
                   <a:srgbClr val="1A1A1A"/>
                 </a:solidFill>
                 <a:latin typeface="Lexend"/>
               </a:rPr>
-              <a:t>A figure with area 7 cm</a:t>
-            </a:r>
-            <a:r>
-              <a:rPr sz="1810" b="0" i="0" baseline="30000">
+              <a:t>A 2 cm by 5 cm rectangle is scaled by </a:t>
+            </a:r>
+          </a:p>
+        </p:txBody>
+      </p:sp>
+      <p:pic>
+        <p:nvPicPr>
+          <p:cNvPr id="26" name="Picture 25" descr="fc22e08664d80881.png"/>
+          <p:cNvPicPr>
+            <a:picLocks noChangeAspect="1"/>
+          </p:cNvPicPr>
+          <p:nvPr/>
+        </p:nvPicPr>
+        <p:blipFill>
+          <a:blip r:embed="rId6"/>
+          <a:stretch>
+            <a:fillRect/>
+          </a:stretch>
+        </p:blipFill>
+        <p:spPr>
+          <a:xfrm>
+            <a:off x="6558152" y="3311718"/>
+            <a:ext cx="779227" cy="214287"/>
+          </a:xfrm>
+          <a:prstGeom prst="rect">
+            <a:avLst/>
+          </a:prstGeom>
+        </p:spPr>
+      </p:pic>
+      <p:sp>
+        <p:nvSpPr>
+          <p:cNvPr id="27" name="TextBox 26"/>
+          <p:cNvSpPr txBox="1"/>
+          <p:nvPr/>
+        </p:nvSpPr>
+        <p:spPr>
+          <a:xfrm>
+            <a:off x="7337380" y="3210140"/>
+            <a:ext cx="3728608" cy="417443"/>
+          </a:xfrm>
+          <a:prstGeom prst="rect">
+            <a:avLst/>
+          </a:prstGeom>
+          <a:noFill/>
+        </p:spPr>
+        <p:txBody>
+          <a:bodyPr wrap="none" lIns="45720" rIns="45720" tIns="18288" bIns="18288" anchor="ctr">
+            <a:noAutofit/>
+          </a:bodyPr>
+          <a:lstStyle/>
+          <a:p>
+            <a:pPr algn="l"/>
+            <a:r>
+              <a:rPr sz="1989" b="0" i="0">
                 <a:solidFill>
                   <a:srgbClr val="1A1A1A"/>
                 </a:solidFill>
                 <a:latin typeface="Lexend"/>
               </a:rPr>
-              <a:t>2</a:t>
-            </a:r>
-            <a:r>
-              <a:rPr sz="1810" b="0" i="0">
+              <a:t>. Find the copy's perimeter </a:t>
+            </a:r>
+          </a:p>
+        </p:txBody>
+      </p:sp>
+      <p:sp>
+        <p:nvSpPr>
+          <p:cNvPr id="28" name="TextBox 27"/>
+          <p:cNvSpPr txBox="1"/>
+          <p:nvPr/>
+        </p:nvSpPr>
+        <p:spPr>
+          <a:xfrm>
+            <a:off x="1554480" y="3613271"/>
+            <a:ext cx="1446539" cy="417443"/>
+          </a:xfrm>
+          <a:prstGeom prst="rect">
+            <a:avLst/>
+          </a:prstGeom>
+          <a:noFill/>
+        </p:spPr>
+        <p:txBody>
+          <a:bodyPr wrap="none" lIns="45720" rIns="45720" tIns="18288" bIns="18288" anchor="ctr">
+            <a:noAutofit/>
+          </a:bodyPr>
+          <a:lstStyle/>
+          <a:p>
+            <a:pPr algn="l"/>
+            <a:r>
+              <a:rPr sz="1989" b="0" i="0">
                 <a:solidFill>
                   <a:srgbClr val="1A1A1A"/>
                 </a:solidFill>
                 <a:latin typeface="Lexend"/>
               </a:rPr>
-              <a:t> is scaled by k = 3. Find the copy's area.</a:t>
-            </a:r>
-          </a:p>
-        </p:txBody>
-      </p:sp>
-      <p:sp>
-        <p:nvSpPr>
-          <p:cNvPr id="12" name="TextBox 11"/>
-          <p:cNvSpPr txBox="1"/>
-          <p:nvPr/>
-        </p:nvSpPr>
-        <p:spPr>
-          <a:xfrm>
-            <a:off x="960120" y="2578608"/>
-            <a:ext cx="548640" cy="356616"/>
-          </a:xfrm>
-          <a:prstGeom prst="rect">
-            <a:avLst/>
-          </a:prstGeom>
-          <a:noFill/>
-        </p:spPr>
-        <p:txBody>
-          <a:bodyPr wrap="square" lIns="45720" rIns="45720" tIns="18288" bIns="18288" anchor="t">
+              <a:t>and area.</a:t>
+            </a:r>
+          </a:p>
+        </p:txBody>
+      </p:sp>
+      <p:sp>
+        <p:nvSpPr>
+          <p:cNvPr id="29" name="TextBox 28"/>
+          <p:cNvSpPr txBox="1"/>
+          <p:nvPr/>
+        </p:nvSpPr>
+        <p:spPr>
+          <a:xfrm>
+            <a:off x="960120" y="4144418"/>
+            <a:ext cx="548640" cy="417443"/>
+          </a:xfrm>
+          <a:prstGeom prst="rect">
+            <a:avLst/>
+          </a:prstGeom>
+          <a:noFill/>
+        </p:spPr>
+        <p:txBody>
+          <a:bodyPr wrap="square" lIns="45720" rIns="45720" tIns="18288" bIns="18288" anchor="ctr">
             <a:spAutoFit/>
           </a:bodyPr>
           <a:lstStyle/>
           <a:p>
             <a:pPr algn="l"/>
             <a:r>
-              <a:rPr sz="1810" b="1" i="0">
+              <a:rPr sz="1989" b="1" i="0">
                 <a:solidFill>
                   <a:srgbClr val="0B5394"/>
                 </a:solidFill>
                 <a:latin typeface="Lexend"/>
               </a:rPr>
-              <a:t>3.</a:t>
-            </a:r>
-          </a:p>
-        </p:txBody>
-      </p:sp>
-      <p:sp>
-        <p:nvSpPr>
-          <p:cNvPr id="13" name="TextBox 12"/>
-          <p:cNvSpPr txBox="1"/>
-          <p:nvPr/>
-        </p:nvSpPr>
-        <p:spPr>
-          <a:xfrm>
-            <a:off x="1554480" y="2578608"/>
-            <a:ext cx="9829800" cy="411480"/>
-          </a:xfrm>
-          <a:prstGeom prst="rect">
-            <a:avLst/>
-          </a:prstGeom>
-          <a:noFill/>
-        </p:spPr>
-        <p:txBody>
-          <a:bodyPr wrap="square" lIns="45720" rIns="45720" tIns="18288" bIns="18288" anchor="t">
+              <a:t>5.</a:t>
+            </a:r>
+          </a:p>
+        </p:txBody>
+      </p:sp>
+      <p:sp>
+        <p:nvSpPr>
+          <p:cNvPr id="30" name="TextBox 29"/>
+          <p:cNvSpPr txBox="1"/>
+          <p:nvPr/>
+        </p:nvSpPr>
+        <p:spPr>
+          <a:xfrm>
+            <a:off x="1554480" y="4144418"/>
+            <a:ext cx="2531747" cy="417443"/>
+          </a:xfrm>
+          <a:prstGeom prst="rect">
+            <a:avLst/>
+          </a:prstGeom>
+          <a:noFill/>
+        </p:spPr>
+        <p:txBody>
+          <a:bodyPr wrap="none" lIns="45720" rIns="45720" tIns="18288" bIns="18288" anchor="ctr">
+            <a:noAutofit/>
+          </a:bodyPr>
+          <a:lstStyle/>
+          <a:p>
+            <a:pPr algn="l"/>
+            <a:r>
+              <a:rPr sz="1989" b="0" i="0">
+                <a:solidFill>
+                  <a:srgbClr val="1A1A1A"/>
+                </a:solidFill>
+                <a:latin typeface="Lexend"/>
+              </a:rPr>
+              <a:t>A figure has area </a:t>
+            </a:r>
+          </a:p>
+        </p:txBody>
+      </p:sp>
+      <p:pic>
+        <p:nvPicPr>
+          <p:cNvPr id="31" name="Picture 30" descr="edb32a36259546d5.png"/>
+          <p:cNvPicPr>
+            <a:picLocks noChangeAspect="1"/>
+          </p:cNvPicPr>
+          <p:nvPr/>
+        </p:nvPicPr>
+        <p:blipFill>
+          <a:blip r:embed="rId7"/>
+          <a:stretch>
+            <a:fillRect/>
+          </a:stretch>
+        </p:blipFill>
+        <p:spPr>
+          <a:xfrm>
+            <a:off x="3949067" y="4226515"/>
+            <a:ext cx="718002" cy="253249"/>
+          </a:xfrm>
+          <a:prstGeom prst="rect">
+            <a:avLst/>
+          </a:prstGeom>
+        </p:spPr>
+      </p:pic>
+      <p:sp>
+        <p:nvSpPr>
+          <p:cNvPr id="32" name="TextBox 31"/>
+          <p:cNvSpPr txBox="1"/>
+          <p:nvPr/>
+        </p:nvSpPr>
+        <p:spPr>
+          <a:xfrm>
+            <a:off x="4667069" y="4144418"/>
+            <a:ext cx="3899959" cy="417443"/>
+          </a:xfrm>
+          <a:prstGeom prst="rect">
+            <a:avLst/>
+          </a:prstGeom>
+          <a:noFill/>
+        </p:spPr>
+        <p:txBody>
+          <a:bodyPr wrap="none" lIns="45720" rIns="45720" tIns="18288" bIns="18288" anchor="ctr">
+            <a:noAutofit/>
+          </a:bodyPr>
+          <a:lstStyle/>
+          <a:p>
+            <a:pPr algn="l"/>
+            <a:r>
+              <a:rPr sz="1989" b="0" i="0">
+                <a:solidFill>
+                  <a:srgbClr val="1A1A1A"/>
+                </a:solidFill>
+                <a:latin typeface="Lexend"/>
+              </a:rPr>
+              <a:t> and its scale copy has area </a:t>
+            </a:r>
+          </a:p>
+        </p:txBody>
+      </p:sp>
+      <p:pic>
+        <p:nvPicPr>
+          <p:cNvPr id="33" name="Picture 32" descr="0db939c0bc0baa3c.png"/>
+          <p:cNvPicPr>
+            <a:picLocks noChangeAspect="1"/>
+          </p:cNvPicPr>
+          <p:nvPr/>
+        </p:nvPicPr>
+        <p:blipFill>
+          <a:blip r:embed="rId8"/>
+          <a:stretch>
+            <a:fillRect/>
+          </a:stretch>
+        </p:blipFill>
+        <p:spPr>
+          <a:xfrm>
+            <a:off x="8429869" y="4226515"/>
+            <a:ext cx="1043608" cy="253249"/>
+          </a:xfrm>
+          <a:prstGeom prst="rect">
+            <a:avLst/>
+          </a:prstGeom>
+        </p:spPr>
+      </p:pic>
+      <p:sp>
+        <p:nvSpPr>
+          <p:cNvPr id="34" name="TextBox 33"/>
+          <p:cNvSpPr txBox="1"/>
+          <p:nvPr/>
+        </p:nvSpPr>
+        <p:spPr>
+          <a:xfrm>
+            <a:off x="9473478" y="4144418"/>
+            <a:ext cx="988336" cy="417443"/>
+          </a:xfrm>
+          <a:prstGeom prst="rect">
+            <a:avLst/>
+          </a:prstGeom>
+          <a:noFill/>
+        </p:spPr>
+        <p:txBody>
+          <a:bodyPr wrap="none" lIns="45720" rIns="45720" tIns="18288" bIns="18288" anchor="ctr">
+            <a:noAutofit/>
+          </a:bodyPr>
+          <a:lstStyle/>
+          <a:p>
+            <a:pPr algn="l"/>
+            <a:r>
+              <a:rPr sz="1989" b="0" i="0">
+                <a:solidFill>
+                  <a:srgbClr val="1A1A1A"/>
+                </a:solidFill>
+                <a:latin typeface="Lexend"/>
+              </a:rPr>
+              <a:t>. Find </a:t>
+            </a:r>
+          </a:p>
+        </p:txBody>
+      </p:sp>
+      <p:pic>
+        <p:nvPicPr>
+          <p:cNvPr id="35" name="Picture 34" descr="15aa4a684a6a761c.png"/>
+          <p:cNvPicPr>
+            <a:picLocks noChangeAspect="1"/>
+          </p:cNvPicPr>
+          <p:nvPr/>
+        </p:nvPicPr>
+        <p:blipFill>
+          <a:blip r:embed="rId9"/>
+          <a:stretch>
+            <a:fillRect/>
+          </a:stretch>
+        </p:blipFill>
+        <p:spPr>
+          <a:xfrm>
+            <a:off x="10324654" y="4247388"/>
+            <a:ext cx="141930" cy="211504"/>
+          </a:xfrm>
+          <a:prstGeom prst="rect">
+            <a:avLst/>
+          </a:prstGeom>
+        </p:spPr>
+      </p:pic>
+      <p:sp>
+        <p:nvSpPr>
+          <p:cNvPr id="36" name="TextBox 35"/>
+          <p:cNvSpPr txBox="1"/>
+          <p:nvPr/>
+        </p:nvSpPr>
+        <p:spPr>
+          <a:xfrm>
+            <a:off x="10466585" y="4144418"/>
+            <a:ext cx="271558" cy="417443"/>
+          </a:xfrm>
+          <a:prstGeom prst="rect">
+            <a:avLst/>
+          </a:prstGeom>
+          <a:noFill/>
+        </p:spPr>
+        <p:txBody>
+          <a:bodyPr wrap="none" lIns="45720" rIns="45720" tIns="18288" bIns="18288" anchor="ctr">
+            <a:noAutofit/>
+          </a:bodyPr>
+          <a:lstStyle/>
+          <a:p>
+            <a:pPr algn="l"/>
+            <a:r>
+              <a:rPr sz="1989" b="0" i="0">
+                <a:solidFill>
+                  <a:srgbClr val="1A1A1A"/>
+                </a:solidFill>
+                <a:latin typeface="Lexend"/>
+              </a:rPr>
+              <a:t>.</a:t>
+            </a:r>
+          </a:p>
+        </p:txBody>
+      </p:sp>
+      <p:sp>
+        <p:nvSpPr>
+          <p:cNvPr id="37" name="TextBox 36"/>
+          <p:cNvSpPr txBox="1"/>
+          <p:nvPr/>
+        </p:nvSpPr>
+        <p:spPr>
+          <a:xfrm>
+            <a:off x="960120" y="4675565"/>
+            <a:ext cx="548640" cy="417443"/>
+          </a:xfrm>
+          <a:prstGeom prst="rect">
+            <a:avLst/>
+          </a:prstGeom>
+          <a:noFill/>
+        </p:spPr>
+        <p:txBody>
+          <a:bodyPr wrap="square" lIns="45720" rIns="45720" tIns="18288" bIns="18288" anchor="ctr">
             <a:spAutoFit/>
           </a:bodyPr>
           <a:lstStyle/>
           <a:p>
             <a:pPr algn="l"/>
             <a:r>
-              <a:rPr sz="1810" b="0" i="0">
+              <a:rPr sz="1989" b="1" i="0">
+                <a:solidFill>
+                  <a:srgbClr val="0B5394"/>
+                </a:solidFill>
+                <a:latin typeface="Lexend"/>
+              </a:rPr>
+              <a:t>6.</a:t>
+            </a:r>
+          </a:p>
+        </p:txBody>
+      </p:sp>
+      <p:sp>
+        <p:nvSpPr>
+          <p:cNvPr id="38" name="TextBox 37"/>
+          <p:cNvSpPr txBox="1"/>
+          <p:nvPr/>
+        </p:nvSpPr>
+        <p:spPr>
+          <a:xfrm>
+            <a:off x="1554480" y="4675565"/>
+            <a:ext cx="9925080" cy="417443"/>
+          </a:xfrm>
+          <a:prstGeom prst="rect">
+            <a:avLst/>
+          </a:prstGeom>
+          <a:noFill/>
+        </p:spPr>
+        <p:txBody>
+          <a:bodyPr wrap="none" lIns="45720" rIns="45720" tIns="18288" bIns="18288" anchor="ctr">
+            <a:noAutofit/>
+          </a:bodyPr>
+          <a:lstStyle/>
+          <a:p>
+            <a:pPr algn="l"/>
+            <a:r>
+              <a:rPr sz="1989" b="0" i="0">
                 <a:solidFill>
                   <a:srgbClr val="1A1A1A"/>
                 </a:solidFill>
                 <a:latin typeface="Lexend"/>
               </a:rPr>
-              <a:t>A figure with area 40 cm</a:t>
-            </a:r>
-            <a:r>
-              <a:rPr sz="1810" b="0" i="0" baseline="30000">
+              <a:t>A figure's perimeter is 12 cm and its copy's perimeter is 48 cm. What is the </a:t>
+            </a:r>
+          </a:p>
+        </p:txBody>
+      </p:sp>
+      <p:sp>
+        <p:nvSpPr>
+          <p:cNvPr id="39" name="TextBox 38"/>
+          <p:cNvSpPr txBox="1"/>
+          <p:nvPr/>
+        </p:nvSpPr>
+        <p:spPr>
+          <a:xfrm>
+            <a:off x="1554480" y="5078696"/>
+            <a:ext cx="3825124" cy="417443"/>
+          </a:xfrm>
+          <a:prstGeom prst="rect">
+            <a:avLst/>
+          </a:prstGeom>
+          <a:noFill/>
+        </p:spPr>
+        <p:txBody>
+          <a:bodyPr wrap="none" lIns="45720" rIns="45720" tIns="18288" bIns="18288" anchor="ctr">
+            <a:noAutofit/>
+          </a:bodyPr>
+          <a:lstStyle/>
+          <a:p>
+            <a:pPr algn="l"/>
+            <a:r>
+              <a:rPr sz="1989" b="0" i="0">
                 <a:solidFill>
                   <a:srgbClr val="1A1A1A"/>
                 </a:solidFill>
                 <a:latin typeface="Lexend"/>
               </a:rPr>
-              <a:t>2</a:t>
-            </a:r>
-            <a:r>
-              <a:rPr sz="1810" b="0" i="0">
-                <a:solidFill>
-                  <a:srgbClr val="1A1A1A"/>
-                </a:solidFill>
-                <a:latin typeface="Lexend"/>
-              </a:rPr>
-              <a:t> is scaled by k = ½. Find the copy's area.</a:t>
-            </a:r>
-          </a:p>
-        </p:txBody>
-      </p:sp>
-      <p:sp>
-        <p:nvSpPr>
-          <p:cNvPr id="14" name="TextBox 13"/>
-          <p:cNvSpPr txBox="1"/>
-          <p:nvPr/>
-        </p:nvSpPr>
-        <p:spPr>
-          <a:xfrm>
-            <a:off x="960120" y="3081528"/>
-            <a:ext cx="548640" cy="356616"/>
-          </a:xfrm>
-          <a:prstGeom prst="rect">
-            <a:avLst/>
-          </a:prstGeom>
-          <a:noFill/>
-        </p:spPr>
-        <p:txBody>
-          <a:bodyPr wrap="square" lIns="45720" rIns="45720" tIns="18288" bIns="18288" anchor="t">
-            <a:spAutoFit/>
-          </a:bodyPr>
-          <a:lstStyle/>
-          <a:p>
-            <a:pPr algn="l"/>
-            <a:r>
-              <a:rPr sz="1810" b="1" i="0">
-                <a:solidFill>
-                  <a:srgbClr val="0B5394"/>
-                </a:solidFill>
-                <a:latin typeface="Lexend"/>
-              </a:rPr>
-              <a:t>4.</a:t>
-            </a:r>
-          </a:p>
-        </p:txBody>
-      </p:sp>
-      <p:sp>
-        <p:nvSpPr>
-          <p:cNvPr id="15" name="TextBox 14"/>
-          <p:cNvSpPr txBox="1"/>
-          <p:nvPr/>
-        </p:nvSpPr>
-        <p:spPr>
-          <a:xfrm>
-            <a:off x="1554480" y="3081528"/>
-            <a:ext cx="9829800" cy="768096"/>
-          </a:xfrm>
-          <a:prstGeom prst="rect">
-            <a:avLst/>
-          </a:prstGeom>
-          <a:noFill/>
-        </p:spPr>
-        <p:txBody>
-          <a:bodyPr wrap="square" lIns="45720" rIns="45720" tIns="18288" bIns="18288" anchor="t">
-            <a:spAutoFit/>
-          </a:bodyPr>
-          <a:lstStyle/>
-          <a:p>
-            <a:pPr algn="l"/>
-            <a:r>
-              <a:rPr sz="1810" b="0" i="0">
-                <a:solidFill>
-                  <a:srgbClr val="1A1A1A"/>
-                </a:solidFill>
-                <a:latin typeface="Lexend"/>
-              </a:rPr>
-              <a:t>A 2 cm by 5 cm rectangle is scaled by k = 2.5. Find the copy's perimeter and area.</a:t>
-            </a:r>
-          </a:p>
-        </p:txBody>
-      </p:sp>
-      <p:sp>
-        <p:nvSpPr>
-          <p:cNvPr id="16" name="TextBox 15"/>
-          <p:cNvSpPr txBox="1"/>
-          <p:nvPr/>
-        </p:nvSpPr>
-        <p:spPr>
-          <a:xfrm>
-            <a:off x="960120" y="3941064"/>
-            <a:ext cx="548640" cy="356616"/>
-          </a:xfrm>
-          <a:prstGeom prst="rect">
-            <a:avLst/>
-          </a:prstGeom>
-          <a:noFill/>
-        </p:spPr>
-        <p:txBody>
-          <a:bodyPr wrap="square" lIns="45720" rIns="45720" tIns="18288" bIns="18288" anchor="t">
-            <a:spAutoFit/>
-          </a:bodyPr>
-          <a:lstStyle/>
-          <a:p>
-            <a:pPr algn="l"/>
-            <a:r>
-              <a:rPr sz="1810" b="1" i="0">
-                <a:solidFill>
-                  <a:srgbClr val="0B5394"/>
-                </a:solidFill>
-                <a:latin typeface="Lexend"/>
-              </a:rPr>
-              <a:t>5.</a:t>
-            </a:r>
-          </a:p>
-        </p:txBody>
-      </p:sp>
-      <p:sp>
-        <p:nvSpPr>
-          <p:cNvPr id="17" name="TextBox 16"/>
-          <p:cNvSpPr txBox="1"/>
-          <p:nvPr/>
-        </p:nvSpPr>
-        <p:spPr>
-          <a:xfrm>
-            <a:off x="1554480" y="3941064"/>
-            <a:ext cx="9829800" cy="411480"/>
-          </a:xfrm>
-          <a:prstGeom prst="rect">
-            <a:avLst/>
-          </a:prstGeom>
-          <a:noFill/>
-        </p:spPr>
-        <p:txBody>
-          <a:bodyPr wrap="square" lIns="45720" rIns="45720" tIns="18288" bIns="18288" anchor="t">
-            <a:spAutoFit/>
-          </a:bodyPr>
-          <a:lstStyle/>
-          <a:p>
-            <a:pPr algn="l"/>
-            <a:r>
-              <a:rPr sz="1810" b="0" i="0">
-                <a:solidFill>
-                  <a:srgbClr val="1A1A1A"/>
-                </a:solidFill>
-                <a:latin typeface="Lexend"/>
-              </a:rPr>
-              <a:t>A figure has area 9 cm</a:t>
-            </a:r>
-            <a:r>
-              <a:rPr sz="1810" b="0" i="0" baseline="30000">
-                <a:solidFill>
-                  <a:srgbClr val="1A1A1A"/>
-                </a:solidFill>
-                <a:latin typeface="Lexend"/>
-              </a:rPr>
-              <a:t>2</a:t>
-            </a:r>
-            <a:r>
-              <a:rPr sz="1810" b="0" i="0">
-                <a:solidFill>
-                  <a:srgbClr val="1A1A1A"/>
-                </a:solidFill>
-                <a:latin typeface="Lexend"/>
-              </a:rPr>
-              <a:t> and its scale copy has area 144 cm</a:t>
-            </a:r>
-            <a:r>
-              <a:rPr sz="1810" b="0" i="0" baseline="30000">
-                <a:solidFill>
-                  <a:srgbClr val="1A1A1A"/>
-                </a:solidFill>
-                <a:latin typeface="Lexend"/>
-              </a:rPr>
-              <a:t>2</a:t>
-            </a:r>
-            <a:r>
-              <a:rPr sz="1810" b="0" i="0">
-                <a:solidFill>
-                  <a:srgbClr val="1A1A1A"/>
-                </a:solidFill>
-                <a:latin typeface="Lexend"/>
-              </a:rPr>
-              <a:t>. Find k.</a:t>
-            </a:r>
-          </a:p>
-        </p:txBody>
-      </p:sp>
-      <p:sp>
-        <p:nvSpPr>
-          <p:cNvPr id="18" name="TextBox 17"/>
-          <p:cNvSpPr txBox="1"/>
-          <p:nvPr/>
-        </p:nvSpPr>
-        <p:spPr>
-          <a:xfrm>
-            <a:off x="960120" y="4443984"/>
-            <a:ext cx="548640" cy="356616"/>
-          </a:xfrm>
-          <a:prstGeom prst="rect">
-            <a:avLst/>
-          </a:prstGeom>
-          <a:noFill/>
-        </p:spPr>
-        <p:txBody>
-          <a:bodyPr wrap="square" lIns="45720" rIns="45720" tIns="18288" bIns="18288" anchor="t">
-            <a:spAutoFit/>
-          </a:bodyPr>
-          <a:lstStyle/>
-          <a:p>
-            <a:pPr algn="l"/>
-            <a:r>
-              <a:rPr sz="1810" b="1" i="0">
-                <a:solidFill>
-                  <a:srgbClr val="0B5394"/>
-                </a:solidFill>
-                <a:latin typeface="Lexend"/>
-              </a:rPr>
-              <a:t>6.</a:t>
-            </a:r>
-          </a:p>
-        </p:txBody>
-      </p:sp>
-      <p:sp>
-        <p:nvSpPr>
-          <p:cNvPr id="19" name="TextBox 18"/>
-          <p:cNvSpPr txBox="1"/>
-          <p:nvPr/>
-        </p:nvSpPr>
-        <p:spPr>
-          <a:xfrm>
-            <a:off x="1554480" y="4443984"/>
-            <a:ext cx="9829800" cy="768096"/>
-          </a:xfrm>
-          <a:prstGeom prst="rect">
-            <a:avLst/>
-          </a:prstGeom>
-          <a:noFill/>
-        </p:spPr>
-        <p:txBody>
-          <a:bodyPr wrap="square" lIns="45720" rIns="45720" tIns="18288" bIns="18288" anchor="t">
-            <a:spAutoFit/>
-          </a:bodyPr>
-          <a:lstStyle/>
-          <a:p>
-            <a:pPr algn="l"/>
-            <a:r>
-              <a:rPr sz="1810" b="0" i="0">
-                <a:solidFill>
-                  <a:srgbClr val="1A1A1A"/>
-                </a:solidFill>
-                <a:latin typeface="Lexend"/>
-              </a:rPr>
-              <a:t>A figure's perimeter is 12 cm and its copy's perimeter is 48 cm. What is the area ratio, copy to original?</a:t>
+              <a:t>area ratio, copy to original?</a:t>
             </a:r>
           </a:p>
         </p:txBody>
@@ -15262,7 +17789,7 @@
         </p:blipFill>
         <p:spPr>
           <a:xfrm>
-            <a:off x="1143000" y="1928986"/>
+            <a:off x="1143000" y="1892410"/>
             <a:ext cx="359664" cy="338328"/>
           </a:xfrm>
           <a:prstGeom prst="rect">
@@ -15279,7 +17806,7 @@
         <p:spPr>
           <a:xfrm>
             <a:off x="1502664" y="1869550"/>
-            <a:ext cx="9443398" cy="457200"/>
+            <a:ext cx="9984578" cy="457200"/>
           </a:xfrm>
           <a:prstGeom prst="rect">
             <a:avLst/>
@@ -15300,7 +17827,7 @@
                 </a:solidFill>
                 <a:latin typeface="Lexend"/>
               </a:rPr>
-              <a:t>, k times k: the number an area is multiplied by when every length is</a:t>
+              <a:t>, k times k: what an area is multiplied by when every length is multiplied</a:t>
             </a:r>
           </a:p>
         </p:txBody>
@@ -15314,7 +17841,7 @@
         <p:spPr>
           <a:xfrm>
             <a:off x="1143000" y="2354182"/>
-            <a:ext cx="2058008" cy="457200"/>
+            <a:ext cx="624152" cy="457200"/>
           </a:xfrm>
           <a:prstGeom prst="rect">
             <a:avLst/>
@@ -15335,7 +17862,7 @@
                 </a:solidFill>
                 <a:latin typeface="Lexend"/>
               </a:rPr>
-              <a:t>multiplied by </a:t>
+              <a:t>by </a:t>
             </a:r>
           </a:p>
         </p:txBody>
@@ -15356,7 +17883,7 @@
         </p:blipFill>
         <p:spPr>
           <a:xfrm>
-            <a:off x="3063848" y="2439526"/>
+            <a:off x="1629992" y="2401045"/>
             <a:ext cx="188976" cy="286512"/>
           </a:xfrm>
           <a:prstGeom prst="rect">
@@ -15450,7 +17977,7 @@
         </p:blipFill>
         <p:spPr>
           <a:xfrm>
-            <a:off x="8112116" y="3481544"/>
+            <a:off x="8112116" y="3443063"/>
             <a:ext cx="188976" cy="286512"/>
           </a:xfrm>
           <a:prstGeom prst="rect">
@@ -15544,7 +18071,7 @@
         </p:blipFill>
         <p:spPr>
           <a:xfrm>
-            <a:off x="6682757" y="4497655"/>
+            <a:off x="6682757" y="4461079"/>
             <a:ext cx="359664" cy="338328"/>
           </a:xfrm>
           <a:prstGeom prst="rect">
@@ -15890,7 +18417,7 @@
         </p:blipFill>
         <p:spPr>
           <a:xfrm>
-            <a:off x="3671315" y="4587721"/>
+            <a:off x="3671315" y="4572862"/>
             <a:ext cx="4818888" cy="289560"/>
           </a:xfrm>
           <a:prstGeom prst="rect">
@@ -16236,7 +18763,7 @@
         </p:blipFill>
         <p:spPr>
           <a:xfrm>
-            <a:off x="3506724" y="4882778"/>
+            <a:off x="3506724" y="4847726"/>
             <a:ext cx="5148072" cy="341376"/>
           </a:xfrm>
           <a:prstGeom prst="rect">
@@ -16558,7 +19085,7 @@
         </p:blipFill>
         <p:spPr>
           <a:xfrm>
-            <a:off x="2016251" y="1993392"/>
+            <a:off x="2016251" y="1993391"/>
             <a:ext cx="8129016" cy="676656"/>
           </a:xfrm>
           <a:prstGeom prst="rect">
@@ -16855,21 +19382,21 @@
         </p:nvSpPr>
         <p:spPr>
           <a:xfrm>
-            <a:off x="777240" y="2103120"/>
-            <a:ext cx="10607040" cy="429370"/>
-          </a:xfrm>
-          <a:prstGeom prst="rect">
-            <a:avLst/>
-          </a:prstGeom>
-          <a:noFill/>
-        </p:spPr>
-        <p:txBody>
-          <a:bodyPr wrap="square" lIns="45720" rIns="45720" tIns="18288" bIns="18288" anchor="t">
-            <a:spAutoFit/>
-          </a:bodyPr>
-          <a:lstStyle/>
-          <a:p>
-            <a:pPr algn="ctr"/>
+            <a:off x="2845313" y="2080260"/>
+            <a:ext cx="5861407" cy="457200"/>
+          </a:xfrm>
+          <a:prstGeom prst="rect">
+            <a:avLst/>
+          </a:prstGeom>
+          <a:noFill/>
+        </p:spPr>
+        <p:txBody>
+          <a:bodyPr wrap="none" lIns="45720" rIns="45720" tIns="18288" bIns="18288" anchor="ctr">
+            <a:noAutofit/>
+          </a:bodyPr>
+          <a:lstStyle/>
+          <a:p>
+            <a:pPr algn="l"/>
             <a:r>
               <a:rPr sz="2280" b="0" i="0">
                 <a:solidFill>
@@ -16877,20 +19404,79 @@
                 </a:solidFill>
                 <a:latin typeface="Lexend"/>
               </a:rPr>
-              <a:t>A 2 cm by 4 cm rectangle is scaled by k = 3.</a:t>
-            </a:r>
-          </a:p>
-        </p:txBody>
-      </p:sp>
-      <p:sp>
-        <p:nvSpPr>
-          <p:cNvPr id="9" name="TextBox 8"/>
-          <p:cNvSpPr txBox="1"/>
-          <p:nvPr/>
-        </p:nvSpPr>
-        <p:spPr>
-          <a:xfrm>
-            <a:off x="777240" y="2825098"/>
+              <a:t>A 2 cm by 4 cm rectangle is scaled by </a:t>
+            </a:r>
+          </a:p>
+        </p:txBody>
+      </p:sp>
+      <p:pic>
+        <p:nvPicPr>
+          <p:cNvPr id="9" name="Picture 8" descr="0937735c0d6e3897.png"/>
+          <p:cNvPicPr>
+            <a:picLocks noChangeAspect="1"/>
+          </p:cNvPicPr>
+          <p:nvPr/>
+        </p:nvPicPr>
+        <p:blipFill>
+          <a:blip r:embed="rId2"/>
+          <a:stretch>
+            <a:fillRect/>
+          </a:stretch>
+        </p:blipFill>
+        <p:spPr>
+          <a:xfrm>
+            <a:off x="8569560" y="2194560"/>
+            <a:ext cx="603504" cy="234696"/>
+          </a:xfrm>
+          <a:prstGeom prst="rect">
+            <a:avLst/>
+          </a:prstGeom>
+        </p:spPr>
+      </p:pic>
+      <p:sp>
+        <p:nvSpPr>
+          <p:cNvPr id="10" name="TextBox 9"/>
+          <p:cNvSpPr txBox="1"/>
+          <p:nvPr/>
+        </p:nvSpPr>
+        <p:spPr>
+          <a:xfrm>
+            <a:off x="9173064" y="2080260"/>
+            <a:ext cx="280301" cy="457200"/>
+          </a:xfrm>
+          <a:prstGeom prst="rect">
+            <a:avLst/>
+          </a:prstGeom>
+          <a:noFill/>
+        </p:spPr>
+        <p:txBody>
+          <a:bodyPr wrap="none" lIns="45720" rIns="45720" tIns="18288" bIns="18288" anchor="ctr">
+            <a:noAutofit/>
+          </a:bodyPr>
+          <a:lstStyle/>
+          <a:p>
+            <a:pPr algn="l"/>
+            <a:r>
+              <a:rPr sz="2280" b="0" i="0">
+                <a:solidFill>
+                  <a:srgbClr val="1A1A1A"/>
+                </a:solidFill>
+                <a:latin typeface="Lexend"/>
+              </a:rPr>
+              <a:t>.</a:t>
+            </a:r>
+          </a:p>
+        </p:txBody>
+      </p:sp>
+      <p:sp>
+        <p:nvSpPr>
+          <p:cNvPr id="11" name="TextBox 10"/>
+          <p:cNvSpPr txBox="1"/>
+          <p:nvPr/>
+        </p:nvSpPr>
+        <p:spPr>
+          <a:xfrm>
+            <a:off x="777240" y="2971800"/>
             <a:ext cx="10607040" cy="429370"/>
           </a:xfrm>
           <a:prstGeom prst="rect">

--- a/a7/build/out/u5/A7 5.02 Scale Factor Perimeter and Area - Slides.pptx
+++ b/a7/build/out/u5/A7 5.02 Scale Factor Perimeter and Area - Slides.pptx
@@ -3673,7 +3673,7 @@
         </p:nvSpPr>
         <p:spPr>
           <a:xfrm>
-            <a:off x="2844186" y="1577340"/>
+            <a:off x="2843901" y="1577340"/>
             <a:ext cx="5836229" cy="457200"/>
           </a:xfrm>
           <a:prstGeom prst="rect">
@@ -3702,7 +3702,7 @@
       </p:sp>
       <p:pic>
         <p:nvPicPr>
-          <p:cNvPr id="9" name="Picture 8" descr="dc6c9152a78ca292.png"/>
+          <p:cNvPr id="9" name="Picture 8" descr="6c1f342e4d843352.png"/>
           <p:cNvPicPr>
             <a:picLocks noChangeAspect="1"/>
           </p:cNvPicPr>
@@ -3716,8 +3716,8 @@
         </p:blipFill>
         <p:spPr>
           <a:xfrm>
-            <a:off x="8543255" y="1688592"/>
-            <a:ext cx="630936" cy="231648"/>
+            <a:off x="8542970" y="1687449"/>
+            <a:ext cx="631507" cy="232791"/>
           </a:xfrm>
           <a:prstGeom prst="rect">
             <a:avLst/>
@@ -3732,7 +3732,7 @@
         </p:nvSpPr>
         <p:spPr>
           <a:xfrm>
-            <a:off x="9174191" y="1577340"/>
+            <a:off x="9174477" y="1577340"/>
             <a:ext cx="280301" cy="457200"/>
           </a:xfrm>
           <a:prstGeom prst="rect">
@@ -4059,7 +4059,7 @@
       </p:sp>
       <p:pic>
         <p:nvPicPr>
-          <p:cNvPr id="9" name="Picture 8" descr="5706b37a0e4384e1.png"/>
+          <p:cNvPr id="9" name="Picture 8" descr="8818f8b25079015a.png"/>
           <p:cNvPicPr>
             <a:picLocks noChangeAspect="1"/>
           </p:cNvPicPr>
@@ -4073,8 +4073,8 @@
         </p:blipFill>
         <p:spPr>
           <a:xfrm>
-            <a:off x="8541731" y="1688592"/>
-            <a:ext cx="633984" cy="231648"/>
+            <a:off x="8541731" y="1687449"/>
+            <a:ext cx="633984" cy="232791"/>
           </a:xfrm>
           <a:prstGeom prst="rect">
             <a:avLst/>
@@ -4479,7 +4479,7 @@
         </p:nvSpPr>
         <p:spPr>
           <a:xfrm>
-            <a:off x="4179745" y="1714500"/>
+            <a:off x="4181745" y="1714500"/>
             <a:ext cx="2863359" cy="457200"/>
           </a:xfrm>
           <a:prstGeom prst="rect">
@@ -4508,7 +4508,7 @@
       </p:sp>
       <p:pic>
         <p:nvPicPr>
-          <p:cNvPr id="9" name="Picture 8" descr="acf05f3147d3a63d.png"/>
+          <p:cNvPr id="9" name="Picture 8" descr="bd8ae361e3ef131e.png"/>
           <p:cNvPicPr>
             <a:picLocks noChangeAspect="1"/>
           </p:cNvPicPr>
@@ -4522,8 +4522,8 @@
         </p:blipFill>
         <p:spPr>
           <a:xfrm>
-            <a:off x="6905945" y="1786128"/>
-            <a:ext cx="932688" cy="277368"/>
+            <a:off x="6907945" y="1784985"/>
+            <a:ext cx="928687" cy="277368"/>
           </a:xfrm>
           <a:prstGeom prst="rect">
             <a:avLst/>
@@ -4538,7 +4538,7 @@
         </p:nvSpPr>
         <p:spPr>
           <a:xfrm>
-            <a:off x="7838633" y="1714500"/>
+            <a:off x="7836632" y="1714500"/>
             <a:ext cx="280301" cy="457200"/>
           </a:xfrm>
           <a:prstGeom prst="rect">
@@ -4573,7 +4573,7 @@
         </p:nvSpPr>
         <p:spPr>
           <a:xfrm>
-            <a:off x="3623004" y="2400300"/>
+            <a:off x="3624433" y="2400300"/>
             <a:ext cx="3745193" cy="457200"/>
           </a:xfrm>
           <a:prstGeom prst="rect">
@@ -4602,7 +4602,7 @@
       </p:sp>
       <p:pic>
         <p:nvPicPr>
-          <p:cNvPr id="12" name="Picture 11" descr="cd92977597ebedac.png"/>
+          <p:cNvPr id="12" name="Picture 11" descr="310dff147270a8e7.png"/>
           <p:cNvPicPr>
             <a:picLocks noChangeAspect="1"/>
           </p:cNvPicPr>
@@ -4616,8 +4616,8 @@
         </p:blipFill>
         <p:spPr>
           <a:xfrm>
-            <a:off x="7231038" y="2471928"/>
-            <a:ext cx="1164336" cy="277368"/>
+            <a:off x="7232467" y="2470785"/>
+            <a:ext cx="1161478" cy="277368"/>
           </a:xfrm>
           <a:prstGeom prst="rect">
             <a:avLst/>
@@ -4632,7 +4632,7 @@
         </p:nvSpPr>
         <p:spPr>
           <a:xfrm>
-            <a:off x="8395374" y="2400300"/>
+            <a:off x="8393945" y="2400300"/>
             <a:ext cx="280301" cy="457200"/>
           </a:xfrm>
           <a:prstGeom prst="rect">
@@ -5276,7 +5276,7 @@
         </p:nvSpPr>
         <p:spPr>
           <a:xfrm>
-            <a:off x="4182793" y="1577340"/>
+            <a:off x="4185460" y="1577340"/>
             <a:ext cx="2863359" cy="457200"/>
           </a:xfrm>
           <a:prstGeom prst="rect">
@@ -5305,7 +5305,7 @@
       </p:sp>
       <p:pic>
         <p:nvPicPr>
-          <p:cNvPr id="9" name="Picture 8" descr="7ced559aec939d71.png"/>
+          <p:cNvPr id="9" name="Picture 8" descr="e2be393dbf6293b1.png"/>
           <p:cNvPicPr>
             <a:picLocks noChangeAspect="1"/>
           </p:cNvPicPr>
@@ -5319,8 +5319,8 @@
         </p:blipFill>
         <p:spPr>
           <a:xfrm>
-            <a:off x="6908993" y="1648968"/>
-            <a:ext cx="926592" cy="277368"/>
+            <a:off x="6911660" y="1647825"/>
+            <a:ext cx="921258" cy="277368"/>
           </a:xfrm>
           <a:prstGeom prst="rect">
             <a:avLst/>
@@ -5335,7 +5335,7 @@
         </p:nvSpPr>
         <p:spPr>
           <a:xfrm>
-            <a:off x="7835585" y="1577340"/>
+            <a:off x="7832918" y="1577340"/>
             <a:ext cx="280301" cy="457200"/>
           </a:xfrm>
           <a:prstGeom prst="rect">
@@ -5370,7 +5370,7 @@
         </p:nvSpPr>
         <p:spPr>
           <a:xfrm>
-            <a:off x="3624528" y="2263140"/>
+            <a:off x="3624433" y="2263140"/>
             <a:ext cx="3745193" cy="457200"/>
           </a:xfrm>
           <a:prstGeom prst="rect">
@@ -5399,7 +5399,7 @@
       </p:sp>
       <p:pic>
         <p:nvPicPr>
-          <p:cNvPr id="12" name="Picture 11" descr="d10548f7154d5574.png"/>
+          <p:cNvPr id="12" name="Picture 11" descr="cecd9b8e3fec7cab.png"/>
           <p:cNvPicPr>
             <a:picLocks noChangeAspect="1"/>
           </p:cNvPicPr>
@@ -5413,8 +5413,8 @@
         </p:blipFill>
         <p:spPr>
           <a:xfrm>
-            <a:off x="7232562" y="2334768"/>
-            <a:ext cx="1161288" cy="277368"/>
+            <a:off x="7232467" y="2333625"/>
+            <a:ext cx="1161478" cy="277368"/>
           </a:xfrm>
           <a:prstGeom prst="rect">
             <a:avLst/>
@@ -5429,7 +5429,7 @@
         </p:nvSpPr>
         <p:spPr>
           <a:xfrm>
-            <a:off x="8393850" y="2263140"/>
+            <a:off x="8393945" y="2263140"/>
             <a:ext cx="280301" cy="457200"/>
           </a:xfrm>
           <a:prstGeom prst="rect">
@@ -5499,7 +5499,7 @@
         </p:nvSpPr>
         <p:spPr>
           <a:xfrm>
-            <a:off x="2862771" y="3488038"/>
+            <a:off x="2863723" y="3488038"/>
             <a:ext cx="943575" cy="457200"/>
           </a:xfrm>
           <a:prstGeom prst="rect">
@@ -5528,7 +5528,7 @@
       </p:sp>
       <p:pic>
         <p:nvPicPr>
-          <p:cNvPr id="16" name="Picture 15" descr="15aa4a684a6a761c.png"/>
+          <p:cNvPr id="16" name="Picture 15" descr="5ad8b479ac3620e2.png"/>
           <p:cNvPicPr>
             <a:picLocks noChangeAspect="1"/>
           </p:cNvPicPr>
@@ -5542,8 +5542,8 @@
         </p:blipFill>
         <p:spPr>
           <a:xfrm>
-            <a:off x="3669186" y="3599290"/>
-            <a:ext cx="155448" cy="231648"/>
+            <a:off x="3670139" y="3598147"/>
+            <a:ext cx="153543" cy="232791"/>
           </a:xfrm>
           <a:prstGeom prst="rect">
             <a:avLst/>
@@ -5558,7 +5558,7 @@
         </p:nvSpPr>
         <p:spPr>
           <a:xfrm>
-            <a:off x="3824634" y="3488038"/>
+            <a:off x="3823682" y="3488038"/>
             <a:ext cx="5611274" cy="457200"/>
           </a:xfrm>
           <a:prstGeom prst="rect">
@@ -5821,7 +5821,7 @@
         </p:nvSpPr>
         <p:spPr>
           <a:xfrm>
-            <a:off x="4182793" y="1577340"/>
+            <a:off x="4185460" y="1577340"/>
             <a:ext cx="2863359" cy="457200"/>
           </a:xfrm>
           <a:prstGeom prst="rect">
@@ -5850,7 +5850,7 @@
       </p:sp>
       <p:pic>
         <p:nvPicPr>
-          <p:cNvPr id="9" name="Picture 8" descr="53872f328334515b.png"/>
+          <p:cNvPr id="9" name="Picture 8" descr="55ca388921d9bd6d.png"/>
           <p:cNvPicPr>
             <a:picLocks noChangeAspect="1"/>
           </p:cNvPicPr>
@@ -5864,8 +5864,8 @@
         </p:blipFill>
         <p:spPr>
           <a:xfrm>
-            <a:off x="6908993" y="1648968"/>
-            <a:ext cx="926592" cy="277368"/>
+            <a:off x="6911660" y="1647825"/>
+            <a:ext cx="921258" cy="277368"/>
           </a:xfrm>
           <a:prstGeom prst="rect">
             <a:avLst/>
@@ -5880,7 +5880,7 @@
         </p:nvSpPr>
         <p:spPr>
           <a:xfrm>
-            <a:off x="7835585" y="1577340"/>
+            <a:off x="7832918" y="1577340"/>
             <a:ext cx="280301" cy="457200"/>
           </a:xfrm>
           <a:prstGeom prst="rect">
@@ -5915,7 +5915,7 @@
         </p:nvSpPr>
         <p:spPr>
           <a:xfrm>
-            <a:off x="3621480" y="2263140"/>
+            <a:off x="3623194" y="2263140"/>
             <a:ext cx="3745193" cy="457200"/>
           </a:xfrm>
           <a:prstGeom prst="rect">
@@ -5944,7 +5944,7 @@
       </p:sp>
       <p:pic>
         <p:nvPicPr>
-          <p:cNvPr id="12" name="Picture 11" descr="8031aa25e0fc3e7d.png"/>
+          <p:cNvPr id="12" name="Picture 11" descr="8fab6492a088d5ce.png"/>
           <p:cNvPicPr>
             <a:picLocks noChangeAspect="1"/>
           </p:cNvPicPr>
@@ -5958,8 +5958,8 @@
         </p:blipFill>
         <p:spPr>
           <a:xfrm>
-            <a:off x="7229514" y="2334768"/>
-            <a:ext cx="1167384" cy="277368"/>
+            <a:off x="7231228" y="2333625"/>
+            <a:ext cx="1163955" cy="277368"/>
           </a:xfrm>
           <a:prstGeom prst="rect">
             <a:avLst/>
@@ -5974,7 +5974,7 @@
         </p:nvSpPr>
         <p:spPr>
           <a:xfrm>
-            <a:off x="8396898" y="2263140"/>
+            <a:off x="8395183" y="2263140"/>
             <a:ext cx="280301" cy="457200"/>
           </a:xfrm>
           <a:prstGeom prst="rect">
@@ -6044,7 +6044,7 @@
         </p:nvSpPr>
         <p:spPr>
           <a:xfrm>
-            <a:off x="2862771" y="3488038"/>
+            <a:off x="2863723" y="3488038"/>
             <a:ext cx="943575" cy="457200"/>
           </a:xfrm>
           <a:prstGeom prst="rect">
@@ -6073,7 +6073,7 @@
       </p:sp>
       <p:pic>
         <p:nvPicPr>
-          <p:cNvPr id="16" name="Picture 15" descr="15aa4a684a6a761c.png"/>
+          <p:cNvPr id="16" name="Picture 15" descr="5ad8b479ac3620e2.png"/>
           <p:cNvPicPr>
             <a:picLocks noChangeAspect="1"/>
           </p:cNvPicPr>
@@ -6087,8 +6087,8 @@
         </p:blipFill>
         <p:spPr>
           <a:xfrm>
-            <a:off x="3669186" y="3599290"/>
-            <a:ext cx="155448" cy="231648"/>
+            <a:off x="3670139" y="3598147"/>
+            <a:ext cx="153543" cy="232791"/>
           </a:xfrm>
           <a:prstGeom prst="rect">
             <a:avLst/>
@@ -6103,7 +6103,7 @@
         </p:nvSpPr>
         <p:spPr>
           <a:xfrm>
-            <a:off x="3824634" y="3488038"/>
+            <a:off x="3823682" y="3488038"/>
             <a:ext cx="5611274" cy="457200"/>
           </a:xfrm>
           <a:prstGeom prst="rect">
@@ -6478,7 +6478,7 @@
       </p:sp>
       <p:pic>
         <p:nvPicPr>
-          <p:cNvPr id="9" name="Picture 8" descr="365db93adf7efc23.png"/>
+          <p:cNvPr id="9" name="Picture 8" descr="df787c7f4ce7736d.png"/>
           <p:cNvPicPr>
             <a:picLocks noChangeAspect="1"/>
           </p:cNvPicPr>
@@ -6492,8 +6492,8 @@
         </p:blipFill>
         <p:spPr>
           <a:xfrm>
-            <a:off x="7619763" y="1962911"/>
-            <a:ext cx="612648" cy="231648"/>
+            <a:off x="7619763" y="1961769"/>
+            <a:ext cx="611695" cy="232791"/>
           </a:xfrm>
           <a:prstGeom prst="rect">
             <a:avLst/>
@@ -6508,7 +6508,7 @@
         </p:nvSpPr>
         <p:spPr>
           <a:xfrm>
-            <a:off x="8232411" y="1851660"/>
+            <a:off x="8231458" y="1851660"/>
             <a:ext cx="280301" cy="457200"/>
           </a:xfrm>
           <a:prstGeom prst="rect">
@@ -6870,7 +6870,7 @@
       </p:sp>
       <p:pic>
         <p:nvPicPr>
-          <p:cNvPr id="9" name="Picture 8" descr="4b3d59f7957f5c02.png"/>
+          <p:cNvPr id="9" name="Picture 8" descr="bcf4e6c09f084e30.png"/>
           <p:cNvPicPr>
             <a:picLocks noChangeAspect="1"/>
           </p:cNvPicPr>
@@ -6884,8 +6884,8 @@
         </p:blipFill>
         <p:spPr>
           <a:xfrm>
-            <a:off x="7619763" y="1962911"/>
-            <a:ext cx="615696" cy="231648"/>
+            <a:off x="7619763" y="1961769"/>
+            <a:ext cx="614172" cy="232791"/>
           </a:xfrm>
           <a:prstGeom prst="rect">
             <a:avLst/>
@@ -6900,7 +6900,7 @@
         </p:nvSpPr>
         <p:spPr>
           <a:xfrm>
-            <a:off x="8235459" y="1851660"/>
+            <a:off x="8233935" y="1851660"/>
             <a:ext cx="280301" cy="457200"/>
           </a:xfrm>
           <a:prstGeom prst="rect">
@@ -7286,7 +7286,7 @@
       </p:sp>
       <p:pic>
         <p:nvPicPr>
-          <p:cNvPr id="9" name="Picture 8" descr="7ced559aec939d71.png"/>
+          <p:cNvPr id="9" name="Picture 8" descr="e2be393dbf6293b1.png"/>
           <p:cNvPicPr>
             <a:picLocks noChangeAspect="1"/>
           </p:cNvPicPr>
@@ -7300,8 +7300,8 @@
         </p:blipFill>
         <p:spPr>
           <a:xfrm>
-            <a:off x="4068046" y="1923287"/>
-            <a:ext cx="926592" cy="277368"/>
+            <a:off x="4068046" y="1922145"/>
+            <a:ext cx="921258" cy="277368"/>
           </a:xfrm>
           <a:prstGeom prst="rect">
             <a:avLst/>
@@ -7316,7 +7316,7 @@
         </p:nvSpPr>
         <p:spPr>
           <a:xfrm>
-            <a:off x="4994638" y="1851660"/>
+            <a:off x="4989304" y="1851660"/>
             <a:ext cx="2105866" cy="457200"/>
           </a:xfrm>
           <a:prstGeom prst="rect">
@@ -7345,7 +7345,7 @@
       </p:sp>
       <p:pic>
         <p:nvPicPr>
-          <p:cNvPr id="11" name="Picture 10" descr="365db93adf7efc23.png"/>
+          <p:cNvPr id="11" name="Picture 10" descr="df787c7f4ce7736d.png"/>
           <p:cNvPicPr>
             <a:picLocks noChangeAspect="1"/>
           </p:cNvPicPr>
@@ -7359,8 +7359,8 @@
         </p:blipFill>
         <p:spPr>
           <a:xfrm>
-            <a:off x="6963344" y="1962911"/>
-            <a:ext cx="612648" cy="231648"/>
+            <a:off x="6958010" y="1961769"/>
+            <a:ext cx="611695" cy="232791"/>
           </a:xfrm>
           <a:prstGeom prst="rect">
             <a:avLst/>
@@ -7375,7 +7375,7 @@
         </p:nvSpPr>
         <p:spPr>
           <a:xfrm>
-            <a:off x="7575992" y="1851660"/>
+            <a:off x="7569706" y="1851660"/>
             <a:ext cx="280301" cy="457200"/>
           </a:xfrm>
           <a:prstGeom prst="rect">
@@ -7737,7 +7737,7 @@
       </p:sp>
       <p:pic>
         <p:nvPicPr>
-          <p:cNvPr id="9" name="Picture 8" descr="53872f328334515b.png"/>
+          <p:cNvPr id="9" name="Picture 8" descr="55ca388921d9bd6d.png"/>
           <p:cNvPicPr>
             <a:picLocks noChangeAspect="1"/>
           </p:cNvPicPr>
@@ -7751,8 +7751,8 @@
         </p:blipFill>
         <p:spPr>
           <a:xfrm>
-            <a:off x="4068046" y="1923287"/>
-            <a:ext cx="926592" cy="277368"/>
+            <a:off x="4068046" y="1922145"/>
+            <a:ext cx="921258" cy="277368"/>
           </a:xfrm>
           <a:prstGeom prst="rect">
             <a:avLst/>
@@ -7767,7 +7767,7 @@
         </p:nvSpPr>
         <p:spPr>
           <a:xfrm>
-            <a:off x="4994638" y="1851660"/>
+            <a:off x="4989304" y="1851660"/>
             <a:ext cx="2105866" cy="457200"/>
           </a:xfrm>
           <a:prstGeom prst="rect">
@@ -7796,7 +7796,7 @@
       </p:sp>
       <p:pic>
         <p:nvPicPr>
-          <p:cNvPr id="11" name="Picture 10" descr="4b3d59f7957f5c02.png"/>
+          <p:cNvPr id="11" name="Picture 10" descr="bcf4e6c09f084e30.png"/>
           <p:cNvPicPr>
             <a:picLocks noChangeAspect="1"/>
           </p:cNvPicPr>
@@ -7810,8 +7810,8 @@
         </p:blipFill>
         <p:spPr>
           <a:xfrm>
-            <a:off x="6963344" y="1962911"/>
-            <a:ext cx="615696" cy="231648"/>
+            <a:off x="6958010" y="1961769"/>
+            <a:ext cx="614172" cy="232791"/>
           </a:xfrm>
           <a:prstGeom prst="rect">
             <a:avLst/>
@@ -7826,7 +7826,7 @@
         </p:nvSpPr>
         <p:spPr>
           <a:xfrm>
-            <a:off x="7579040" y="1851660"/>
+            <a:off x="7572182" y="1851660"/>
             <a:ext cx="280301" cy="457200"/>
           </a:xfrm>
           <a:prstGeom prst="rect">
@@ -8256,7 +8256,7 @@
       </p:sp>
       <p:pic>
         <p:nvPicPr>
-          <p:cNvPr id="10" name="Picture 9" descr="f53f316f2160c0ab.png"/>
+          <p:cNvPr id="10" name="Picture 9" descr="c5ba369a2497f72e.png"/>
           <p:cNvPicPr>
             <a:picLocks noChangeAspect="1"/>
           </p:cNvPicPr>
@@ -8270,8 +8270,8 @@
         </p:blipFill>
         <p:spPr>
           <a:xfrm>
-            <a:off x="4673306" y="2083117"/>
-            <a:ext cx="886968" cy="390144"/>
+            <a:off x="4673306" y="2096674"/>
+            <a:ext cx="847272" cy="372610"/>
           </a:xfrm>
           <a:prstGeom prst="rect">
             <a:avLst/>
@@ -8315,7 +8315,7 @@
       </p:sp>
       <p:pic>
         <p:nvPicPr>
-          <p:cNvPr id="12" name="Picture 11" descr="6eb818bbb8711f8f.png"/>
+          <p:cNvPr id="12" name="Picture 11" descr="33d30e37238e3f17.png"/>
           <p:cNvPicPr>
             <a:picLocks noChangeAspect="1"/>
           </p:cNvPicPr>
@@ -8329,8 +8329,8 @@
         </p:blipFill>
         <p:spPr>
           <a:xfrm>
-            <a:off x="4808588" y="2732341"/>
-            <a:ext cx="277368" cy="277368"/>
+            <a:off x="4808588" y="2742549"/>
+            <a:ext cx="265811" cy="265811"/>
           </a:xfrm>
           <a:prstGeom prst="rect">
             <a:avLst/>
@@ -8345,7 +8345,7 @@
         </p:nvSpPr>
         <p:spPr>
           <a:xfrm>
-            <a:off x="5085956" y="2665476"/>
+            <a:off x="5074399" y="2665476"/>
             <a:ext cx="1087500" cy="457200"/>
           </a:xfrm>
           <a:prstGeom prst="rect">
@@ -8374,7 +8374,7 @@
       </p:sp>
       <p:pic>
         <p:nvPicPr>
-          <p:cNvPr id="14" name="Picture 13" descr="9db8fd1d7925e6eb.png"/>
+          <p:cNvPr id="14" name="Picture 13" descr="20ade1fcd202f366.png"/>
           <p:cNvPicPr>
             <a:picLocks noChangeAspect="1"/>
           </p:cNvPicPr>
@@ -8388,8 +8388,8 @@
         </p:blipFill>
         <p:spPr>
           <a:xfrm>
-            <a:off x="6036297" y="2738437"/>
-            <a:ext cx="271272" cy="271272"/>
+            <a:off x="6024740" y="2744922"/>
+            <a:ext cx="261064" cy="263437"/>
           </a:xfrm>
           <a:prstGeom prst="rect">
             <a:avLst/>
@@ -8667,7 +8667,7 @@
         </p:nvSpPr>
         <p:spPr>
           <a:xfrm>
-            <a:off x="1234440" y="1917192"/>
+            <a:off x="1234440" y="1917096"/>
             <a:ext cx="2970766" cy="457200"/>
           </a:xfrm>
           <a:prstGeom prst="rect">
@@ -8696,7 +8696,7 @@
       </p:sp>
       <p:pic>
         <p:nvPicPr>
-          <p:cNvPr id="9" name="Picture 8" descr="8e6d7d6e505860ca.png"/>
+          <p:cNvPr id="9" name="Picture 8" descr="b19c87c68c435838.png"/>
           <p:cNvPicPr>
             <a:picLocks noChangeAspect="1"/>
           </p:cNvPicPr>
@@ -8710,8 +8710,8 @@
         </p:blipFill>
         <p:spPr>
           <a:xfrm>
-            <a:off x="4068046" y="1988819"/>
-            <a:ext cx="987552" cy="277368"/>
+            <a:off x="4068046" y="1987581"/>
+            <a:ext cx="988123" cy="277368"/>
           </a:xfrm>
           <a:prstGeom prst="rect">
             <a:avLst/>
@@ -8726,7 +8726,7 @@
         </p:nvSpPr>
         <p:spPr>
           <a:xfrm>
-            <a:off x="5055598" y="1917192"/>
+            <a:off x="5056169" y="1917096"/>
             <a:ext cx="2105866" cy="457200"/>
           </a:xfrm>
           <a:prstGeom prst="rect">
@@ -8755,7 +8755,7 @@
       </p:sp>
       <p:pic>
         <p:nvPicPr>
-          <p:cNvPr id="11" name="Picture 10" descr="3bcf9a6d74a2c992.png"/>
+          <p:cNvPr id="11" name="Picture 10" descr="025ad037a3e872cb.png"/>
           <p:cNvPicPr>
             <a:picLocks noChangeAspect="1"/>
           </p:cNvPicPr>
@@ -8769,8 +8769,8 @@
         </p:blipFill>
         <p:spPr>
           <a:xfrm>
-            <a:off x="7024304" y="1874519"/>
-            <a:ext cx="624840" cy="542544"/>
+            <a:off x="7024876" y="1874519"/>
+            <a:ext cx="624078" cy="542353"/>
           </a:xfrm>
           <a:prstGeom prst="rect">
             <a:avLst/>
@@ -8785,7 +8785,7 @@
         </p:nvSpPr>
         <p:spPr>
           <a:xfrm>
-            <a:off x="7649144" y="1917192"/>
+            <a:off x="7648954" y="1917096"/>
             <a:ext cx="280301" cy="457200"/>
           </a:xfrm>
           <a:prstGeom prst="rect">
@@ -8820,7 +8820,7 @@
         </p:nvSpPr>
         <p:spPr>
           <a:xfrm>
-            <a:off x="1234440" y="2618232"/>
+            <a:off x="1234440" y="2618041"/>
             <a:ext cx="10058400" cy="429370"/>
           </a:xfrm>
           <a:prstGeom prst="rect">
@@ -9118,7 +9118,7 @@
         </p:nvSpPr>
         <p:spPr>
           <a:xfrm>
-            <a:off x="1234440" y="1917192"/>
+            <a:off x="1234440" y="1918334"/>
             <a:ext cx="2970766" cy="457200"/>
           </a:xfrm>
           <a:prstGeom prst="rect">
@@ -9147,7 +9147,7 @@
       </p:sp>
       <p:pic>
         <p:nvPicPr>
-          <p:cNvPr id="9" name="Picture 8" descr="05de746722b060c4.png"/>
+          <p:cNvPr id="9" name="Picture 8" descr="7a8fa05a0e6e099a.png"/>
           <p:cNvPicPr>
             <a:picLocks noChangeAspect="1"/>
           </p:cNvPicPr>
@@ -9162,7 +9162,7 @@
         <p:spPr>
           <a:xfrm>
             <a:off x="4068046" y="1988819"/>
-            <a:ext cx="993648" cy="277368"/>
+            <a:ext cx="988123" cy="277368"/>
           </a:xfrm>
           <a:prstGeom prst="rect">
             <a:avLst/>
@@ -9177,7 +9177,7 @@
         </p:nvSpPr>
         <p:spPr>
           <a:xfrm>
-            <a:off x="5061694" y="1917192"/>
+            <a:off x="5056169" y="1918334"/>
             <a:ext cx="2105866" cy="457200"/>
           </a:xfrm>
           <a:prstGeom prst="rect">
@@ -9206,7 +9206,7 @@
       </p:sp>
       <p:pic>
         <p:nvPicPr>
-          <p:cNvPr id="11" name="Picture 10" descr="f7228653a96dd5cd.png"/>
+          <p:cNvPr id="11" name="Picture 10" descr="343adb895dd9d070.png"/>
           <p:cNvPicPr>
             <a:picLocks noChangeAspect="1"/>
           </p:cNvPicPr>
@@ -9220,8 +9220,8 @@
         </p:blipFill>
         <p:spPr>
           <a:xfrm>
-            <a:off x="7030400" y="1874519"/>
-            <a:ext cx="621792" cy="542544"/>
+            <a:off x="7024876" y="1874519"/>
+            <a:ext cx="621601" cy="544830"/>
           </a:xfrm>
           <a:prstGeom prst="rect">
             <a:avLst/>
@@ -9236,7 +9236,7 @@
         </p:nvSpPr>
         <p:spPr>
           <a:xfrm>
-            <a:off x="7652192" y="1917192"/>
+            <a:off x="7646477" y="1918334"/>
             <a:ext cx="280301" cy="457200"/>
           </a:xfrm>
           <a:prstGeom prst="rect">
@@ -9271,7 +9271,7 @@
         </p:nvSpPr>
         <p:spPr>
           <a:xfrm>
-            <a:off x="1234440" y="2618232"/>
+            <a:off x="1234440" y="2620518"/>
             <a:ext cx="10058400" cy="429370"/>
           </a:xfrm>
           <a:prstGeom prst="rect">
@@ -9314,7 +9314,7 @@
         </p:blipFill>
         <p:spPr>
           <a:xfrm>
-            <a:off x="4401311" y="3276202"/>
+            <a:off x="4401311" y="3278488"/>
             <a:ext cx="3474720" cy="612648"/>
           </a:xfrm>
           <a:prstGeom prst="rect">
@@ -9631,7 +9631,7 @@
       </p:sp>
       <p:pic>
         <p:nvPicPr>
-          <p:cNvPr id="9" name="Picture 8" descr="6285ccdfa38694a2.png"/>
+          <p:cNvPr id="9" name="Picture 8" descr="53750b0735fbfcbb.png"/>
           <p:cNvPicPr>
             <a:picLocks noChangeAspect="1"/>
           </p:cNvPicPr>
@@ -9645,8 +9645,8 @@
         </p:blipFill>
         <p:spPr>
           <a:xfrm>
-            <a:off x="4068046" y="1923287"/>
-            <a:ext cx="944880" cy="277368"/>
+            <a:off x="4068046" y="1922145"/>
+            <a:ext cx="941069" cy="277368"/>
           </a:xfrm>
           <a:prstGeom prst="rect">
             <a:avLst/>
@@ -9661,7 +9661,7 @@
         </p:nvSpPr>
         <p:spPr>
           <a:xfrm>
-            <a:off x="5012926" y="1851660"/>
+            <a:off x="5009116" y="1851660"/>
             <a:ext cx="2105866" cy="457200"/>
           </a:xfrm>
           <a:prstGeom prst="rect">
@@ -9690,7 +9690,7 @@
       </p:sp>
       <p:pic>
         <p:nvPicPr>
-          <p:cNvPr id="11" name="Picture 10" descr="0937735c0d6e3897.png"/>
+          <p:cNvPr id="11" name="Picture 10" descr="8058f93241672fda.png"/>
           <p:cNvPicPr>
             <a:picLocks noChangeAspect="1"/>
           </p:cNvPicPr>
@@ -9704,8 +9704,8 @@
         </p:blipFill>
         <p:spPr>
           <a:xfrm>
-            <a:off x="6981632" y="1965960"/>
-            <a:ext cx="603504" cy="234696"/>
+            <a:off x="6977822" y="1964245"/>
+            <a:ext cx="604266" cy="235267"/>
           </a:xfrm>
           <a:prstGeom prst="rect">
             <a:avLst/>
@@ -9720,7 +9720,7 @@
         </p:nvSpPr>
         <p:spPr>
           <a:xfrm>
-            <a:off x="7585136" y="1851660"/>
+            <a:off x="7582088" y="1851660"/>
             <a:ext cx="280301" cy="457200"/>
           </a:xfrm>
           <a:prstGeom prst="rect">
@@ -10318,7 +10318,7 @@
       </p:sp>
       <p:pic>
         <p:nvPicPr>
-          <p:cNvPr id="9" name="Picture 8" descr="090d1f48e1a71801.png"/>
+          <p:cNvPr id="9" name="Picture 8" descr="b2d2e2a1dc911413.png"/>
           <p:cNvPicPr>
             <a:picLocks noChangeAspect="1"/>
           </p:cNvPicPr>
@@ -10332,8 +10332,8 @@
         </p:blipFill>
         <p:spPr>
           <a:xfrm>
-            <a:off x="4068046" y="1923287"/>
-            <a:ext cx="944880" cy="277368"/>
+            <a:off x="4068046" y="1922145"/>
+            <a:ext cx="941069" cy="277368"/>
           </a:xfrm>
           <a:prstGeom prst="rect">
             <a:avLst/>
@@ -10348,7 +10348,7 @@
         </p:nvSpPr>
         <p:spPr>
           <a:xfrm>
-            <a:off x="5012926" y="1851660"/>
+            <a:off x="5009116" y="1851660"/>
             <a:ext cx="2105866" cy="457200"/>
           </a:xfrm>
           <a:prstGeom prst="rect">
@@ -10377,7 +10377,7 @@
       </p:sp>
       <p:pic>
         <p:nvPicPr>
-          <p:cNvPr id="11" name="Picture 10" descr="065fb73e082dfec6.png"/>
+          <p:cNvPr id="11" name="Picture 10" descr="217c156fbd4cb6e4.png"/>
           <p:cNvPicPr>
             <a:picLocks noChangeAspect="1"/>
           </p:cNvPicPr>
@@ -10391,8 +10391,8 @@
         </p:blipFill>
         <p:spPr>
           <a:xfrm>
-            <a:off x="6981632" y="1965960"/>
-            <a:ext cx="606552" cy="234696"/>
+            <a:off x="6977822" y="1964245"/>
+            <a:ext cx="606742" cy="235267"/>
           </a:xfrm>
           <a:prstGeom prst="rect">
             <a:avLst/>
@@ -10407,7 +10407,7 @@
         </p:nvSpPr>
         <p:spPr>
           <a:xfrm>
-            <a:off x="7588184" y="1851660"/>
+            <a:off x="7584565" y="1851660"/>
             <a:ext cx="280301" cy="457200"/>
           </a:xfrm>
           <a:prstGeom prst="rect">
@@ -10802,7 +10802,7 @@
       </p:sp>
       <p:pic>
         <p:nvPicPr>
-          <p:cNvPr id="9" name="Picture 8" descr="d7fc11fcb5d46be6.png"/>
+          <p:cNvPr id="9" name="Picture 8" descr="987bd4d974e8c549.png"/>
           <p:cNvPicPr>
             <a:picLocks noChangeAspect="1"/>
           </p:cNvPicPr>
@@ -10816,8 +10816,8 @@
         </p:blipFill>
         <p:spPr>
           <a:xfrm>
-            <a:off x="4068046" y="1923287"/>
-            <a:ext cx="789432" cy="277368"/>
+            <a:off x="4068046" y="1922145"/>
+            <a:ext cx="787527" cy="277368"/>
           </a:xfrm>
           <a:prstGeom prst="rect">
             <a:avLst/>
@@ -10832,7 +10832,7 @@
         </p:nvSpPr>
         <p:spPr>
           <a:xfrm>
-            <a:off x="4857478" y="1851660"/>
+            <a:off x="4855573" y="1851660"/>
             <a:ext cx="2105866" cy="457200"/>
           </a:xfrm>
           <a:prstGeom prst="rect">
@@ -10861,7 +10861,7 @@
       </p:sp>
       <p:pic>
         <p:nvPicPr>
-          <p:cNvPr id="11" name="Picture 10" descr="981713b65bc0abe8.png"/>
+          <p:cNvPr id="11" name="Picture 10" descr="a3bca5590aab4c8c.png"/>
           <p:cNvPicPr>
             <a:picLocks noChangeAspect="1"/>
           </p:cNvPicPr>
@@ -10875,8 +10875,8 @@
         </p:blipFill>
         <p:spPr>
           <a:xfrm>
-            <a:off x="6826184" y="1965960"/>
-            <a:ext cx="838200" cy="234696"/>
+            <a:off x="6824279" y="1964245"/>
+            <a:ext cx="837057" cy="235267"/>
           </a:xfrm>
           <a:prstGeom prst="rect">
             <a:avLst/>
@@ -10891,7 +10891,7 @@
         </p:nvSpPr>
         <p:spPr>
           <a:xfrm>
-            <a:off x="7664384" y="1851660"/>
+            <a:off x="7661336" y="1851660"/>
             <a:ext cx="280301" cy="457200"/>
           </a:xfrm>
           <a:prstGeom prst="rect">
@@ -11253,7 +11253,7 @@
       </p:sp>
       <p:pic>
         <p:nvPicPr>
-          <p:cNvPr id="9" name="Picture 8" descr="206fc3ce5420f406.png"/>
+          <p:cNvPr id="9" name="Picture 8" descr="f4873bb202c1b738.png"/>
           <p:cNvPicPr>
             <a:picLocks noChangeAspect="1"/>
           </p:cNvPicPr>
@@ -11267,8 +11267,8 @@
         </p:blipFill>
         <p:spPr>
           <a:xfrm>
-            <a:off x="4068046" y="1923287"/>
-            <a:ext cx="789432" cy="277368"/>
+            <a:off x="4068046" y="1922145"/>
+            <a:ext cx="787527" cy="277368"/>
           </a:xfrm>
           <a:prstGeom prst="rect">
             <a:avLst/>
@@ -11283,7 +11283,7 @@
         </p:nvSpPr>
         <p:spPr>
           <a:xfrm>
-            <a:off x="4857478" y="1851660"/>
+            <a:off x="4855573" y="1851660"/>
             <a:ext cx="2105866" cy="457200"/>
           </a:xfrm>
           <a:prstGeom prst="rect">
@@ -11312,7 +11312,7 @@
       </p:sp>
       <p:pic>
         <p:nvPicPr>
-          <p:cNvPr id="11" name="Picture 10" descr="beaaa9fd83ee57b2.png"/>
+          <p:cNvPr id="11" name="Picture 10" descr="c0265cf83ecf017f.png"/>
           <p:cNvPicPr>
             <a:picLocks noChangeAspect="1"/>
           </p:cNvPicPr>
@@ -11326,8 +11326,8 @@
         </p:blipFill>
         <p:spPr>
           <a:xfrm>
-            <a:off x="6826184" y="1965960"/>
-            <a:ext cx="838200" cy="234696"/>
+            <a:off x="6824279" y="1964245"/>
+            <a:ext cx="839533" cy="235267"/>
           </a:xfrm>
           <a:prstGeom prst="rect">
             <a:avLst/>
@@ -11342,7 +11342,7 @@
         </p:nvSpPr>
         <p:spPr>
           <a:xfrm>
-            <a:off x="7664384" y="1851660"/>
+            <a:off x="7663813" y="1851660"/>
             <a:ext cx="280301" cy="457200"/>
           </a:xfrm>
           <a:prstGeom prst="rect">
@@ -12365,7 +12365,7 @@
       </p:sp>
       <p:pic>
         <p:nvPicPr>
-          <p:cNvPr id="10" name="Picture 9" descr="458baf8972180269.png"/>
+          <p:cNvPr id="10" name="Picture 9" descr="9771a717e91a6ef7.png"/>
           <p:cNvPicPr>
             <a:picLocks noChangeAspect="1"/>
           </p:cNvPicPr>
@@ -12379,8 +12379,8 @@
         </p:blipFill>
         <p:spPr>
           <a:xfrm>
-            <a:off x="3225813" y="3071588"/>
-            <a:ext cx="1453896" cy="618744"/>
+            <a:off x="3165722" y="3071588"/>
+            <a:ext cx="1574022" cy="667313"/>
           </a:xfrm>
           <a:prstGeom prst="rect">
             <a:avLst/>
@@ -12395,7 +12395,7 @@
         </p:nvSpPr>
         <p:spPr>
           <a:xfrm>
-            <a:off x="4679709" y="3152360"/>
+            <a:off x="4739744" y="3176645"/>
             <a:ext cx="4505933" cy="457200"/>
           </a:xfrm>
           <a:prstGeom prst="rect">
@@ -12424,7 +12424,7 @@
       </p:sp>
       <p:pic>
         <p:nvPicPr>
-          <p:cNvPr id="12" name="Picture 11" descr="2edc07f1b53d6d08.png"/>
+          <p:cNvPr id="12" name="Picture 11" descr="16227b3b3d8b10ab.png"/>
           <p:cNvPicPr>
             <a:picLocks noChangeAspect="1"/>
           </p:cNvPicPr>
@@ -12438,8 +12438,8 @@
         </p:blipFill>
         <p:spPr>
           <a:xfrm>
-            <a:off x="3225813" y="3860449"/>
-            <a:ext cx="853440" cy="301752"/>
+            <a:off x="3165722" y="3878610"/>
+            <a:ext cx="924663" cy="332160"/>
           </a:xfrm>
           <a:prstGeom prst="rect">
             <a:avLst/>
@@ -12454,7 +12454,7 @@
         </p:nvSpPr>
         <p:spPr>
           <a:xfrm>
-            <a:off x="4079253" y="3795488"/>
+            <a:off x="4090385" y="3844058"/>
             <a:ext cx="2864708" cy="457200"/>
           </a:xfrm>
           <a:prstGeom prst="rect">
@@ -12752,7 +12752,7 @@
         </p:nvSpPr>
         <p:spPr>
           <a:xfrm>
-            <a:off x="1234440" y="1917192"/>
+            <a:off x="1234440" y="1917096"/>
             <a:ext cx="7338824" cy="457200"/>
           </a:xfrm>
           <a:prstGeom prst="rect">
@@ -12781,7 +12781,7 @@
       </p:sp>
       <p:pic>
         <p:nvPicPr>
-          <p:cNvPr id="9" name="Picture 8" descr="3bcf9a6d74a2c992.png"/>
+          <p:cNvPr id="9" name="Picture 8" descr="025ad037a3e872cb.png"/>
           <p:cNvPicPr>
             <a:picLocks noChangeAspect="1"/>
           </p:cNvPicPr>
@@ -12796,7 +12796,7 @@
         <p:spPr>
           <a:xfrm>
             <a:off x="8436104" y="1874519"/>
-            <a:ext cx="624840" cy="542544"/>
+            <a:ext cx="624078" cy="542353"/>
           </a:xfrm>
           <a:prstGeom prst="rect">
             <a:avLst/>
@@ -12811,7 +12811,7 @@
         </p:nvSpPr>
         <p:spPr>
           <a:xfrm>
-            <a:off x="9060944" y="1917192"/>
+            <a:off x="9060182" y="1917096"/>
             <a:ext cx="280301" cy="457200"/>
           </a:xfrm>
           <a:prstGeom prst="rect">
@@ -12846,7 +12846,7 @@
         </p:nvSpPr>
         <p:spPr>
           <a:xfrm>
-            <a:off x="1234440" y="2595372"/>
+            <a:off x="1234440" y="2595181"/>
             <a:ext cx="1803529" cy="457200"/>
           </a:xfrm>
           <a:prstGeom prst="rect">
@@ -12875,7 +12875,7 @@
       </p:sp>
       <p:pic>
         <p:nvPicPr>
-          <p:cNvPr id="12" name="Picture 11" descr="050f2fbd0e1306f9.png"/>
+          <p:cNvPr id="12" name="Picture 11" descr="215415fd0592ff66.png"/>
           <p:cNvPicPr>
             <a:picLocks noChangeAspect="1"/>
           </p:cNvPicPr>
@@ -12889,8 +12889,8 @@
         </p:blipFill>
         <p:spPr>
           <a:xfrm>
-            <a:off x="2900809" y="2667000"/>
-            <a:ext cx="972311" cy="277368"/>
+            <a:off x="2900809" y="2665666"/>
+            <a:ext cx="970787" cy="277368"/>
           </a:xfrm>
           <a:prstGeom prst="rect">
             <a:avLst/>
@@ -12905,7 +12905,7 @@
         </p:nvSpPr>
         <p:spPr>
           <a:xfrm>
-            <a:off x="3873121" y="2595372"/>
+            <a:off x="3871597" y="2595181"/>
             <a:ext cx="280301" cy="457200"/>
           </a:xfrm>
           <a:prstGeom prst="rect">
@@ -12940,7 +12940,7 @@
         </p:nvSpPr>
         <p:spPr>
           <a:xfrm>
-            <a:off x="1234440" y="3230880"/>
+            <a:off x="1234440" y="3230689"/>
             <a:ext cx="10058400" cy="429370"/>
           </a:xfrm>
           <a:prstGeom prst="rect">
@@ -13238,7 +13238,7 @@
         </p:nvSpPr>
         <p:spPr>
           <a:xfrm>
-            <a:off x="1234440" y="1917192"/>
+            <a:off x="1234440" y="1918334"/>
             <a:ext cx="7338824" cy="457200"/>
           </a:xfrm>
           <a:prstGeom prst="rect">
@@ -13267,7 +13267,7 @@
       </p:sp>
       <p:pic>
         <p:nvPicPr>
-          <p:cNvPr id="9" name="Picture 8" descr="f7228653a96dd5cd.png"/>
+          <p:cNvPr id="9" name="Picture 8" descr="343adb895dd9d070.png"/>
           <p:cNvPicPr>
             <a:picLocks noChangeAspect="1"/>
           </p:cNvPicPr>
@@ -13282,7 +13282,7 @@
         <p:spPr>
           <a:xfrm>
             <a:off x="8436104" y="1874519"/>
-            <a:ext cx="621792" cy="542544"/>
+            <a:ext cx="621601" cy="544830"/>
           </a:xfrm>
           <a:prstGeom prst="rect">
             <a:avLst/>
@@ -13297,7 +13297,7 @@
         </p:nvSpPr>
         <p:spPr>
           <a:xfrm>
-            <a:off x="9057896" y="1917192"/>
+            <a:off x="9057706" y="1918334"/>
             <a:ext cx="280301" cy="457200"/>
           </a:xfrm>
           <a:prstGeom prst="rect">
@@ -13332,7 +13332,7 @@
         </p:nvSpPr>
         <p:spPr>
           <a:xfrm>
-            <a:off x="1234440" y="2595372"/>
+            <a:off x="1234440" y="2597658"/>
             <a:ext cx="1803529" cy="457200"/>
           </a:xfrm>
           <a:prstGeom prst="rect">
@@ -13361,7 +13361,7 @@
       </p:sp>
       <p:pic>
         <p:nvPicPr>
-          <p:cNvPr id="12" name="Picture 11" descr="7eb340286a1c1c14.png"/>
+          <p:cNvPr id="12" name="Picture 11" descr="2662ac61bc7a43ea.png"/>
           <p:cNvPicPr>
             <a:picLocks noChangeAspect="1"/>
           </p:cNvPicPr>
@@ -13375,8 +13375,8 @@
         </p:blipFill>
         <p:spPr>
           <a:xfrm>
-            <a:off x="2900809" y="2667000"/>
-            <a:ext cx="975360" cy="277368"/>
+            <a:off x="2900809" y="2668143"/>
+            <a:ext cx="973264" cy="277368"/>
           </a:xfrm>
           <a:prstGeom prst="rect">
             <a:avLst/>
@@ -13391,7 +13391,7 @@
         </p:nvSpPr>
         <p:spPr>
           <a:xfrm>
-            <a:off x="3876169" y="2595372"/>
+            <a:off x="3874073" y="2597658"/>
             <a:ext cx="280301" cy="457200"/>
           </a:xfrm>
           <a:prstGeom prst="rect">
@@ -13426,7 +13426,7 @@
         </p:nvSpPr>
         <p:spPr>
           <a:xfrm>
-            <a:off x="1234440" y="3230880"/>
+            <a:off x="1234440" y="3233166"/>
             <a:ext cx="10058400" cy="429370"/>
           </a:xfrm>
           <a:prstGeom prst="rect">
@@ -13469,7 +13469,7 @@
         </p:blipFill>
         <p:spPr>
           <a:xfrm>
-            <a:off x="5065775" y="3888850"/>
+            <a:off x="5065775" y="3891136"/>
             <a:ext cx="2145792" cy="606552"/>
           </a:xfrm>
           <a:prstGeom prst="rect">
@@ -13493,7 +13493,7 @@
         </p:blipFill>
         <p:spPr>
           <a:xfrm>
-            <a:off x="5065775" y="4623418"/>
+            <a:off x="5065775" y="4625704"/>
             <a:ext cx="2042160" cy="603504"/>
           </a:xfrm>
           <a:prstGeom prst="rect">
@@ -13509,7 +13509,7 @@
         </p:nvSpPr>
         <p:spPr>
           <a:xfrm>
-            <a:off x="777240" y="5364082"/>
+            <a:off x="777240" y="5366368"/>
             <a:ext cx="10607040" cy="548640"/>
           </a:xfrm>
           <a:prstGeom prst="rect">
@@ -13880,7 +13880,7 @@
       </p:sp>
       <p:pic>
         <p:nvPicPr>
-          <p:cNvPr id="11" name="Picture 10" descr="f53f316f2160c0ab.png"/>
+          <p:cNvPr id="11" name="Picture 10" descr="c5ba369a2497f72e.png"/>
           <p:cNvPicPr>
             <a:picLocks noChangeAspect="1"/>
           </p:cNvPicPr>
@@ -13894,8 +13894,8 @@
         </p:blipFill>
         <p:spPr>
           <a:xfrm>
-            <a:off x="4673306" y="2540317"/>
-            <a:ext cx="886968" cy="390144"/>
+            <a:off x="4673306" y="2553874"/>
+            <a:ext cx="847272" cy="372610"/>
           </a:xfrm>
           <a:prstGeom prst="rect">
             <a:avLst/>
@@ -13910,7 +13910,7 @@
         </p:nvSpPr>
         <p:spPr>
           <a:xfrm>
-            <a:off x="6108914" y="2510028"/>
+            <a:off x="6069218" y="2510028"/>
             <a:ext cx="536528" cy="457200"/>
           </a:xfrm>
           <a:prstGeom prst="rect">
@@ -13974,7 +13974,7 @@
       </p:sp>
       <p:pic>
         <p:nvPicPr>
-          <p:cNvPr id="14" name="Picture 13" descr="6eb818bbb8711f8f.png"/>
+          <p:cNvPr id="14" name="Picture 13" descr="33d30e37238e3f17.png"/>
           <p:cNvPicPr>
             <a:picLocks noChangeAspect="1"/>
           </p:cNvPicPr>
@@ -13988,8 +13988,8 @@
         </p:blipFill>
         <p:spPr>
           <a:xfrm>
-            <a:off x="4808588" y="3189541"/>
-            <a:ext cx="277368" cy="277368"/>
+            <a:off x="4808588" y="3199749"/>
+            <a:ext cx="265811" cy="265811"/>
           </a:xfrm>
           <a:prstGeom prst="rect">
             <a:avLst/>
@@ -14004,7 +14004,7 @@
         </p:nvSpPr>
         <p:spPr>
           <a:xfrm>
-            <a:off x="5085956" y="3122676"/>
+            <a:off x="5074399" y="3122676"/>
             <a:ext cx="1087500" cy="457200"/>
           </a:xfrm>
           <a:prstGeom prst="rect">
@@ -14033,7 +14033,7 @@
       </p:sp>
       <p:pic>
         <p:nvPicPr>
-          <p:cNvPr id="16" name="Picture 15" descr="9db8fd1d7925e6eb.png"/>
+          <p:cNvPr id="16" name="Picture 15" descr="20ade1fcd202f366.png"/>
           <p:cNvPicPr>
             <a:picLocks noChangeAspect="1"/>
           </p:cNvPicPr>
@@ -14047,8 +14047,8 @@
         </p:blipFill>
         <p:spPr>
           <a:xfrm>
-            <a:off x="6036297" y="3195637"/>
-            <a:ext cx="271272" cy="271272"/>
+            <a:off x="6024740" y="3202122"/>
+            <a:ext cx="261064" cy="263437"/>
           </a:xfrm>
           <a:prstGeom prst="rect">
             <a:avLst/>
@@ -14063,7 +14063,7 @@
         </p:nvSpPr>
         <p:spPr>
           <a:xfrm>
-            <a:off x="6856209" y="3122676"/>
+            <a:off x="6834444" y="3122676"/>
             <a:ext cx="1465122" cy="457200"/>
           </a:xfrm>
           <a:prstGeom prst="rect">
@@ -14434,7 +14434,7 @@
       </p:sp>
       <p:pic>
         <p:nvPicPr>
-          <p:cNvPr id="9" name="Picture 8" descr="fc22e08664d80881.png"/>
+          <p:cNvPr id="9" name="Picture 8" descr="6f3278420c632641.png"/>
           <p:cNvPicPr>
             <a:picLocks noChangeAspect="1"/>
           </p:cNvPicPr>
@@ -14448,8 +14448,8 @@
         </p:blipFill>
         <p:spPr>
           <a:xfrm>
-            <a:off x="9295558" y="1965960"/>
-            <a:ext cx="853440" cy="234696"/>
+            <a:off x="9295558" y="1964245"/>
+            <a:ext cx="851916" cy="235267"/>
           </a:xfrm>
           <a:prstGeom prst="rect">
             <a:avLst/>
@@ -14464,7 +14464,7 @@
         </p:nvSpPr>
         <p:spPr>
           <a:xfrm>
-            <a:off x="10148998" y="1851660"/>
+            <a:off x="10147474" y="1851660"/>
             <a:ext cx="280301" cy="457200"/>
           </a:xfrm>
           <a:prstGeom prst="rect">
@@ -14826,7 +14826,7 @@
       </p:sp>
       <p:pic>
         <p:nvPicPr>
-          <p:cNvPr id="9" name="Picture 8" descr="39705602679ca241.png"/>
+          <p:cNvPr id="9" name="Picture 8" descr="0faca9856b4fca4c.png"/>
           <p:cNvPicPr>
             <a:picLocks noChangeAspect="1"/>
           </p:cNvPicPr>
@@ -14840,8 +14840,8 @@
         </p:blipFill>
         <p:spPr>
           <a:xfrm>
-            <a:off x="9295558" y="1965960"/>
-            <a:ext cx="853440" cy="234696"/>
+            <a:off x="9295558" y="1964245"/>
+            <a:ext cx="854392" cy="235267"/>
           </a:xfrm>
           <a:prstGeom prst="rect">
             <a:avLst/>
@@ -14856,7 +14856,7 @@
         </p:nvSpPr>
         <p:spPr>
           <a:xfrm>
-            <a:off x="10148998" y="1851660"/>
+            <a:off x="10149951" y="1851660"/>
             <a:ext cx="280301" cy="457200"/>
           </a:xfrm>
           <a:prstGeom prst="rect">
@@ -17789,8 +17789,8 @@
         </p:blipFill>
         <p:spPr>
           <a:xfrm>
-            <a:off x="1143000" y="1892410"/>
-            <a:ext cx="359664" cy="338328"/>
+            <a:off x="1143000" y="1950941"/>
+            <a:ext cx="267874" cy="251983"/>
           </a:xfrm>
           <a:prstGeom prst="rect">
             <a:avLst/>
@@ -17805,7 +17805,7 @@
         </p:nvSpPr>
         <p:spPr>
           <a:xfrm>
-            <a:off x="1502664" y="1869550"/>
+            <a:off x="1410874" y="1869550"/>
             <a:ext cx="9984578" cy="457200"/>
           </a:xfrm>
           <a:prstGeom prst="rect">
@@ -17883,8 +17883,8 @@
         </p:blipFill>
         <p:spPr>
           <a:xfrm>
-            <a:off x="1629992" y="2401045"/>
-            <a:ext cx="188976" cy="286512"/>
+            <a:off x="1629992" y="2474165"/>
+            <a:ext cx="140747" cy="213391"/>
           </a:xfrm>
           <a:prstGeom prst="rect">
             <a:avLst/>
@@ -17977,8 +17977,8 @@
         </p:blipFill>
         <p:spPr>
           <a:xfrm>
-            <a:off x="8112116" y="3443063"/>
-            <a:ext cx="188976" cy="286512"/>
+            <a:off x="8112116" y="3516184"/>
+            <a:ext cx="140747" cy="213391"/>
           </a:xfrm>
           <a:prstGeom prst="rect">
             <a:avLst/>
@@ -18071,8 +18071,8 @@
         </p:blipFill>
         <p:spPr>
           <a:xfrm>
-            <a:off x="6682757" y="4461079"/>
-            <a:ext cx="359664" cy="338328"/>
+            <a:off x="6682757" y="4519610"/>
+            <a:ext cx="267874" cy="251983"/>
           </a:xfrm>
           <a:prstGeom prst="rect">
             <a:avLst/>
@@ -19382,7 +19382,7 @@
         </p:nvSpPr>
         <p:spPr>
           <a:xfrm>
-            <a:off x="2845313" y="2080260"/>
+            <a:off x="2844932" y="2080260"/>
             <a:ext cx="5861407" cy="457200"/>
           </a:xfrm>
           <a:prstGeom prst="rect">
@@ -19411,7 +19411,7 @@
       </p:sp>
       <p:pic>
         <p:nvPicPr>
-          <p:cNvPr id="9" name="Picture 8" descr="0937735c0d6e3897.png"/>
+          <p:cNvPr id="9" name="Picture 8" descr="8058f93241672fda.png"/>
           <p:cNvPicPr>
             <a:picLocks noChangeAspect="1"/>
           </p:cNvPicPr>
@@ -19425,8 +19425,8 @@
         </p:blipFill>
         <p:spPr>
           <a:xfrm>
-            <a:off x="8569560" y="2194560"/>
-            <a:ext cx="603504" cy="234696"/>
+            <a:off x="8569179" y="2192845"/>
+            <a:ext cx="604266" cy="235267"/>
           </a:xfrm>
           <a:prstGeom prst="rect">
             <a:avLst/>
@@ -19441,7 +19441,7 @@
         </p:nvSpPr>
         <p:spPr>
           <a:xfrm>
-            <a:off x="9173064" y="2080260"/>
+            <a:off x="9173445" y="2080260"/>
             <a:ext cx="280301" cy="457200"/>
           </a:xfrm>
           <a:prstGeom prst="rect">

--- a/a7/build/out/u5/A7 5.02 Scale Factor Perimeter and Area - Slides.pptx
+++ b/a7/build/out/u5/A7 5.02 Scale Factor Perimeter and Area - Slides.pptx
@@ -12379,8 +12379,8 @@
         </p:blipFill>
         <p:spPr>
           <a:xfrm>
-            <a:off x="3165722" y="3071588"/>
-            <a:ext cx="1574022" cy="667313"/>
+            <a:off x="3226146" y="3071588"/>
+            <a:ext cx="1452943" cy="615981"/>
           </a:xfrm>
           <a:prstGeom prst="rect">
             <a:avLst/>
@@ -12395,7 +12395,7 @@
         </p:nvSpPr>
         <p:spPr>
           <a:xfrm>
-            <a:off x="4739744" y="3176645"/>
+            <a:off x="4679090" y="3150979"/>
             <a:ext cx="4505933" cy="457200"/>
           </a:xfrm>
           <a:prstGeom prst="rect">
@@ -12438,8 +12438,8 @@
         </p:blipFill>
         <p:spPr>
           <a:xfrm>
-            <a:off x="3165722" y="3878610"/>
-            <a:ext cx="924663" cy="332160"/>
+            <a:off x="3226146" y="3852829"/>
+            <a:ext cx="853535" cy="306609"/>
           </a:xfrm>
           <a:prstGeom prst="rect">
             <a:avLst/>
@@ -12454,7 +12454,7 @@
         </p:nvSpPr>
         <p:spPr>
           <a:xfrm>
-            <a:off x="4090385" y="3844058"/>
+            <a:off x="4079681" y="3792726"/>
             <a:ext cx="2864708" cy="457200"/>
           </a:xfrm>
           <a:prstGeom prst="rect">

--- a/a7/build/out/u5/A7 5.02 Scale Factor Perimeter and Area - Slides.pptx
+++ b/a7/build/out/u5/A7 5.02 Scale Factor Perimeter and Area - Slides.pptx
@@ -18403,7 +18403,7 @@
       </p:pic>
       <p:pic>
         <p:nvPicPr>
-          <p:cNvPr id="11" name="Picture 10" descr="6b863e3a4ccebf87.png"/>
+          <p:cNvPr id="11" name="Picture 10" descr="cc9f29a22390a24d.png"/>
           <p:cNvPicPr>
             <a:picLocks noChangeAspect="1"/>
           </p:cNvPicPr>
@@ -18417,8 +18417,8 @@
         </p:blipFill>
         <p:spPr>
           <a:xfrm>
-            <a:off x="3671315" y="4572862"/>
-            <a:ext cx="4818888" cy="289560"/>
+            <a:off x="3494532" y="4572862"/>
+            <a:ext cx="5172456" cy="289560"/>
           </a:xfrm>
           <a:prstGeom prst="rect">
             <a:avLst/>
@@ -18749,7 +18749,7 @@
       </p:pic>
       <p:pic>
         <p:nvPicPr>
-          <p:cNvPr id="11" name="Picture 10" descr="3072c2893096e23b.png"/>
+          <p:cNvPr id="11" name="Picture 10" descr="73de71b52ec561e8.png"/>
           <p:cNvPicPr>
             <a:picLocks noChangeAspect="1"/>
           </p:cNvPicPr>
@@ -18763,8 +18763,8 @@
         </p:blipFill>
         <p:spPr>
           <a:xfrm>
-            <a:off x="3506724" y="4847726"/>
-            <a:ext cx="5148072" cy="341376"/>
+            <a:off x="3329940" y="4847726"/>
+            <a:ext cx="5501640" cy="341376"/>
           </a:xfrm>
           <a:prstGeom prst="rect">
             <a:avLst/>
@@ -19071,7 +19071,7 @@
       </p:cxnSp>
       <p:pic>
         <p:nvPicPr>
-          <p:cNvPr id="10" name="Picture 9" descr="8fb9d177b623a6cc.png"/>
+          <p:cNvPr id="10" name="Picture 9" descr="66d3ae8b19a23483.png"/>
           <p:cNvPicPr>
             <a:picLocks noChangeAspect="1"/>
           </p:cNvPicPr>
@@ -19085,8 +19085,8 @@
         </p:blipFill>
         <p:spPr>
           <a:xfrm>
-            <a:off x="2016251" y="1993391"/>
-            <a:ext cx="8129016" cy="676656"/>
+            <a:off x="1661160" y="2194560"/>
+            <a:ext cx="8839200" cy="676656"/>
           </a:xfrm>
           <a:prstGeom prst="rect">
             <a:avLst/>
@@ -19101,7 +19101,7 @@
         </p:nvSpPr>
         <p:spPr>
           <a:xfrm>
-            <a:off x="987552" y="3008375"/>
+            <a:off x="987552" y="3410712"/>
             <a:ext cx="10131551" cy="475488"/>
           </a:xfrm>
           <a:prstGeom prst="rect">

--- a/a7/build/out/u5/A7 5.02 Scale Factor Perimeter and Area - Slides.pptx
+++ b/a7/build/out/u5/A7 5.02 Scale Factor Perimeter and Area - Slides.pptx
@@ -17400,7 +17400,7 @@
                 </a:solidFill>
                 <a:latin typeface="Lexend"/>
               </a:rPr>
-              <a:t>Every skill listed is required, to a SmartScore of 67. Due at the start of the next class.</a:t>
+              <a:t>Every skill listed is required, to a SmartScore of 67. Due by the Unit 5 test.</a:t>
             </a:r>
           </a:p>
         </p:txBody>
